--- a/final_presentation.pptx
+++ b/final_presentation.pptx
@@ -7,6 +7,8 @@
   <p:sldIdLst>
     <p:sldId id="256" r:id="rId2"/>
     <p:sldId id="257" r:id="rId3"/>
+    <p:sldId id="258" r:id="rId4"/>
+    <p:sldId id="259" r:id="rId5"/>
   </p:sldIdLst>
   <p:sldSz cx="12192000" cy="6858000"/>
   <p:notesSz cx="6858000" cy="9144000"/>
@@ -105,7 +107,526 @@
       </a:defRPr>
     </a:lvl9pPr>
   </p:defaultTextStyle>
+  <p:extLst>
+    <p:ext uri="{EFAFB233-063F-42B5-8137-9DF3F51BA10A}">
+      <p15:sldGuideLst xmlns:p15="http://schemas.microsoft.com/office/powerpoint/2012/main"/>
+    </p:ext>
+  </p:extLst>
 </p:presentation>
+</file>
+
+<file path=ppt/revisionInfo.xml><?xml version="1.0" encoding="utf-8"?>
+<p1510:revInfo xmlns:a="http://schemas.openxmlformats.org/drawingml/2006/main" xmlns:r="http://schemas.openxmlformats.org/officeDocument/2006/relationships" xmlns:p1510="http://schemas.microsoft.com/office/powerpoint/2015/10/main">
+  <p1510:revLst>
+    <p1510:client id="{747E1717-23E1-43D3-83B0-C82DC0CCB609}" v="44" dt="2026-01-23T16:18:01.826"/>
+  </p1510:revLst>
+</p1510:revInfo>
+</file>
+
+<file path=ppt/changesInfos/changesInfo1.xml><?xml version="1.0" encoding="utf-8"?>
+<pc:chgInfo xmlns:a="http://schemas.openxmlformats.org/drawingml/2006/main" xmlns:r="http://schemas.openxmlformats.org/officeDocument/2006/relationships" xmlns:ac="http://schemas.microsoft.com/office/drawing/2013/main/command" xmlns:pc="http://schemas.microsoft.com/office/powerpoint/2013/main/command">
+  <pc:docChgLst>
+    <pc:chgData name="Mathilde Annette Nicole Roulleau" userId="4ab294c6-1984-4b16-bc43-8e77deede0e4" providerId="ADAL" clId="{79810BCC-BAA2-4D46-8788-90936CCE2327}"/>
+    <pc:docChg chg="undo custSel addSld modSld">
+      <pc:chgData name="Mathilde Annette Nicole Roulleau" userId="4ab294c6-1984-4b16-bc43-8e77deede0e4" providerId="ADAL" clId="{79810BCC-BAA2-4D46-8788-90936CCE2327}" dt="2026-01-23T16:46:47.413" v="696" actId="1076"/>
+      <pc:docMkLst>
+        <pc:docMk/>
+      </pc:docMkLst>
+      <pc:sldChg chg="addSp modSp mod">
+        <pc:chgData name="Mathilde Annette Nicole Roulleau" userId="4ab294c6-1984-4b16-bc43-8e77deede0e4" providerId="ADAL" clId="{79810BCC-BAA2-4D46-8788-90936CCE2327}" dt="2026-01-23T10:38:03.797" v="378" actId="403"/>
+        <pc:sldMkLst>
+          <pc:docMk/>
+          <pc:sldMk cId="3050701782" sldId="256"/>
+        </pc:sldMkLst>
+        <pc:spChg chg="add mod">
+          <ac:chgData name="Mathilde Annette Nicole Roulleau" userId="4ab294c6-1984-4b16-bc43-8e77deede0e4" providerId="ADAL" clId="{79810BCC-BAA2-4D46-8788-90936CCE2327}" dt="2026-01-23T10:38:03.797" v="378" actId="403"/>
+          <ac:spMkLst>
+            <pc:docMk/>
+            <pc:sldMk cId="3050701782" sldId="256"/>
+            <ac:spMk id="2" creationId="{4E82D06B-C607-2F2F-C56F-3C111CD212C7}"/>
+          </ac:spMkLst>
+        </pc:spChg>
+        <pc:spChg chg="add mod ord">
+          <ac:chgData name="Mathilde Annette Nicole Roulleau" userId="4ab294c6-1984-4b16-bc43-8e77deede0e4" providerId="ADAL" clId="{79810BCC-BAA2-4D46-8788-90936CCE2327}" dt="2026-01-23T10:36:35.132" v="370" actId="2085"/>
+          <ac:spMkLst>
+            <pc:docMk/>
+            <pc:sldMk cId="3050701782" sldId="256"/>
+            <ac:spMk id="3" creationId="{F0D4A331-2558-686E-2E09-96E96794A2D1}"/>
+          </ac:spMkLst>
+        </pc:spChg>
+        <pc:spChg chg="mod">
+          <ac:chgData name="Mathilde Annette Nicole Roulleau" userId="4ab294c6-1984-4b16-bc43-8e77deede0e4" providerId="ADAL" clId="{79810BCC-BAA2-4D46-8788-90936CCE2327}" dt="2026-01-23T10:35:58.415" v="366" actId="207"/>
+          <ac:spMkLst>
+            <pc:docMk/>
+            <pc:sldMk cId="3050701782" sldId="256"/>
+            <ac:spMk id="4" creationId="{AA48F40B-9B3E-6BDD-DA3E-627F2D529871}"/>
+          </ac:spMkLst>
+        </pc:spChg>
+        <pc:picChg chg="add mod">
+          <ac:chgData name="Mathilde Annette Nicole Roulleau" userId="4ab294c6-1984-4b16-bc43-8e77deede0e4" providerId="ADAL" clId="{79810BCC-BAA2-4D46-8788-90936CCE2327}" dt="2026-01-23T10:36:22.231" v="368" actId="1076"/>
+          <ac:picMkLst>
+            <pc:docMk/>
+            <pc:sldMk cId="3050701782" sldId="256"/>
+            <ac:picMk id="5" creationId="{0F804417-C8BC-28EB-FE95-FFC9E4A6F988}"/>
+          </ac:picMkLst>
+        </pc:picChg>
+      </pc:sldChg>
+      <pc:sldChg chg="addSp delSp modSp mod">
+        <pc:chgData name="Mathilde Annette Nicole Roulleau" userId="4ab294c6-1984-4b16-bc43-8e77deede0e4" providerId="ADAL" clId="{79810BCC-BAA2-4D46-8788-90936CCE2327}" dt="2026-01-23T14:27:48.906" v="562" actId="20577"/>
+        <pc:sldMkLst>
+          <pc:docMk/>
+          <pc:sldMk cId="3910591626" sldId="257"/>
+        </pc:sldMkLst>
+        <pc:spChg chg="add del mod">
+          <ac:chgData name="Mathilde Annette Nicole Roulleau" userId="4ab294c6-1984-4b16-bc43-8e77deede0e4" providerId="ADAL" clId="{79810BCC-BAA2-4D46-8788-90936CCE2327}" dt="2026-01-23T10:27:56.689" v="234" actId="478"/>
+          <ac:spMkLst>
+            <pc:docMk/>
+            <pc:sldMk cId="3910591626" sldId="257"/>
+            <ac:spMk id="3" creationId="{35E2E0A0-7313-D127-E130-3594EE6D5255}"/>
+          </ac:spMkLst>
+        </pc:spChg>
+        <pc:spChg chg="mod">
+          <ac:chgData name="Mathilde Annette Nicole Roulleau" userId="4ab294c6-1984-4b16-bc43-8e77deede0e4" providerId="ADAL" clId="{79810BCC-BAA2-4D46-8788-90936CCE2327}" dt="2026-01-23T14:27:48.906" v="562" actId="20577"/>
+          <ac:spMkLst>
+            <pc:docMk/>
+            <pc:sldMk cId="3910591626" sldId="257"/>
+            <ac:spMk id="5" creationId="{23C1E6CD-7227-E32E-4F39-2CD1E4D06EE9}"/>
+          </ac:spMkLst>
+        </pc:spChg>
+        <pc:spChg chg="add mod">
+          <ac:chgData name="Mathilde Annette Nicole Roulleau" userId="4ab294c6-1984-4b16-bc43-8e77deede0e4" providerId="ADAL" clId="{79810BCC-BAA2-4D46-8788-90936CCE2327}" dt="2026-01-23T10:29:25.817" v="241" actId="1076"/>
+          <ac:spMkLst>
+            <pc:docMk/>
+            <pc:sldMk cId="3910591626" sldId="257"/>
+            <ac:spMk id="8" creationId="{5E8CAE8A-3BB1-B17E-2524-268DDB11AF60}"/>
+          </ac:spMkLst>
+        </pc:spChg>
+        <pc:spChg chg="mod">
+          <ac:chgData name="Mathilde Annette Nicole Roulleau" userId="4ab294c6-1984-4b16-bc43-8e77deede0e4" providerId="ADAL" clId="{79810BCC-BAA2-4D46-8788-90936CCE2327}" dt="2026-01-23T10:29:25.817" v="241" actId="1076"/>
+          <ac:spMkLst>
+            <pc:docMk/>
+            <pc:sldMk cId="3910591626" sldId="257"/>
+            <ac:spMk id="12" creationId="{5BCF3795-CC11-B6B6-2372-6207742CD238}"/>
+          </ac:spMkLst>
+        </pc:spChg>
+        <pc:spChg chg="del mod">
+          <ac:chgData name="Mathilde Annette Nicole Roulleau" userId="4ab294c6-1984-4b16-bc43-8e77deede0e4" providerId="ADAL" clId="{79810BCC-BAA2-4D46-8788-90936CCE2327}" dt="2026-01-23T10:27:56.689" v="234" actId="478"/>
+          <ac:spMkLst>
+            <pc:docMk/>
+            <pc:sldMk cId="3910591626" sldId="257"/>
+            <ac:spMk id="17" creationId="{7AA7B2FD-D0EE-6B90-361D-E33E4E1DDA52}"/>
+          </ac:spMkLst>
+        </pc:spChg>
+        <pc:spChg chg="del mod">
+          <ac:chgData name="Mathilde Annette Nicole Roulleau" userId="4ab294c6-1984-4b16-bc43-8e77deede0e4" providerId="ADAL" clId="{79810BCC-BAA2-4D46-8788-90936CCE2327}" dt="2026-01-23T10:27:56.689" v="234" actId="478"/>
+          <ac:spMkLst>
+            <pc:docMk/>
+            <pc:sldMk cId="3910591626" sldId="257"/>
+            <ac:spMk id="19" creationId="{35BDED98-BC4A-2278-14CE-77419DE36844}"/>
+          </ac:spMkLst>
+        </pc:spChg>
+        <pc:graphicFrameChg chg="mod modGraphic">
+          <ac:chgData name="Mathilde Annette Nicole Roulleau" userId="4ab294c6-1984-4b16-bc43-8e77deede0e4" providerId="ADAL" clId="{79810BCC-BAA2-4D46-8788-90936CCE2327}" dt="2026-01-23T10:30:06.773" v="251" actId="1076"/>
+          <ac:graphicFrameMkLst>
+            <pc:docMk/>
+            <pc:sldMk cId="3910591626" sldId="257"/>
+            <ac:graphicFrameMk id="9" creationId="{C2AD98F7-9F31-7CD9-F44B-80FAB0C98626}"/>
+          </ac:graphicFrameMkLst>
+        </pc:graphicFrameChg>
+        <pc:picChg chg="mod">
+          <ac:chgData name="Mathilde Annette Nicole Roulleau" userId="4ab294c6-1984-4b16-bc43-8e77deede0e4" providerId="ADAL" clId="{79810BCC-BAA2-4D46-8788-90936CCE2327}" dt="2026-01-23T10:31:06.571" v="275" actId="1076"/>
+          <ac:picMkLst>
+            <pc:docMk/>
+            <pc:sldMk cId="3910591626" sldId="257"/>
+            <ac:picMk id="14" creationId="{B158616D-E38F-3802-67DA-DC95E12F8E7C}"/>
+          </ac:picMkLst>
+        </pc:picChg>
+        <pc:cxnChg chg="add mod">
+          <ac:chgData name="Mathilde Annette Nicole Roulleau" userId="4ab294c6-1984-4b16-bc43-8e77deede0e4" providerId="ADAL" clId="{79810BCC-BAA2-4D46-8788-90936CCE2327}" dt="2026-01-23T10:29:25.817" v="241" actId="1076"/>
+          <ac:cxnSpMkLst>
+            <pc:docMk/>
+            <pc:sldMk cId="3910591626" sldId="257"/>
+            <ac:cxnSpMk id="7" creationId="{2585CA58-23D2-ACFA-2D24-A49FBB5AB4A3}"/>
+          </ac:cxnSpMkLst>
+        </pc:cxnChg>
+        <pc:cxnChg chg="mod">
+          <ac:chgData name="Mathilde Annette Nicole Roulleau" userId="4ab294c6-1984-4b16-bc43-8e77deede0e4" providerId="ADAL" clId="{79810BCC-BAA2-4D46-8788-90936CCE2327}" dt="2026-01-23T10:29:25.817" v="241" actId="1076"/>
+          <ac:cxnSpMkLst>
+            <pc:docMk/>
+            <pc:sldMk cId="3910591626" sldId="257"/>
+            <ac:cxnSpMk id="11" creationId="{C602F555-7EF0-5718-DB1D-E8B092A23808}"/>
+          </ac:cxnSpMkLst>
+        </pc:cxnChg>
+        <pc:cxnChg chg="del mod">
+          <ac:chgData name="Mathilde Annette Nicole Roulleau" userId="4ab294c6-1984-4b16-bc43-8e77deede0e4" providerId="ADAL" clId="{79810BCC-BAA2-4D46-8788-90936CCE2327}" dt="2026-01-23T10:27:56.689" v="234" actId="478"/>
+          <ac:cxnSpMkLst>
+            <pc:docMk/>
+            <pc:sldMk cId="3910591626" sldId="257"/>
+            <ac:cxnSpMk id="15" creationId="{75DDB692-2B07-1585-2608-CB4B6A287BC0}"/>
+          </ac:cxnSpMkLst>
+        </pc:cxnChg>
+        <pc:cxnChg chg="del">
+          <ac:chgData name="Mathilde Annette Nicole Roulleau" userId="4ab294c6-1984-4b16-bc43-8e77deede0e4" providerId="ADAL" clId="{79810BCC-BAA2-4D46-8788-90936CCE2327}" dt="2026-01-23T10:27:56.689" v="234" actId="478"/>
+          <ac:cxnSpMkLst>
+            <pc:docMk/>
+            <pc:sldMk cId="3910591626" sldId="257"/>
+            <ac:cxnSpMk id="18" creationId="{60D4E8A7-C6AF-9BCC-C174-9D5171AE77EB}"/>
+          </ac:cxnSpMkLst>
+        </pc:cxnChg>
+      </pc:sldChg>
+      <pc:sldChg chg="addSp delSp modSp add mod">
+        <pc:chgData name="Mathilde Annette Nicole Roulleau" userId="4ab294c6-1984-4b16-bc43-8e77deede0e4" providerId="ADAL" clId="{79810BCC-BAA2-4D46-8788-90936CCE2327}" dt="2026-01-23T10:30:58.196" v="274" actId="1076"/>
+        <pc:sldMkLst>
+          <pc:docMk/>
+          <pc:sldMk cId="3938232735" sldId="258"/>
+        </pc:sldMkLst>
+        <pc:spChg chg="mod">
+          <ac:chgData name="Mathilde Annette Nicole Roulleau" userId="4ab294c6-1984-4b16-bc43-8e77deede0e4" providerId="ADAL" clId="{79810BCC-BAA2-4D46-8788-90936CCE2327}" dt="2026-01-23T10:30:54.239" v="273" actId="1036"/>
+          <ac:spMkLst>
+            <pc:docMk/>
+            <pc:sldMk cId="3938232735" sldId="258"/>
+            <ac:spMk id="3" creationId="{B5CDBD7F-3EB6-B564-9E1B-30AB9F159168}"/>
+          </ac:spMkLst>
+        </pc:spChg>
+        <pc:spChg chg="del">
+          <ac:chgData name="Mathilde Annette Nicole Roulleau" userId="4ab294c6-1984-4b16-bc43-8e77deede0e4" providerId="ADAL" clId="{79810BCC-BAA2-4D46-8788-90936CCE2327}" dt="2026-01-23T10:18:19.532" v="96" actId="478"/>
+          <ac:spMkLst>
+            <pc:docMk/>
+            <pc:sldMk cId="3938232735" sldId="258"/>
+            <ac:spMk id="5" creationId="{5E1E9AB1-8D8F-39A9-884F-7E744085142E}"/>
+          </ac:spMkLst>
+        </pc:spChg>
+        <pc:spChg chg="del">
+          <ac:chgData name="Mathilde Annette Nicole Roulleau" userId="4ab294c6-1984-4b16-bc43-8e77deede0e4" providerId="ADAL" clId="{79810BCC-BAA2-4D46-8788-90936CCE2327}" dt="2026-01-23T10:18:22.407" v="97" actId="478"/>
+          <ac:spMkLst>
+            <pc:docMk/>
+            <pc:sldMk cId="3938232735" sldId="258"/>
+            <ac:spMk id="8" creationId="{13418115-888E-6AE2-C8A3-51C8A1E800EA}"/>
+          </ac:spMkLst>
+        </pc:spChg>
+        <pc:spChg chg="del">
+          <ac:chgData name="Mathilde Annette Nicole Roulleau" userId="4ab294c6-1984-4b16-bc43-8e77deede0e4" providerId="ADAL" clId="{79810BCC-BAA2-4D46-8788-90936CCE2327}" dt="2026-01-23T10:18:22.407" v="97" actId="478"/>
+          <ac:spMkLst>
+            <pc:docMk/>
+            <pc:sldMk cId="3938232735" sldId="258"/>
+            <ac:spMk id="12" creationId="{8A5E6921-B0AD-20F0-CF62-092B63722A88}"/>
+          </ac:spMkLst>
+        </pc:spChg>
+        <pc:spChg chg="add mod">
+          <ac:chgData name="Mathilde Annette Nicole Roulleau" userId="4ab294c6-1984-4b16-bc43-8e77deede0e4" providerId="ADAL" clId="{79810BCC-BAA2-4D46-8788-90936CCE2327}" dt="2026-01-23T10:30:54.239" v="273" actId="1036"/>
+          <ac:spMkLst>
+            <pc:docMk/>
+            <pc:sldMk cId="3938232735" sldId="258"/>
+            <ac:spMk id="13" creationId="{CB1BC903-3E47-AA81-67F8-6A2614126569}"/>
+          </ac:spMkLst>
+        </pc:spChg>
+        <pc:spChg chg="mod">
+          <ac:chgData name="Mathilde Annette Nicole Roulleau" userId="4ab294c6-1984-4b16-bc43-8e77deede0e4" providerId="ADAL" clId="{79810BCC-BAA2-4D46-8788-90936CCE2327}" dt="2026-01-23T10:30:54.239" v="273" actId="1036"/>
+          <ac:spMkLst>
+            <pc:docMk/>
+            <pc:sldMk cId="3938232735" sldId="258"/>
+            <ac:spMk id="17" creationId="{546AF0F5-19C5-14A0-1E08-5AE2180122FE}"/>
+          </ac:spMkLst>
+        </pc:spChg>
+        <pc:spChg chg="mod">
+          <ac:chgData name="Mathilde Annette Nicole Roulleau" userId="4ab294c6-1984-4b16-bc43-8e77deede0e4" providerId="ADAL" clId="{79810BCC-BAA2-4D46-8788-90936CCE2327}" dt="2026-01-23T10:30:54.239" v="273" actId="1036"/>
+          <ac:spMkLst>
+            <pc:docMk/>
+            <pc:sldMk cId="3938232735" sldId="258"/>
+            <ac:spMk id="19" creationId="{D7161293-4E5E-1E6B-FD57-516EC0032CD1}"/>
+          </ac:spMkLst>
+        </pc:spChg>
+        <pc:spChg chg="add del">
+          <ac:chgData name="Mathilde Annette Nicole Roulleau" userId="4ab294c6-1984-4b16-bc43-8e77deede0e4" providerId="ADAL" clId="{79810BCC-BAA2-4D46-8788-90936CCE2327}" dt="2026-01-23T10:30:25.390" v="254" actId="22"/>
+          <ac:spMkLst>
+            <pc:docMk/>
+            <pc:sldMk cId="3938232735" sldId="258"/>
+            <ac:spMk id="20" creationId="{56AE926F-F94C-B17C-7A82-495163011379}"/>
+          </ac:spMkLst>
+        </pc:spChg>
+        <pc:graphicFrameChg chg="del mod">
+          <ac:chgData name="Mathilde Annette Nicole Roulleau" userId="4ab294c6-1984-4b16-bc43-8e77deede0e4" providerId="ADAL" clId="{79810BCC-BAA2-4D46-8788-90936CCE2327}" dt="2026-01-23T10:30:23.169" v="252" actId="478"/>
+          <ac:graphicFrameMkLst>
+            <pc:docMk/>
+            <pc:sldMk cId="3938232735" sldId="258"/>
+            <ac:graphicFrameMk id="9" creationId="{2DD14A8E-02BD-4A06-DD34-AC7037789532}"/>
+          </ac:graphicFrameMkLst>
+        </pc:graphicFrameChg>
+        <pc:graphicFrameChg chg="add mod">
+          <ac:chgData name="Mathilde Annette Nicole Roulleau" userId="4ab294c6-1984-4b16-bc43-8e77deede0e4" providerId="ADAL" clId="{79810BCC-BAA2-4D46-8788-90936CCE2327}" dt="2026-01-23T10:30:42.412" v="257" actId="1076"/>
+          <ac:graphicFrameMkLst>
+            <pc:docMk/>
+            <pc:sldMk cId="3938232735" sldId="258"/>
+            <ac:graphicFrameMk id="21" creationId="{1E4C2140-FA9D-8C0A-62EF-CC2C3FBBDA28}"/>
+          </ac:graphicFrameMkLst>
+        </pc:graphicFrameChg>
+        <pc:picChg chg="mod">
+          <ac:chgData name="Mathilde Annette Nicole Roulleau" userId="4ab294c6-1984-4b16-bc43-8e77deede0e4" providerId="ADAL" clId="{79810BCC-BAA2-4D46-8788-90936CCE2327}" dt="2026-01-23T10:30:58.196" v="274" actId="1076"/>
+          <ac:picMkLst>
+            <pc:docMk/>
+            <pc:sldMk cId="3938232735" sldId="258"/>
+            <ac:picMk id="14" creationId="{70F2578D-1451-04D8-AD1F-BCE606955405}"/>
+          </ac:picMkLst>
+        </pc:picChg>
+        <pc:cxnChg chg="add mod">
+          <ac:chgData name="Mathilde Annette Nicole Roulleau" userId="4ab294c6-1984-4b16-bc43-8e77deede0e4" providerId="ADAL" clId="{79810BCC-BAA2-4D46-8788-90936CCE2327}" dt="2026-01-23T10:30:54.239" v="273" actId="1036"/>
+          <ac:cxnSpMkLst>
+            <pc:docMk/>
+            <pc:sldMk cId="3938232735" sldId="258"/>
+            <ac:cxnSpMk id="2" creationId="{6C94FF7C-D713-4A2F-C298-2363024DDDB9}"/>
+          </ac:cxnSpMkLst>
+        </pc:cxnChg>
+        <pc:cxnChg chg="add mod">
+          <ac:chgData name="Mathilde Annette Nicole Roulleau" userId="4ab294c6-1984-4b16-bc43-8e77deede0e4" providerId="ADAL" clId="{79810BCC-BAA2-4D46-8788-90936CCE2327}" dt="2026-01-23T10:30:54.239" v="273" actId="1036"/>
+          <ac:cxnSpMkLst>
+            <pc:docMk/>
+            <pc:sldMk cId="3938232735" sldId="258"/>
+            <ac:cxnSpMk id="6" creationId="{16A5F2F2-25A4-51B3-7AC6-736D6FE1E87F}"/>
+          </ac:cxnSpMkLst>
+        </pc:cxnChg>
+        <pc:cxnChg chg="del">
+          <ac:chgData name="Mathilde Annette Nicole Roulleau" userId="4ab294c6-1984-4b16-bc43-8e77deede0e4" providerId="ADAL" clId="{79810BCC-BAA2-4D46-8788-90936CCE2327}" dt="2026-01-23T10:18:22.407" v="97" actId="478"/>
+          <ac:cxnSpMkLst>
+            <pc:docMk/>
+            <pc:sldMk cId="3938232735" sldId="258"/>
+            <ac:cxnSpMk id="7" creationId="{FF31535A-D26C-073D-47A1-090F4E9EE9BF}"/>
+          </ac:cxnSpMkLst>
+        </pc:cxnChg>
+        <pc:cxnChg chg="add mod">
+          <ac:chgData name="Mathilde Annette Nicole Roulleau" userId="4ab294c6-1984-4b16-bc43-8e77deede0e4" providerId="ADAL" clId="{79810BCC-BAA2-4D46-8788-90936CCE2327}" dt="2026-01-23T10:30:54.239" v="273" actId="1036"/>
+          <ac:cxnSpMkLst>
+            <pc:docMk/>
+            <pc:sldMk cId="3938232735" sldId="258"/>
+            <ac:cxnSpMk id="10" creationId="{16F926EE-E02B-97B4-06F3-F7BDD8261526}"/>
+          </ac:cxnSpMkLst>
+        </pc:cxnChg>
+        <pc:cxnChg chg="del">
+          <ac:chgData name="Mathilde Annette Nicole Roulleau" userId="4ab294c6-1984-4b16-bc43-8e77deede0e4" providerId="ADAL" clId="{79810BCC-BAA2-4D46-8788-90936CCE2327}" dt="2026-01-23T10:18:22.407" v="97" actId="478"/>
+          <ac:cxnSpMkLst>
+            <pc:docMk/>
+            <pc:sldMk cId="3938232735" sldId="258"/>
+            <ac:cxnSpMk id="11" creationId="{06428AAD-DCED-F830-BA98-ABBFD2E8F7C2}"/>
+          </ac:cxnSpMkLst>
+        </pc:cxnChg>
+        <pc:cxnChg chg="mod">
+          <ac:chgData name="Mathilde Annette Nicole Roulleau" userId="4ab294c6-1984-4b16-bc43-8e77deede0e4" providerId="ADAL" clId="{79810BCC-BAA2-4D46-8788-90936CCE2327}" dt="2026-01-23T10:30:54.239" v="273" actId="1036"/>
+          <ac:cxnSpMkLst>
+            <pc:docMk/>
+            <pc:sldMk cId="3938232735" sldId="258"/>
+            <ac:cxnSpMk id="15" creationId="{2FD49BC3-E363-D15F-0DFB-E2BEE855E0E0}"/>
+          </ac:cxnSpMkLst>
+        </pc:cxnChg>
+        <pc:cxnChg chg="del mod">
+          <ac:chgData name="Mathilde Annette Nicole Roulleau" userId="4ab294c6-1984-4b16-bc43-8e77deede0e4" providerId="ADAL" clId="{79810BCC-BAA2-4D46-8788-90936CCE2327}" dt="2026-01-23T10:19:35.986" v="119" actId="478"/>
+          <ac:cxnSpMkLst>
+            <pc:docMk/>
+            <pc:sldMk cId="3938232735" sldId="258"/>
+            <ac:cxnSpMk id="18" creationId="{ACDCDC92-0592-CA50-45CC-44D2B97A1E69}"/>
+          </ac:cxnSpMkLst>
+        </pc:cxnChg>
+      </pc:sldChg>
+      <pc:sldChg chg="addSp delSp modSp add mod">
+        <pc:chgData name="Mathilde Annette Nicole Roulleau" userId="4ab294c6-1984-4b16-bc43-8e77deede0e4" providerId="ADAL" clId="{79810BCC-BAA2-4D46-8788-90936CCE2327}" dt="2026-01-23T16:46:47.413" v="696" actId="1076"/>
+        <pc:sldMkLst>
+          <pc:docMk/>
+          <pc:sldMk cId="857520673" sldId="259"/>
+        </pc:sldMkLst>
+        <pc:spChg chg="del">
+          <ac:chgData name="Mathilde Annette Nicole Roulleau" userId="4ab294c6-1984-4b16-bc43-8e77deede0e4" providerId="ADAL" clId="{79810BCC-BAA2-4D46-8788-90936CCE2327}" dt="2026-01-23T10:32:15.668" v="293" actId="478"/>
+          <ac:spMkLst>
+            <pc:docMk/>
+            <pc:sldMk cId="857520673" sldId="259"/>
+            <ac:spMk id="3" creationId="{6E51D51C-FF15-D889-E0CE-EB3C9B16CE23}"/>
+          </ac:spMkLst>
+        </pc:spChg>
+        <pc:spChg chg="mod">
+          <ac:chgData name="Mathilde Annette Nicole Roulleau" userId="4ab294c6-1984-4b16-bc43-8e77deede0e4" providerId="ADAL" clId="{79810BCC-BAA2-4D46-8788-90936CCE2327}" dt="2026-01-23T15:51:24.542" v="613" actId="1035"/>
+          <ac:spMkLst>
+            <pc:docMk/>
+            <pc:sldMk cId="857520673" sldId="259"/>
+            <ac:spMk id="4" creationId="{E243952B-D51D-8CF0-72CF-7E98F6A0F91A}"/>
+          </ac:spMkLst>
+        </pc:spChg>
+        <pc:spChg chg="add mod">
+          <ac:chgData name="Mathilde Annette Nicole Roulleau" userId="4ab294c6-1984-4b16-bc43-8e77deede0e4" providerId="ADAL" clId="{79810BCC-BAA2-4D46-8788-90936CCE2327}" dt="2026-01-23T16:45:55.848" v="689" actId="1076"/>
+          <ac:spMkLst>
+            <pc:docMk/>
+            <pc:sldMk cId="857520673" sldId="259"/>
+            <ac:spMk id="5" creationId="{46779A8C-C184-1FDA-6731-D89C427FC157}"/>
+          </ac:spMkLst>
+        </pc:spChg>
+        <pc:spChg chg="add mod">
+          <ac:chgData name="Mathilde Annette Nicole Roulleau" userId="4ab294c6-1984-4b16-bc43-8e77deede0e4" providerId="ADAL" clId="{79810BCC-BAA2-4D46-8788-90936CCE2327}" dt="2026-01-23T16:45:06.153" v="681" actId="113"/>
+          <ac:spMkLst>
+            <pc:docMk/>
+            <pc:sldMk cId="857520673" sldId="259"/>
+            <ac:spMk id="11" creationId="{26B7E9F9-D128-3CD8-E1A2-74F7892D8382}"/>
+          </ac:spMkLst>
+        </pc:spChg>
+        <pc:spChg chg="del">
+          <ac:chgData name="Mathilde Annette Nicole Roulleau" userId="4ab294c6-1984-4b16-bc43-8e77deede0e4" providerId="ADAL" clId="{79810BCC-BAA2-4D46-8788-90936CCE2327}" dt="2026-01-23T10:32:15.668" v="293" actId="478"/>
+          <ac:spMkLst>
+            <pc:docMk/>
+            <pc:sldMk cId="857520673" sldId="259"/>
+            <ac:spMk id="13" creationId="{3CFC85A0-2F41-1DB6-ADB5-C47F2E4BC4D9}"/>
+          </ac:spMkLst>
+        </pc:spChg>
+        <pc:spChg chg="add mod">
+          <ac:chgData name="Mathilde Annette Nicole Roulleau" userId="4ab294c6-1984-4b16-bc43-8e77deede0e4" providerId="ADAL" clId="{79810BCC-BAA2-4D46-8788-90936CCE2327}" dt="2026-01-23T16:46:28.736" v="695" actId="1076"/>
+          <ac:spMkLst>
+            <pc:docMk/>
+            <pc:sldMk cId="857520673" sldId="259"/>
+            <ac:spMk id="16" creationId="{864534BD-9D68-D42D-52A5-9F467EE1E6D5}"/>
+          </ac:spMkLst>
+        </pc:spChg>
+        <pc:spChg chg="del">
+          <ac:chgData name="Mathilde Annette Nicole Roulleau" userId="4ab294c6-1984-4b16-bc43-8e77deede0e4" providerId="ADAL" clId="{79810BCC-BAA2-4D46-8788-90936CCE2327}" dt="2026-01-23T10:32:15.668" v="293" actId="478"/>
+          <ac:spMkLst>
+            <pc:docMk/>
+            <pc:sldMk cId="857520673" sldId="259"/>
+            <ac:spMk id="17" creationId="{8A05D21F-B668-BB87-AED5-65C83619F5B9}"/>
+          </ac:spMkLst>
+        </pc:spChg>
+        <pc:spChg chg="del">
+          <ac:chgData name="Mathilde Annette Nicole Roulleau" userId="4ab294c6-1984-4b16-bc43-8e77deede0e4" providerId="ADAL" clId="{79810BCC-BAA2-4D46-8788-90936CCE2327}" dt="2026-01-23T10:32:15.668" v="293" actId="478"/>
+          <ac:spMkLst>
+            <pc:docMk/>
+            <pc:sldMk cId="857520673" sldId="259"/>
+            <ac:spMk id="19" creationId="{2AF7CEDA-73AD-1116-E335-BDA238FCCED2}"/>
+          </ac:spMkLst>
+        </pc:spChg>
+        <pc:spChg chg="add del">
+          <ac:chgData name="Mathilde Annette Nicole Roulleau" userId="4ab294c6-1984-4b16-bc43-8e77deede0e4" providerId="ADAL" clId="{79810BCC-BAA2-4D46-8788-90936CCE2327}" dt="2026-01-23T15:35:51.442" v="565" actId="478"/>
+          <ac:spMkLst>
+            <pc:docMk/>
+            <pc:sldMk cId="857520673" sldId="259"/>
+            <ac:spMk id="22" creationId="{CB725E91-B0BA-5601-1B19-58E4F4503DEC}"/>
+          </ac:spMkLst>
+        </pc:spChg>
+        <pc:spChg chg="add mod ord">
+          <ac:chgData name="Mathilde Annette Nicole Roulleau" userId="4ab294c6-1984-4b16-bc43-8e77deede0e4" providerId="ADAL" clId="{79810BCC-BAA2-4D46-8788-90936CCE2327}" dt="2026-01-23T16:46:47.413" v="696" actId="1076"/>
+          <ac:spMkLst>
+            <pc:docMk/>
+            <pc:sldMk cId="857520673" sldId="259"/>
+            <ac:spMk id="27" creationId="{C1C1C38E-6FA2-8DF4-4416-F40B98E311AE}"/>
+          </ac:spMkLst>
+        </pc:spChg>
+        <pc:graphicFrameChg chg="del">
+          <ac:chgData name="Mathilde Annette Nicole Roulleau" userId="4ab294c6-1984-4b16-bc43-8e77deede0e4" providerId="ADAL" clId="{79810BCC-BAA2-4D46-8788-90936CCE2327}" dt="2026-01-23T10:32:15.668" v="293" actId="478"/>
+          <ac:graphicFrameMkLst>
+            <pc:docMk/>
+            <pc:sldMk cId="857520673" sldId="259"/>
+            <ac:graphicFrameMk id="21" creationId="{0E2AAD28-8A7B-891C-B8B6-155AF6F2A681}"/>
+          </ac:graphicFrameMkLst>
+        </pc:graphicFrameChg>
+        <pc:picChg chg="add del mod">
+          <ac:chgData name="Mathilde Annette Nicole Roulleau" userId="4ab294c6-1984-4b16-bc43-8e77deede0e4" providerId="ADAL" clId="{79810BCC-BAA2-4D46-8788-90936CCE2327}" dt="2026-01-23T10:44:55.727" v="543" actId="478"/>
+          <ac:picMkLst>
+            <pc:docMk/>
+            <pc:sldMk cId="857520673" sldId="259"/>
+            <ac:picMk id="8" creationId="{E9F23265-32C6-EAD0-2AE9-2D541EB9F6AD}"/>
+          </ac:picMkLst>
+        </pc:picChg>
+        <pc:picChg chg="add del mod">
+          <ac:chgData name="Mathilde Annette Nicole Roulleau" userId="4ab294c6-1984-4b16-bc43-8e77deede0e4" providerId="ADAL" clId="{79810BCC-BAA2-4D46-8788-90936CCE2327}" dt="2026-01-23T16:16:43.521" v="654" actId="478"/>
+          <ac:picMkLst>
+            <pc:docMk/>
+            <pc:sldMk cId="857520673" sldId="259"/>
+            <ac:picMk id="14" creationId="{E64CF91E-06F2-06B3-5943-3E0A7BFF911C}"/>
+          </ac:picMkLst>
+        </pc:picChg>
+        <pc:picChg chg="add del mod">
+          <ac:chgData name="Mathilde Annette Nicole Roulleau" userId="4ab294c6-1984-4b16-bc43-8e77deede0e4" providerId="ADAL" clId="{79810BCC-BAA2-4D46-8788-90936CCE2327}" dt="2026-01-23T15:35:49.178" v="563" actId="478"/>
+          <ac:picMkLst>
+            <pc:docMk/>
+            <pc:sldMk cId="857520673" sldId="259"/>
+            <ac:picMk id="20" creationId="{BFA34E6F-4B99-85E7-FBD1-207DF3ED8F19}"/>
+          </ac:picMkLst>
+        </pc:picChg>
+        <pc:picChg chg="add mod">
+          <ac:chgData name="Mathilde Annette Nicole Roulleau" userId="4ab294c6-1984-4b16-bc43-8e77deede0e4" providerId="ADAL" clId="{79810BCC-BAA2-4D46-8788-90936CCE2327}" dt="2026-01-23T16:18:37.451" v="666" actId="1076"/>
+          <ac:picMkLst>
+            <pc:docMk/>
+            <pc:sldMk cId="857520673" sldId="259"/>
+            <ac:picMk id="24" creationId="{340500F3-CFFA-14E7-F866-A129568C4F31}"/>
+          </ac:picMkLst>
+        </pc:picChg>
+        <pc:picChg chg="add mod">
+          <ac:chgData name="Mathilde Annette Nicole Roulleau" userId="4ab294c6-1984-4b16-bc43-8e77deede0e4" providerId="ADAL" clId="{79810BCC-BAA2-4D46-8788-90936CCE2327}" dt="2026-01-23T16:46:05.051" v="691" actId="1076"/>
+          <ac:picMkLst>
+            <pc:docMk/>
+            <pc:sldMk cId="857520673" sldId="259"/>
+            <ac:picMk id="26" creationId="{603B8219-27C5-C356-FAED-A1E6184EABE3}"/>
+          </ac:picMkLst>
+        </pc:picChg>
+        <pc:picChg chg="add mod">
+          <ac:chgData name="Mathilde Annette Nicole Roulleau" userId="4ab294c6-1984-4b16-bc43-8e77deede0e4" providerId="ADAL" clId="{79810BCC-BAA2-4D46-8788-90936CCE2327}" dt="2026-01-23T15:50:57.782" v="595"/>
+          <ac:picMkLst>
+            <pc:docMk/>
+            <pc:sldMk cId="857520673" sldId="259"/>
+            <ac:picMk id="29" creationId="{2BE1A4BF-702C-8EFD-6638-E521D556021F}"/>
+          </ac:picMkLst>
+        </pc:picChg>
+        <pc:picChg chg="add mod">
+          <ac:chgData name="Mathilde Annette Nicole Roulleau" userId="4ab294c6-1984-4b16-bc43-8e77deede0e4" providerId="ADAL" clId="{79810BCC-BAA2-4D46-8788-90936CCE2327}" dt="2026-01-23T16:46:47.413" v="696" actId="1076"/>
+          <ac:picMkLst>
+            <pc:docMk/>
+            <pc:sldMk cId="857520673" sldId="259"/>
+            <ac:picMk id="31" creationId="{9EC9CAC4-C54E-FEF4-C77F-3D071EA70F5F}"/>
+          </ac:picMkLst>
+        </pc:picChg>
+        <pc:picChg chg="add mod modCrop">
+          <ac:chgData name="Mathilde Annette Nicole Roulleau" userId="4ab294c6-1984-4b16-bc43-8e77deede0e4" providerId="ADAL" clId="{79810BCC-BAA2-4D46-8788-90936CCE2327}" dt="2026-01-23T16:46:24.513" v="694" actId="1076"/>
+          <ac:picMkLst>
+            <pc:docMk/>
+            <pc:sldMk cId="857520673" sldId="259"/>
+            <ac:picMk id="33" creationId="{505EC9DC-EC80-E7A9-5CF6-1D564AC01537}"/>
+          </ac:picMkLst>
+        </pc:picChg>
+        <pc:picChg chg="add mod modCrop">
+          <ac:chgData name="Mathilde Annette Nicole Roulleau" userId="4ab294c6-1984-4b16-bc43-8e77deede0e4" providerId="ADAL" clId="{79810BCC-BAA2-4D46-8788-90936CCE2327}" dt="2026-01-23T16:46:23.129" v="693" actId="1076"/>
+          <ac:picMkLst>
+            <pc:docMk/>
+            <pc:sldMk cId="857520673" sldId="259"/>
+            <ac:picMk id="34" creationId="{E55404CD-4CFD-39DA-A82C-EC2BE4E450B6}"/>
+          </ac:picMkLst>
+        </pc:picChg>
+        <pc:cxnChg chg="del">
+          <ac:chgData name="Mathilde Annette Nicole Roulleau" userId="4ab294c6-1984-4b16-bc43-8e77deede0e4" providerId="ADAL" clId="{79810BCC-BAA2-4D46-8788-90936CCE2327}" dt="2026-01-23T10:32:15.668" v="293" actId="478"/>
+          <ac:cxnSpMkLst>
+            <pc:docMk/>
+            <pc:sldMk cId="857520673" sldId="259"/>
+            <ac:cxnSpMk id="2" creationId="{913A1F6A-06CF-060B-D1FA-161DD69A30B6}"/>
+          </ac:cxnSpMkLst>
+        </pc:cxnChg>
+        <pc:cxnChg chg="del">
+          <ac:chgData name="Mathilde Annette Nicole Roulleau" userId="4ab294c6-1984-4b16-bc43-8e77deede0e4" providerId="ADAL" clId="{79810BCC-BAA2-4D46-8788-90936CCE2327}" dt="2026-01-23T10:32:15.668" v="293" actId="478"/>
+          <ac:cxnSpMkLst>
+            <pc:docMk/>
+            <pc:sldMk cId="857520673" sldId="259"/>
+            <ac:cxnSpMk id="6" creationId="{DB473538-1D10-0C9C-2CEA-529D3558A7A2}"/>
+          </ac:cxnSpMkLst>
+        </pc:cxnChg>
+        <pc:cxnChg chg="del">
+          <ac:chgData name="Mathilde Annette Nicole Roulleau" userId="4ab294c6-1984-4b16-bc43-8e77deede0e4" providerId="ADAL" clId="{79810BCC-BAA2-4D46-8788-90936CCE2327}" dt="2026-01-23T10:32:15.668" v="293" actId="478"/>
+          <ac:cxnSpMkLst>
+            <pc:docMk/>
+            <pc:sldMk cId="857520673" sldId="259"/>
+            <ac:cxnSpMk id="10" creationId="{8EBA5F51-E28A-C443-8152-F6A73AC89F3D}"/>
+          </ac:cxnSpMkLst>
+        </pc:cxnChg>
+        <pc:cxnChg chg="del">
+          <ac:chgData name="Mathilde Annette Nicole Roulleau" userId="4ab294c6-1984-4b16-bc43-8e77deede0e4" providerId="ADAL" clId="{79810BCC-BAA2-4D46-8788-90936CCE2327}" dt="2026-01-23T10:32:15.668" v="293" actId="478"/>
+          <ac:cxnSpMkLst>
+            <pc:docMk/>
+            <pc:sldMk cId="857520673" sldId="259"/>
+            <ac:cxnSpMk id="15" creationId="{888FD27E-DDE3-417F-8065-E892249F2305}"/>
+          </ac:cxnSpMkLst>
+        </pc:cxnChg>
+      </pc:sldChg>
+    </pc:docChg>
+  </pc:docChgLst>
+</pc:chgInfo>
 </file>
 
 <file path=ppt/slideLayouts/slideLayout1.xml><?xml version="1.0" encoding="utf-8"?>
@@ -255,7 +776,7 @@
           <a:p>
             <a:fld id="{B31605AF-44F8-4C57-B945-CB0A72E9DB1D}" type="datetimeFigureOut">
               <a:rPr lang="fr-FR" smtClean="0"/>
-              <a:t>22/01/2026</a:t>
+              <a:t>23/01/2026</a:t>
             </a:fld>
             <a:endParaRPr lang="fr-FR"/>
           </a:p>
@@ -453,7 +974,7 @@
           <a:p>
             <a:fld id="{B31605AF-44F8-4C57-B945-CB0A72E9DB1D}" type="datetimeFigureOut">
               <a:rPr lang="fr-FR" smtClean="0"/>
-              <a:t>22/01/2026</a:t>
+              <a:t>23/01/2026</a:t>
             </a:fld>
             <a:endParaRPr lang="fr-FR"/>
           </a:p>
@@ -661,7 +1182,7 @@
           <a:p>
             <a:fld id="{B31605AF-44F8-4C57-B945-CB0A72E9DB1D}" type="datetimeFigureOut">
               <a:rPr lang="fr-FR" smtClean="0"/>
-              <a:t>22/01/2026</a:t>
+              <a:t>23/01/2026</a:t>
             </a:fld>
             <a:endParaRPr lang="fr-FR"/>
           </a:p>
@@ -859,7 +1380,7 @@
           <a:p>
             <a:fld id="{B31605AF-44F8-4C57-B945-CB0A72E9DB1D}" type="datetimeFigureOut">
               <a:rPr lang="fr-FR" smtClean="0"/>
-              <a:t>22/01/2026</a:t>
+              <a:t>23/01/2026</a:t>
             </a:fld>
             <a:endParaRPr lang="fr-FR"/>
           </a:p>
@@ -1134,7 +1655,7 @@
           <a:p>
             <a:fld id="{B31605AF-44F8-4C57-B945-CB0A72E9DB1D}" type="datetimeFigureOut">
               <a:rPr lang="fr-FR" smtClean="0"/>
-              <a:t>22/01/2026</a:t>
+              <a:t>23/01/2026</a:t>
             </a:fld>
             <a:endParaRPr lang="fr-FR"/>
           </a:p>
@@ -1399,7 +1920,7 @@
           <a:p>
             <a:fld id="{B31605AF-44F8-4C57-B945-CB0A72E9DB1D}" type="datetimeFigureOut">
               <a:rPr lang="fr-FR" smtClean="0"/>
-              <a:t>22/01/2026</a:t>
+              <a:t>23/01/2026</a:t>
             </a:fld>
             <a:endParaRPr lang="fr-FR"/>
           </a:p>
@@ -1811,7 +2332,7 @@
           <a:p>
             <a:fld id="{B31605AF-44F8-4C57-B945-CB0A72E9DB1D}" type="datetimeFigureOut">
               <a:rPr lang="fr-FR" smtClean="0"/>
-              <a:t>22/01/2026</a:t>
+              <a:t>23/01/2026</a:t>
             </a:fld>
             <a:endParaRPr lang="fr-FR"/>
           </a:p>
@@ -1952,7 +2473,7 @@
           <a:p>
             <a:fld id="{B31605AF-44F8-4C57-B945-CB0A72E9DB1D}" type="datetimeFigureOut">
               <a:rPr lang="fr-FR" smtClean="0"/>
-              <a:t>22/01/2026</a:t>
+              <a:t>23/01/2026</a:t>
             </a:fld>
             <a:endParaRPr lang="fr-FR"/>
           </a:p>
@@ -2065,7 +2586,7 @@
           <a:p>
             <a:fld id="{B31605AF-44F8-4C57-B945-CB0A72E9DB1D}" type="datetimeFigureOut">
               <a:rPr lang="fr-FR" smtClean="0"/>
-              <a:t>22/01/2026</a:t>
+              <a:t>23/01/2026</a:t>
             </a:fld>
             <a:endParaRPr lang="fr-FR"/>
           </a:p>
@@ -2376,7 +2897,7 @@
           <a:p>
             <a:fld id="{B31605AF-44F8-4C57-B945-CB0A72E9DB1D}" type="datetimeFigureOut">
               <a:rPr lang="fr-FR" smtClean="0"/>
-              <a:t>22/01/2026</a:t>
+              <a:t>23/01/2026</a:t>
             </a:fld>
             <a:endParaRPr lang="fr-FR"/>
           </a:p>
@@ -2664,7 +3185,7 @@
           <a:p>
             <a:fld id="{B31605AF-44F8-4C57-B945-CB0A72E9DB1D}" type="datetimeFigureOut">
               <a:rPr lang="fr-FR" smtClean="0"/>
-              <a:t>22/01/2026</a:t>
+              <a:t>23/01/2026</a:t>
             </a:fld>
             <a:endParaRPr lang="fr-FR"/>
           </a:p>
@@ -2905,7 +3426,7 @@
           <a:p>
             <a:fld id="{B31605AF-44F8-4C57-B945-CB0A72E9DB1D}" type="datetimeFigureOut">
               <a:rPr lang="fr-FR" smtClean="0"/>
-              <a:t>22/01/2026</a:t>
+              <a:t>23/01/2026</a:t>
             </a:fld>
             <a:endParaRPr lang="fr-FR"/>
           </a:p>
@@ -3324,6 +3845,58 @@
       </p:grpSpPr>
       <p:sp>
         <p:nvSpPr>
+          <p:cNvPr id="3" name="Rectangle 2">
+            <a:extLst>
+              <a:ext uri="{FF2B5EF4-FFF2-40B4-BE49-F238E27FC236}">
+                <a16:creationId xmlns:a16="http://schemas.microsoft.com/office/drawing/2014/main" id="{F0D4A331-2558-686E-2E09-96E96794A2D1}"/>
+              </a:ext>
+            </a:extLst>
+          </p:cNvPr>
+          <p:cNvSpPr/>
+          <p:nvPr/>
+        </p:nvSpPr>
+        <p:spPr>
+          <a:xfrm>
+            <a:off x="6096000" y="0"/>
+            <a:ext cx="6096000" cy="6858000"/>
+          </a:xfrm>
+          <a:prstGeom prst="rect">
+            <a:avLst/>
+          </a:prstGeom>
+          <a:solidFill>
+            <a:srgbClr val="FF0000"/>
+          </a:solidFill>
+          <a:ln>
+            <a:noFill/>
+          </a:ln>
+        </p:spPr>
+        <p:style>
+          <a:lnRef idx="2">
+            <a:schemeClr val="accent1">
+              <a:shade val="15000"/>
+            </a:schemeClr>
+          </a:lnRef>
+          <a:fillRef idx="1">
+            <a:schemeClr val="accent1"/>
+          </a:fillRef>
+          <a:effectRef idx="0">
+            <a:schemeClr val="accent1"/>
+          </a:effectRef>
+          <a:fontRef idx="minor">
+            <a:schemeClr val="lt1"/>
+          </a:fontRef>
+        </p:style>
+        <p:txBody>
+          <a:bodyPr rtlCol="0" anchor="ctr"/>
+          <a:lstStyle/>
+          <a:p>
+            <a:pPr algn="ctr"/>
+            <a:endParaRPr lang="fr-FR" dirty="0"/>
+          </a:p>
+        </p:txBody>
+      </p:sp>
+      <p:sp>
+        <p:nvSpPr>
           <p:cNvPr id="4" name="Rectangle 1">
             <a:extLst>
               <a:ext uri="{FF2B5EF4-FFF2-40B4-BE49-F238E27FC236}">
@@ -3338,8 +3911,8 @@
         </p:nvSpPr>
         <p:spPr bwMode="auto">
           <a:xfrm>
-            <a:off x="989353" y="1120676"/>
-            <a:ext cx="4976733" cy="4616648"/>
+            <a:off x="974363" y="605176"/>
+            <a:ext cx="4976733" cy="5847755"/>
           </a:xfrm>
           <a:prstGeom prst="rect">
             <a:avLst/>
@@ -3517,7 +4090,9 @@
                   <a:noFill/>
                 </a:ln>
                 <a:solidFill>
-                  <a:srgbClr val="000000"/>
+                  <a:schemeClr val="bg2">
+                    <a:lumMod val="25000"/>
+                  </a:schemeClr>
                 </a:solidFill>
                 <a:effectLst/>
                 <a:latin typeface="Oswald" panose="020F0502020204030204" pitchFamily="2" charset="0"/>
@@ -3548,32 +4123,137 @@
                   <a:noFill/>
                 </a:ln>
                 <a:solidFill>
-                  <a:srgbClr val="000000"/>
+                  <a:schemeClr val="bg2">
+                    <a:lumMod val="25000"/>
+                  </a:schemeClr>
                 </a:solidFill>
                 <a:effectLst/>
                 <a:latin typeface="Oswald" panose="020F0502020204030204" pitchFamily="2" charset="0"/>
               </a:rPr>
               <a:t>Mathilde Roulleau</a:t>
             </a:r>
-            <a:r>
-              <a:rPr kumimoji="0" lang="fr-FR" altLang="fr-FR" sz="3200" b="1" i="0" u="none" strike="noStrike" cap="none" normalizeH="0" baseline="0" dirty="0">
+          </a:p>
+          <a:p>
+            <a:pPr marL="0" marR="0" lvl="0" indent="0" algn="l" defTabSz="914400" rtl="0" eaLnBrk="0" fontAlgn="base" latinLnBrk="0" hangingPunct="0">
+              <a:lnSpc>
+                <a:spcPct val="100000"/>
+              </a:lnSpc>
+              <a:spcBef>
+                <a:spcPct val="0"/>
+              </a:spcBef>
+              <a:spcAft>
+                <a:spcPct val="0"/>
+              </a:spcAft>
+              <a:buClrTx/>
+              <a:buSzTx/>
+              <a:buFontTx/>
+              <a:buNone/>
+              <a:tabLst/>
+            </a:pPr>
+            <a:endParaRPr lang="fr-FR" altLang="fr-FR" sz="3200" b="1" dirty="0">
+              <a:solidFill>
+                <a:schemeClr val="bg2">
+                  <a:lumMod val="25000"/>
+                </a:schemeClr>
+              </a:solidFill>
+              <a:latin typeface="Oswald" panose="020F0502020204030204" pitchFamily="2" charset="0"/>
+            </a:endParaRPr>
+          </a:p>
+          <a:p>
+            <a:pPr marL="0" marR="0" lvl="0" indent="0" algn="l" defTabSz="914400" rtl="0" eaLnBrk="0" fontAlgn="base" latinLnBrk="0" hangingPunct="0">
+              <a:lnSpc>
+                <a:spcPct val="100000"/>
+              </a:lnSpc>
+              <a:spcBef>
+                <a:spcPct val="0"/>
+              </a:spcBef>
+              <a:spcAft>
+                <a:spcPct val="0"/>
+              </a:spcAft>
+              <a:buClrTx/>
+              <a:buSzTx/>
+              <a:buFontTx/>
+              <a:buNone/>
+              <a:tabLst/>
+            </a:pPr>
+            <a:r>
+              <a:rPr kumimoji="0" lang="fr-FR" altLang="fr-FR" sz="2400" i="0" u="none" strike="noStrike" cap="none" normalizeH="0" baseline="0" dirty="0">
                 <a:ln>
                   <a:noFill/>
                 </a:ln>
                 <a:solidFill>
-                  <a:srgbClr val="000000"/>
+                  <a:schemeClr val="bg2">
+                    <a:lumMod val="25000"/>
+                  </a:schemeClr>
                 </a:solidFill>
                 <a:effectLst/>
                 <a:latin typeface="Oswald" panose="020F0502020204030204" pitchFamily="2" charset="0"/>
               </a:rPr>
+              <a:t>Teacher – Lucas Paoli</a:t>
+            </a:r>
+          </a:p>
+          <a:p>
+            <a:pPr marL="0" marR="0" lvl="0" indent="0" algn="l" defTabSz="914400" rtl="0" eaLnBrk="0" fontAlgn="base" latinLnBrk="0" hangingPunct="0">
+              <a:lnSpc>
+                <a:spcPct val="100000"/>
+              </a:lnSpc>
+              <a:spcBef>
+                <a:spcPct val="0"/>
+              </a:spcBef>
+              <a:spcAft>
+                <a:spcPct val="0"/>
+              </a:spcAft>
+              <a:buClrTx/>
+              <a:buSzTx/>
+              <a:buFontTx/>
+              <a:buNone/>
+              <a:tabLst/>
+            </a:pPr>
+            <a:r>
+              <a:rPr lang="fr-FR" altLang="fr-FR" sz="2400" dirty="0">
+                <a:solidFill>
+                  <a:schemeClr val="bg2">
+                    <a:lumMod val="25000"/>
+                  </a:schemeClr>
+                </a:solidFill>
+                <a:latin typeface="Oswald" panose="020F0502020204030204" pitchFamily="2" charset="0"/>
+              </a:rPr>
+              <a:t>Assistant – Agathe </a:t>
+            </a:r>
+            <a:r>
+              <a:rPr lang="fr-FR" altLang="fr-FR" sz="2400" dirty="0" err="1">
+                <a:solidFill>
+                  <a:schemeClr val="bg2">
+                    <a:lumMod val="25000"/>
+                  </a:schemeClr>
+                </a:solidFill>
+                <a:latin typeface="Oswald" panose="020F0502020204030204" pitchFamily="2" charset="0"/>
+              </a:rPr>
+              <a:t>Bredel</a:t>
+            </a:r>
+            <a:r>
+              <a:rPr kumimoji="0" lang="fr-FR" altLang="fr-FR" sz="2400" i="0" u="none" strike="noStrike" cap="none" normalizeH="0" baseline="0" dirty="0">
+                <a:ln>
+                  <a:noFill/>
+                </a:ln>
+                <a:solidFill>
+                  <a:schemeClr val="bg2">
+                    <a:lumMod val="25000"/>
+                  </a:schemeClr>
+                </a:solidFill>
+                <a:effectLst/>
+                <a:latin typeface="Oswald" panose="020F0502020204030204" pitchFamily="2" charset="0"/>
+              </a:rPr>
               <a:t> </a:t>
             </a:r>
-            <a:endParaRPr kumimoji="0" lang="fr-FR" altLang="fr-FR" sz="3200" b="0" i="0" u="none" strike="noStrike" cap="none" normalizeH="0" baseline="0" dirty="0">
+            <a:endParaRPr kumimoji="0" lang="fr-FR" altLang="fr-FR" sz="2400" i="0" u="none" strike="noStrike" cap="none" normalizeH="0" baseline="0" dirty="0">
               <a:ln>
                 <a:noFill/>
               </a:ln>
               <a:solidFill>
-                <a:schemeClr val="tx1"/>
+                <a:schemeClr val="bg2">
+                  <a:lumMod val="25000"/>
+                </a:schemeClr>
               </a:solidFill>
               <a:effectLst/>
               <a:latin typeface="Arial" panose="020B0604020202020204" pitchFamily="34" charset="0"/>
@@ -3626,6 +4306,89 @@
               </a14:hiddenFill>
             </a:ext>
           </a:extLst>
+        </p:spPr>
+      </p:pic>
+      <p:sp>
+        <p:nvSpPr>
+          <p:cNvPr id="2" name="ZoneTexte 1">
+            <a:extLst>
+              <a:ext uri="{FF2B5EF4-FFF2-40B4-BE49-F238E27FC236}">
+                <a16:creationId xmlns:a16="http://schemas.microsoft.com/office/drawing/2014/main" id="{4E82D06B-C607-2F2F-C56F-3C111CD212C7}"/>
+              </a:ext>
+            </a:extLst>
+          </p:cNvPr>
+          <p:cNvSpPr txBox="1"/>
+          <p:nvPr/>
+        </p:nvSpPr>
+        <p:spPr>
+          <a:xfrm>
+            <a:off x="7177584" y="1457017"/>
+            <a:ext cx="3637612" cy="3539430"/>
+          </a:xfrm>
+          <a:prstGeom prst="rect">
+            <a:avLst/>
+          </a:prstGeom>
+          <a:noFill/>
+        </p:spPr>
+        <p:txBody>
+          <a:bodyPr wrap="square" rtlCol="0">
+            <a:spAutoFit/>
+          </a:bodyPr>
+          <a:lstStyle/>
+          <a:p>
+            <a:pPr algn="ctr"/>
+            <a:r>
+              <a:rPr lang="en-US" sz="3200" b="1" dirty="0">
+                <a:solidFill>
+                  <a:schemeClr val="bg1"/>
+                </a:solidFill>
+                <a:latin typeface="Oswald" panose="00000500000000000000" pitchFamily="2" charset="0"/>
+              </a:rPr>
+              <a:t>Transcriptomic analysis of bacterial defense system expression during viral infection across multiple species </a:t>
+            </a:r>
+            <a:endParaRPr lang="fr-FR" sz="3200" b="1" dirty="0">
+              <a:solidFill>
+                <a:schemeClr val="bg1"/>
+              </a:solidFill>
+              <a:latin typeface="Oswald" panose="00000500000000000000" pitchFamily="2" charset="0"/>
+            </a:endParaRPr>
+          </a:p>
+        </p:txBody>
+      </p:sp>
+      <p:pic>
+        <p:nvPicPr>
+          <p:cNvPr id="5" name="Image 4" descr="Une image contenant dessin, croquis, dessin humoristique, conception&#10;&#10;Le contenu généré par l’IA peut être incorrect.">
+            <a:extLst>
+              <a:ext uri="{FF2B5EF4-FFF2-40B4-BE49-F238E27FC236}">
+                <a16:creationId xmlns:a16="http://schemas.microsoft.com/office/drawing/2014/main" id="{0F804417-C8BC-28EB-FE95-FFC9E4A6F988}"/>
+              </a:ext>
+            </a:extLst>
+          </p:cNvPr>
+          <p:cNvPicPr>
+            <a:picLocks noChangeAspect="1"/>
+          </p:cNvPicPr>
+          <p:nvPr/>
+        </p:nvPicPr>
+        <p:blipFill>
+          <a:blip r:embed="rId3">
+            <a:extLst>
+              <a:ext uri="{28A0092B-C50C-407E-A947-70E740481C1C}">
+                <a14:useLocalDpi xmlns:a14="http://schemas.microsoft.com/office/drawing/2010/main" val="0"/>
+              </a:ext>
+            </a:extLst>
+          </a:blip>
+          <a:stretch>
+            <a:fillRect/>
+          </a:stretch>
+        </p:blipFill>
+        <p:spPr>
+          <a:xfrm>
+            <a:off x="3812049" y="200107"/>
+            <a:ext cx="1869223" cy="1918630"/>
+          </a:xfrm>
+          <a:prstGeom prst="rect">
+            <a:avLst/>
+          </a:prstGeom>
         </p:spPr>
       </p:pic>
     </p:spTree>
@@ -3832,8 +4595,8 @@
         </p:nvSpPr>
         <p:spPr>
           <a:xfrm>
-            <a:off x="166974" y="1528117"/>
-            <a:ext cx="5556351" cy="4726743"/>
+            <a:off x="127000" y="1148281"/>
+            <a:ext cx="11910099" cy="2031325"/>
           </a:xfrm>
           <a:prstGeom prst="rect">
             <a:avLst/>
@@ -4272,135 +5035,29 @@
                 </a:solidFill>
                 <a:effectLst/>
               </a:rPr>
-              <a:t> stage, light…)  </a:t>
-            </a:r>
-          </a:p>
-          <a:p>
-            <a:pPr marL="742950" lvl="1" indent="-285750">
-              <a:lnSpc>
-                <a:spcPct val="200000"/>
-              </a:lnSpc>
-              <a:buClr>
-                <a:srgbClr val="FF0000"/>
-              </a:buClr>
-              <a:buFont typeface="Wingdings" panose="05000000000000000000" pitchFamily="2" charset="2"/>
-              <a:buChar char="§"/>
-            </a:pPr>
-            <a:r>
-              <a:rPr lang="fr-FR" dirty="0" err="1">
+              <a:t> stage, light, </a:t>
+            </a:r>
+            <a:r>
+              <a:rPr lang="fr-FR" b="0" dirty="0" err="1">
                 <a:solidFill>
                   <a:schemeClr val="bg2">
                     <a:lumMod val="25000"/>
                   </a:schemeClr>
                 </a:solidFill>
-              </a:rPr>
-              <a:t>Transcriptomic</a:t>
-            </a:r>
-            <a:r>
-              <a:rPr lang="fr-FR" dirty="0">
+                <a:effectLst/>
+              </a:rPr>
+              <a:t>temperature</a:t>
+            </a:r>
+            <a:r>
+              <a:rPr lang="fr-FR" b="0" dirty="0">
                 <a:solidFill>
                   <a:schemeClr val="bg2">
                     <a:lumMod val="25000"/>
                   </a:schemeClr>
                 </a:solidFill>
-              </a:rPr>
-              <a:t> data</a:t>
-            </a:r>
-          </a:p>
-          <a:p>
-            <a:pPr marL="742950" lvl="1" indent="-285750">
-              <a:lnSpc>
-                <a:spcPct val="200000"/>
-              </a:lnSpc>
-              <a:buClr>
-                <a:srgbClr val="FF0000"/>
-              </a:buClr>
-              <a:buFont typeface="Wingdings" panose="05000000000000000000" pitchFamily="2" charset="2"/>
-              <a:buChar char="§"/>
-            </a:pPr>
-            <a:r>
-              <a:rPr lang="fr-FR" dirty="0" err="1">
-                <a:solidFill>
-                  <a:schemeClr val="bg2">
-                    <a:lumMod val="25000"/>
-                  </a:schemeClr>
-                </a:solidFill>
-              </a:rPr>
-              <a:t>Generation</a:t>
-            </a:r>
-            <a:r>
-              <a:rPr lang="fr-FR" dirty="0">
-                <a:solidFill>
-                  <a:schemeClr val="bg2">
-                    <a:lumMod val="25000"/>
-                  </a:schemeClr>
-                </a:solidFill>
-              </a:rPr>
-              <a:t> of a count matrix </a:t>
-            </a:r>
-          </a:p>
-          <a:p>
-            <a:pPr marL="742950" lvl="1" indent="-285750">
-              <a:lnSpc>
-                <a:spcPct val="200000"/>
-              </a:lnSpc>
-              <a:buClr>
-                <a:srgbClr val="FF0000"/>
-              </a:buClr>
-              <a:buFont typeface="Wingdings" panose="05000000000000000000" pitchFamily="2" charset="2"/>
-              <a:buChar char="§"/>
-            </a:pPr>
-            <a:r>
-              <a:rPr lang="fr-FR" dirty="0" err="1">
-                <a:solidFill>
-                  <a:schemeClr val="bg2">
-                    <a:lumMod val="25000"/>
-                  </a:schemeClr>
-                </a:solidFill>
-              </a:rPr>
-              <a:t>Normalization</a:t>
-            </a:r>
-            <a:r>
-              <a:rPr lang="fr-FR" dirty="0">
-                <a:solidFill>
-                  <a:schemeClr val="bg2">
-                    <a:lumMod val="25000"/>
-                  </a:schemeClr>
-                </a:solidFill>
-              </a:rPr>
-              <a:t> </a:t>
-            </a:r>
-          </a:p>
-          <a:p>
-            <a:pPr marL="742950" lvl="1" indent="-285750">
-              <a:lnSpc>
-                <a:spcPct val="200000"/>
-              </a:lnSpc>
-              <a:buClr>
-                <a:srgbClr val="FF0000"/>
-              </a:buClr>
-              <a:buFont typeface="Wingdings" panose="05000000000000000000" pitchFamily="2" charset="2"/>
-              <a:buChar char="§"/>
-            </a:pPr>
-            <a:r>
-              <a:rPr lang="fr-FR" dirty="0" err="1">
-                <a:solidFill>
-                  <a:schemeClr val="bg2">
-                    <a:lumMod val="25000"/>
-                  </a:schemeClr>
-                </a:solidFill>
-              </a:rPr>
-              <a:t>Centered</a:t>
-            </a:r>
-            <a:r>
-              <a:rPr lang="fr-FR" dirty="0">
-                <a:solidFill>
-                  <a:schemeClr val="bg2">
-                    <a:lumMod val="25000"/>
-                  </a:schemeClr>
-                </a:solidFill>
-              </a:rPr>
-              <a:t> Log2 Ratio (CLR)</a:t>
+                <a:effectLst/>
+              </a:rPr>
+              <a:t>…)  </a:t>
             </a:r>
           </a:p>
         </p:txBody>
@@ -4420,14 +5077,14 @@
           <p:nvPr>
             <p:extLst>
               <p:ext uri="{D42A27DB-BD31-4B8C-83A1-F6EECF244321}">
-                <p14:modId xmlns:p14="http://schemas.microsoft.com/office/powerpoint/2010/main" val="2641652239"/>
+                <p14:modId xmlns:p14="http://schemas.microsoft.com/office/powerpoint/2010/main" val="3159560440"/>
               </p:ext>
             </p:extLst>
           </p:nvPr>
         </p:nvGraphicFramePr>
         <p:xfrm>
-          <a:off x="5854076" y="2456724"/>
-          <a:ext cx="6170950" cy="2123440"/>
+          <a:off x="381833" y="4782619"/>
+          <a:ext cx="11400432" cy="1854200"/>
         </p:xfrm>
         <a:graphic>
           <a:graphicData uri="http://schemas.openxmlformats.org/drawingml/2006/table">
@@ -4436,38 +5093,45 @@
                 <a:tableStyleId>{5C22544A-7EE6-4342-B048-85BDC9FD1C3A}</a:tableStyleId>
               </a:tblPr>
               <a:tblGrid>
-                <a:gridCol w="1234190">
+                <a:gridCol w="1900072">
                   <a:extLst>
                     <a:ext uri="{9D8B030D-6E8A-4147-A177-3AD203B41FA5}">
                       <a16:colId xmlns:a16="http://schemas.microsoft.com/office/drawing/2014/main" val="2499718628"/>
                     </a:ext>
                   </a:extLst>
                 </a:gridCol>
-                <a:gridCol w="1234190">
+                <a:gridCol w="1900072">
                   <a:extLst>
                     <a:ext uri="{9D8B030D-6E8A-4147-A177-3AD203B41FA5}">
                       <a16:colId xmlns:a16="http://schemas.microsoft.com/office/drawing/2014/main" val="2605615202"/>
                     </a:ext>
                   </a:extLst>
                 </a:gridCol>
-                <a:gridCol w="1234190">
+                <a:gridCol w="1900072">
                   <a:extLst>
                     <a:ext uri="{9D8B030D-6E8A-4147-A177-3AD203B41FA5}">
                       <a16:colId xmlns:a16="http://schemas.microsoft.com/office/drawing/2014/main" val="624793688"/>
                     </a:ext>
                   </a:extLst>
                 </a:gridCol>
-                <a:gridCol w="1234190">
+                <a:gridCol w="1900072">
                   <a:extLst>
                     <a:ext uri="{9D8B030D-6E8A-4147-A177-3AD203B41FA5}">
                       <a16:colId xmlns:a16="http://schemas.microsoft.com/office/drawing/2014/main" val="3449220282"/>
                     </a:ext>
                   </a:extLst>
                 </a:gridCol>
-                <a:gridCol w="1234190">
+                <a:gridCol w="1900072">
                   <a:extLst>
                     <a:ext uri="{9D8B030D-6E8A-4147-A177-3AD203B41FA5}">
                       <a16:colId xmlns:a16="http://schemas.microsoft.com/office/drawing/2014/main" val="4240036390"/>
+                    </a:ext>
+                  </a:extLst>
+                </a:gridCol>
+                <a:gridCol w="1900072">
+                  <a:extLst>
+                    <a:ext uri="{9D8B030D-6E8A-4147-A177-3AD203B41FA5}">
+                      <a16:colId xmlns:a16="http://schemas.microsoft.com/office/drawing/2014/main" val="3472118443"/>
                     </a:ext>
                   </a:extLst>
                 </a:gridCol>
@@ -4550,6 +5214,23 @@
                       <a:r>
                         <a:rPr lang="fr-FR" dirty="0"/>
                         <a:t>Condition2 rep2</a:t>
+                      </a:r>
+                    </a:p>
+                  </a:txBody>
+                  <a:tcPr>
+                    <a:solidFill>
+                      <a:srgbClr val="FF0000"/>
+                    </a:solidFill>
+                  </a:tcPr>
+                </a:tc>
+                <a:tc>
+                  <a:txBody>
+                    <a:bodyPr/>
+                    <a:lstStyle/>
+                    <a:p>
+                      <a:r>
+                        <a:rPr lang="fr-FR" dirty="0"/>
+                        <a:t>…</a:t>
                       </a:r>
                     </a:p>
                   </a:txBody>
@@ -4679,6 +5360,26 @@
                     </a:solidFill>
                   </a:tcPr>
                 </a:tc>
+                <a:tc>
+                  <a:txBody>
+                    <a:bodyPr/>
+                    <a:lstStyle/>
+                    <a:p>
+                      <a:endParaRPr lang="fr-FR" b="1" dirty="0">
+                        <a:solidFill>
+                          <a:schemeClr val="bg2">
+                            <a:lumMod val="25000"/>
+                          </a:schemeClr>
+                        </a:solidFill>
+                      </a:endParaRPr>
+                    </a:p>
+                  </a:txBody>
+                  <a:tcPr>
+                    <a:solidFill>
+                      <a:srgbClr val="FF4343"/>
+                    </a:solidFill>
+                  </a:tcPr>
+                </a:tc>
                 <a:extLst>
                   <a:ext uri="{0D108BD9-81ED-4DB2-BD59-A6C34878D82A}">
                     <a16:rowId xmlns:a16="http://schemas.microsoft.com/office/drawing/2014/main" val="1201326126"/>
@@ -4791,6 +5492,26 @@
                         </a:rPr>
                         <a:t>405</a:t>
                       </a:r>
+                    </a:p>
+                  </a:txBody>
+                  <a:tcPr>
+                    <a:solidFill>
+                      <a:srgbClr val="FF4343"/>
+                    </a:solidFill>
+                  </a:tcPr>
+                </a:tc>
+                <a:tc>
+                  <a:txBody>
+                    <a:bodyPr/>
+                    <a:lstStyle/>
+                    <a:p>
+                      <a:endParaRPr lang="fr-FR" b="1" dirty="0">
+                        <a:solidFill>
+                          <a:schemeClr val="bg2">
+                            <a:lumMod val="25000"/>
+                          </a:schemeClr>
+                        </a:solidFill>
+                      </a:endParaRPr>
                     </a:p>
                   </a:txBody>
                   <a:tcPr>
@@ -4919,6 +5640,26 @@
                     </a:solidFill>
                   </a:tcPr>
                 </a:tc>
+                <a:tc>
+                  <a:txBody>
+                    <a:bodyPr/>
+                    <a:lstStyle/>
+                    <a:p>
+                      <a:endParaRPr lang="fr-FR" b="1" dirty="0">
+                        <a:solidFill>
+                          <a:schemeClr val="bg2">
+                            <a:lumMod val="25000"/>
+                          </a:schemeClr>
+                        </a:solidFill>
+                      </a:endParaRPr>
+                    </a:p>
+                  </a:txBody>
+                  <a:tcPr>
+                    <a:solidFill>
+                      <a:srgbClr val="FF4343"/>
+                    </a:solidFill>
+                  </a:tcPr>
+                </a:tc>
                 <a:extLst>
                   <a:ext uri="{0D108BD9-81ED-4DB2-BD59-A6C34878D82A}">
                     <a16:rowId xmlns:a16="http://schemas.microsoft.com/office/drawing/2014/main" val="1872581909"/>
@@ -5039,6 +5780,26 @@
                     </a:solidFill>
                   </a:tcPr>
                 </a:tc>
+                <a:tc>
+                  <a:txBody>
+                    <a:bodyPr/>
+                    <a:lstStyle/>
+                    <a:p>
+                      <a:endParaRPr lang="fr-FR" b="1" dirty="0">
+                        <a:solidFill>
+                          <a:schemeClr val="bg2">
+                            <a:lumMod val="25000"/>
+                          </a:schemeClr>
+                        </a:solidFill>
+                      </a:endParaRPr>
+                    </a:p>
+                  </a:txBody>
+                  <a:tcPr>
+                    <a:solidFill>
+                      <a:srgbClr val="FF4343"/>
+                    </a:solidFill>
+                  </a:tcPr>
+                </a:tc>
                 <a:extLst>
                   <a:ext uri="{0D108BD9-81ED-4DB2-BD59-A6C34878D82A}">
                     <a16:rowId xmlns:a16="http://schemas.microsoft.com/office/drawing/2014/main" val="399731912"/>
@@ -5058,13 +5819,15 @@
               </a:ext>
             </a:extLst>
           </p:cNvPr>
-          <p:cNvCxnSpPr/>
+          <p:cNvCxnSpPr>
+            <a:cxnSpLocks/>
+          </p:cNvCxnSpPr>
           <p:nvPr/>
         </p:nvCxnSpPr>
         <p:spPr>
           <a:xfrm>
-            <a:off x="9153996" y="1246028"/>
-            <a:ext cx="1364103" cy="0"/>
+            <a:off x="3224599" y="3095449"/>
+            <a:ext cx="0" cy="507821"/>
           </a:xfrm>
           <a:prstGeom prst="straightConnector1">
             <a:avLst/>
@@ -5105,7 +5868,7 @@
         </p:nvSpPr>
         <p:spPr>
           <a:xfrm>
-            <a:off x="9282195" y="509122"/>
+            <a:off x="3224599" y="3026193"/>
             <a:ext cx="1184223" cy="646331"/>
           </a:xfrm>
           <a:prstGeom prst="rect">
@@ -5171,7 +5934,339 @@
         </p:blipFill>
         <p:spPr>
           <a:xfrm>
-            <a:off x="6305783" y="196138"/>
+            <a:off x="7936056" y="324098"/>
+            <a:ext cx="1869223" cy="1918630"/>
+          </a:xfrm>
+          <a:prstGeom prst="rect">
+            <a:avLst/>
+          </a:prstGeom>
+        </p:spPr>
+      </p:pic>
+      <p:cxnSp>
+        <p:nvCxnSpPr>
+          <p:cNvPr id="7" name="Connecteur droit avec flèche 6">
+            <a:extLst>
+              <a:ext uri="{FF2B5EF4-FFF2-40B4-BE49-F238E27FC236}">
+                <a16:creationId xmlns:a16="http://schemas.microsoft.com/office/drawing/2014/main" id="{2585CA58-23D2-ACFA-2D24-A49FBB5AB4A3}"/>
+              </a:ext>
+            </a:extLst>
+          </p:cNvPr>
+          <p:cNvCxnSpPr>
+            <a:cxnSpLocks/>
+          </p:cNvCxnSpPr>
+          <p:nvPr/>
+        </p:nvCxnSpPr>
+        <p:spPr>
+          <a:xfrm>
+            <a:off x="3224599" y="3796046"/>
+            <a:ext cx="0" cy="507821"/>
+          </a:xfrm>
+          <a:prstGeom prst="straightConnector1">
+            <a:avLst/>
+          </a:prstGeom>
+          <a:ln w="28575">
+            <a:solidFill>
+              <a:srgbClr val="FF0000"/>
+            </a:solidFill>
+            <a:tailEnd type="triangle"/>
+          </a:ln>
+        </p:spPr>
+        <p:style>
+          <a:lnRef idx="2">
+            <a:schemeClr val="accent1"/>
+          </a:lnRef>
+          <a:fillRef idx="0">
+            <a:schemeClr val="accent1"/>
+          </a:fillRef>
+          <a:effectRef idx="1">
+            <a:schemeClr val="accent1"/>
+          </a:effectRef>
+          <a:fontRef idx="minor">
+            <a:schemeClr val="tx1"/>
+          </a:fontRef>
+        </p:style>
+      </p:cxnSp>
+      <p:sp>
+        <p:nvSpPr>
+          <p:cNvPr id="8" name="ZoneTexte 7">
+            <a:extLst>
+              <a:ext uri="{FF2B5EF4-FFF2-40B4-BE49-F238E27FC236}">
+                <a16:creationId xmlns:a16="http://schemas.microsoft.com/office/drawing/2014/main" id="{5E8CAE8A-3BB1-B17E-2524-268DDB11AF60}"/>
+              </a:ext>
+            </a:extLst>
+          </p:cNvPr>
+          <p:cNvSpPr txBox="1"/>
+          <p:nvPr/>
+        </p:nvSpPr>
+        <p:spPr>
+          <a:xfrm>
+            <a:off x="3224599" y="3726790"/>
+            <a:ext cx="1184223" cy="646331"/>
+          </a:xfrm>
+          <a:prstGeom prst="rect">
+            <a:avLst/>
+          </a:prstGeom>
+          <a:noFill/>
+        </p:spPr>
+        <p:txBody>
+          <a:bodyPr wrap="square" rtlCol="0">
+            <a:spAutoFit/>
+          </a:bodyPr>
+          <a:lstStyle/>
+          <a:p>
+            <a:r>
+              <a:rPr lang="fr-FR" b="1" dirty="0">
+                <a:solidFill>
+                  <a:schemeClr val="bg2">
+                    <a:lumMod val="25000"/>
+                  </a:schemeClr>
+                </a:solidFill>
+              </a:rPr>
+              <a:t>Lucas </a:t>
+            </a:r>
+            <a:r>
+              <a:rPr lang="fr-FR" b="1" dirty="0" err="1">
+                <a:solidFill>
+                  <a:schemeClr val="bg2">
+                    <a:lumMod val="25000"/>
+                  </a:schemeClr>
+                </a:solidFill>
+              </a:rPr>
+              <a:t>work</a:t>
+            </a:r>
+            <a:r>
+              <a:rPr lang="fr-FR" b="1" dirty="0">
+                <a:solidFill>
+                  <a:schemeClr val="bg2">
+                    <a:lumMod val="25000"/>
+                  </a:schemeClr>
+                </a:solidFill>
+              </a:rPr>
+              <a:t> ???</a:t>
+            </a:r>
+            <a:endParaRPr lang="fr-FR" dirty="0"/>
+          </a:p>
+        </p:txBody>
+      </p:sp>
+    </p:spTree>
+    <p:extLst>
+      <p:ext uri="{BB962C8B-B14F-4D97-AF65-F5344CB8AC3E}">
+        <p14:creationId xmlns:p14="http://schemas.microsoft.com/office/powerpoint/2010/main" val="3910591626"/>
+      </p:ext>
+    </p:extLst>
+  </p:cSld>
+  <p:clrMapOvr>
+    <a:masterClrMapping/>
+  </p:clrMapOvr>
+</p:sld>
+</file>
+
+<file path=ppt/slides/slide3.xml><?xml version="1.0" encoding="utf-8"?>
+<p:sld xmlns:a="http://schemas.openxmlformats.org/drawingml/2006/main" xmlns:r="http://schemas.openxmlformats.org/officeDocument/2006/relationships" xmlns:p="http://schemas.openxmlformats.org/presentationml/2006/main">
+  <p:cSld>
+    <p:spTree>
+      <p:nvGrpSpPr>
+        <p:cNvPr id="1" name="">
+          <a:extLst>
+            <a:ext uri="{FF2B5EF4-FFF2-40B4-BE49-F238E27FC236}">
+              <a16:creationId xmlns:a16="http://schemas.microsoft.com/office/drawing/2014/main" id="{36A3681F-F2EB-EDA0-6523-5F333D86271F}"/>
+            </a:ext>
+          </a:extLst>
+        </p:cNvPr>
+        <p:cNvGrpSpPr/>
+        <p:nvPr/>
+      </p:nvGrpSpPr>
+      <p:grpSpPr>
+        <a:xfrm>
+          <a:off x="0" y="0"/>
+          <a:ext cx="0" cy="0"/>
+          <a:chOff x="0" y="0"/>
+          <a:chExt cx="0" cy="0"/>
+        </a:xfrm>
+      </p:grpSpPr>
+      <p:sp>
+        <p:nvSpPr>
+          <p:cNvPr id="4" name="Rectangle 1">
+            <a:extLst>
+              <a:ext uri="{FF2B5EF4-FFF2-40B4-BE49-F238E27FC236}">
+                <a16:creationId xmlns:a16="http://schemas.microsoft.com/office/drawing/2014/main" id="{F2825D4A-B38D-0E75-C8A6-2D8B9DC97E68}"/>
+              </a:ext>
+            </a:extLst>
+          </p:cNvPr>
+          <p:cNvSpPr>
+            <a:spLocks noChangeArrowheads="1"/>
+          </p:cNvSpPr>
+          <p:nvPr/>
+        </p:nvSpPr>
+        <p:spPr bwMode="auto">
+          <a:xfrm>
+            <a:off x="1725582" y="278290"/>
+            <a:ext cx="4976733" cy="1107996"/>
+          </a:xfrm>
+          <a:prstGeom prst="rect">
+            <a:avLst/>
+          </a:prstGeom>
+          <a:noFill/>
+          <a:ln>
+            <a:noFill/>
+          </a:ln>
+          <a:effectLst/>
+          <a:extLst>
+            <a:ext uri="{909E8E84-426E-40DD-AFC4-6F175D3DCCD1}">
+              <a14:hiddenFill xmlns:a14="http://schemas.microsoft.com/office/drawing/2010/main">
+                <a:solidFill>
+                  <a:schemeClr val="accent1"/>
+                </a:solidFill>
+              </a14:hiddenFill>
+            </a:ext>
+            <a:ext uri="{91240B29-F687-4F45-9708-019B960494DF}">
+              <a14:hiddenLine xmlns:a14="http://schemas.microsoft.com/office/drawing/2010/main" w="9525">
+                <a:solidFill>
+                  <a:schemeClr val="tx1"/>
+                </a:solidFill>
+                <a:miter lim="800000"/>
+                <a:headEnd/>
+                <a:tailEnd/>
+              </a14:hiddenLine>
+            </a:ext>
+            <a:ext uri="{AF507438-7753-43E0-B8FC-AC1667EBCBE1}">
+              <a14:hiddenEffects xmlns:a14="http://schemas.microsoft.com/office/drawing/2010/main">
+                <a:effectLst>
+                  <a:outerShdw dist="35921" dir="2700000" algn="ctr" rotWithShape="0">
+                    <a:schemeClr val="bg2"/>
+                  </a:outerShdw>
+                </a:effectLst>
+              </a14:hiddenEffects>
+            </a:ext>
+          </a:extLst>
+        </p:spPr>
+        <p:txBody>
+          <a:bodyPr vert="horz" wrap="square" lIns="91440" tIns="45720" rIns="91440" bIns="45720" numCol="1" anchor="ctr" anchorCtr="0" compatLnSpc="1">
+            <a:prstTxWarp prst="textNoShape">
+              <a:avLst/>
+            </a:prstTxWarp>
+            <a:spAutoFit/>
+          </a:bodyPr>
+          <a:lstStyle/>
+          <a:p>
+            <a:pPr marL="0" marR="0" lvl="0" indent="0" algn="l" defTabSz="914400" rtl="0" eaLnBrk="0" fontAlgn="base" latinLnBrk="0" hangingPunct="0">
+              <a:lnSpc>
+                <a:spcPct val="100000"/>
+              </a:lnSpc>
+              <a:spcBef>
+                <a:spcPct val="0"/>
+              </a:spcBef>
+              <a:spcAft>
+                <a:spcPct val="0"/>
+              </a:spcAft>
+              <a:buClrTx/>
+              <a:buSzTx/>
+              <a:buFontTx/>
+              <a:buNone/>
+              <a:tabLst/>
+            </a:pPr>
+            <a:r>
+              <a:rPr kumimoji="0" lang="fr-FR" altLang="fr-FR" sz="6600" b="1" i="0" u="none" strike="noStrike" cap="none" normalizeH="0" baseline="0" dirty="0">
+                <a:ln>
+                  <a:noFill/>
+                </a:ln>
+                <a:solidFill>
+                  <a:srgbClr val="000000"/>
+                </a:solidFill>
+                <a:effectLst/>
+                <a:latin typeface="Oswald" panose="020F0502020204030204" pitchFamily="2" charset="0"/>
+              </a:rPr>
+              <a:t>The data</a:t>
+            </a:r>
+            <a:endParaRPr kumimoji="0" lang="fr-FR" altLang="fr-FR" sz="3200" b="0" i="0" u="none" strike="noStrike" cap="none" normalizeH="0" baseline="0" dirty="0">
+              <a:ln>
+                <a:noFill/>
+              </a:ln>
+              <a:solidFill>
+                <a:schemeClr val="tx1"/>
+              </a:solidFill>
+              <a:effectLst/>
+              <a:latin typeface="Arial" panose="020B0604020202020204" pitchFamily="34" charset="0"/>
+            </a:endParaRPr>
+          </a:p>
+        </p:txBody>
+      </p:sp>
+      <p:pic>
+        <p:nvPicPr>
+          <p:cNvPr id="1026" name="Picture 2">
+            <a:extLst>
+              <a:ext uri="{FF2B5EF4-FFF2-40B4-BE49-F238E27FC236}">
+                <a16:creationId xmlns:a16="http://schemas.microsoft.com/office/drawing/2014/main" id="{D506AFE5-7708-F60E-6FBA-6A3F93DB10E7}"/>
+              </a:ext>
+            </a:extLst>
+          </p:cNvPr>
+          <p:cNvPicPr>
+            <a:picLocks noChangeAspect="1" noChangeArrowheads="1"/>
+          </p:cNvPicPr>
+          <p:nvPr/>
+        </p:nvPicPr>
+        <p:blipFill>
+          <a:blip r:embed="rId2">
+            <a:extLst>
+              <a:ext uri="{28A0092B-C50C-407E-A947-70E740481C1C}">
+                <a14:useLocalDpi xmlns:a14="http://schemas.microsoft.com/office/drawing/2010/main" val="0"/>
+              </a:ext>
+            </a:extLst>
+          </a:blip>
+          <a:srcRect/>
+          <a:stretch>
+            <a:fillRect/>
+          </a:stretch>
+        </p:blipFill>
+        <p:spPr bwMode="auto">
+          <a:xfrm>
+            <a:off x="127000" y="107066"/>
+            <a:ext cx="1104900" cy="438150"/>
+          </a:xfrm>
+          <a:prstGeom prst="rect">
+            <a:avLst/>
+          </a:prstGeom>
+          <a:noFill/>
+          <a:extLst>
+            <a:ext uri="{909E8E84-426E-40DD-AFC4-6F175D3DCCD1}">
+              <a14:hiddenFill xmlns:a14="http://schemas.microsoft.com/office/drawing/2010/main">
+                <a:solidFill>
+                  <a:srgbClr val="FFFFFF"/>
+                </a:solidFill>
+              </a14:hiddenFill>
+            </a:ext>
+          </a:extLst>
+        </p:spPr>
+      </p:pic>
+      <p:pic>
+        <p:nvPicPr>
+          <p:cNvPr id="14" name="Image 13" descr="Une image contenant dessin, croquis, dessin humoristique, conception&#10;&#10;Le contenu généré par l’IA peut être incorrect.">
+            <a:extLst>
+              <a:ext uri="{FF2B5EF4-FFF2-40B4-BE49-F238E27FC236}">
+                <a16:creationId xmlns:a16="http://schemas.microsoft.com/office/drawing/2014/main" id="{70F2578D-1451-04D8-AD1F-BCE606955405}"/>
+              </a:ext>
+            </a:extLst>
+          </p:cNvPr>
+          <p:cNvPicPr>
+            <a:picLocks noChangeAspect="1"/>
+          </p:cNvPicPr>
+          <p:nvPr/>
+        </p:nvPicPr>
+        <p:blipFill>
+          <a:blip r:embed="rId3">
+            <a:extLst>
+              <a:ext uri="{28A0092B-C50C-407E-A947-70E740481C1C}">
+                <a14:useLocalDpi xmlns:a14="http://schemas.microsoft.com/office/drawing/2010/main" val="0"/>
+              </a:ext>
+            </a:extLst>
+          </a:blip>
+          <a:stretch>
+            <a:fillRect/>
+          </a:stretch>
+        </p:blipFill>
+        <p:spPr>
+          <a:xfrm>
+            <a:off x="7048184" y="3550983"/>
             <a:ext cx="1869223" cy="1918630"/>
           </a:xfrm>
           <a:prstGeom prst="rect">
@@ -5184,7 +6279,7 @@
           <p:cNvPr id="15" name="Connecteur droit avec flèche 14">
             <a:extLst>
               <a:ext uri="{FF2B5EF4-FFF2-40B4-BE49-F238E27FC236}">
-                <a16:creationId xmlns:a16="http://schemas.microsoft.com/office/drawing/2014/main" id="{75DDB692-2B07-1585-2608-CB4B6A287BC0}"/>
+                <a16:creationId xmlns:a16="http://schemas.microsoft.com/office/drawing/2014/main" id="{2FD49BC3-E363-D15F-0DFB-E2BEE855E0E0}"/>
               </a:ext>
             </a:extLst>
           </p:cNvPr>
@@ -5195,8 +6290,8 @@
         </p:nvCxnSpPr>
         <p:spPr>
           <a:xfrm>
-            <a:off x="8939551" y="4580164"/>
-            <a:ext cx="0" cy="531482"/>
+            <a:off x="4067745" y="3328538"/>
+            <a:ext cx="0" cy="261659"/>
           </a:xfrm>
           <a:prstGeom prst="straightConnector1">
             <a:avLst/>
@@ -5228,7 +6323,7 @@
           <p:cNvPr id="17" name="ZoneTexte 16">
             <a:extLst>
               <a:ext uri="{FF2B5EF4-FFF2-40B4-BE49-F238E27FC236}">
-                <a16:creationId xmlns:a16="http://schemas.microsoft.com/office/drawing/2014/main" id="{7AA7B2FD-D0EE-6B90-361D-E33E4E1DDA52}"/>
+                <a16:creationId xmlns:a16="http://schemas.microsoft.com/office/drawing/2014/main" id="{546AF0F5-19C5-14A0-1E08-5AE2180122FE}"/>
               </a:ext>
             </a:extLst>
           </p:cNvPr>
@@ -5237,8 +6332,8 @@
         </p:nvSpPr>
         <p:spPr>
           <a:xfrm>
-            <a:off x="7240394" y="5111646"/>
-            <a:ext cx="3419840" cy="646331"/>
+            <a:off x="2343713" y="5048609"/>
+            <a:ext cx="3419840" cy="369332"/>
           </a:xfrm>
           <a:prstGeom prst="rect">
             <a:avLst/>
@@ -5302,56 +6397,184 @@
               </a:rPr>
               <a:t>length</a:t>
             </a:r>
-            <a:r>
-              <a:rPr lang="fr-FR" b="1" dirty="0">
+            <a:endParaRPr lang="fr-FR" dirty="0"/>
+          </a:p>
+        </p:txBody>
+      </p:sp>
+      <p:sp>
+        <p:nvSpPr>
+          <p:cNvPr id="19" name="ZoneTexte 18">
+            <a:extLst>
+              <a:ext uri="{FF2B5EF4-FFF2-40B4-BE49-F238E27FC236}">
+                <a16:creationId xmlns:a16="http://schemas.microsoft.com/office/drawing/2014/main" id="{D7161293-4E5E-1E6B-FD57-516EC0032CD1}"/>
+              </a:ext>
+            </a:extLst>
+          </p:cNvPr>
+          <p:cNvSpPr txBox="1"/>
+          <p:nvPr/>
+        </p:nvSpPr>
+        <p:spPr>
+          <a:xfrm>
+            <a:off x="233415" y="5799520"/>
+            <a:ext cx="7640435" cy="646331"/>
+          </a:xfrm>
+          <a:prstGeom prst="rect">
+            <a:avLst/>
+          </a:prstGeom>
+          <a:noFill/>
+        </p:spPr>
+        <p:txBody>
+          <a:bodyPr wrap="square" rtlCol="0">
+            <a:spAutoFit/>
+          </a:bodyPr>
+          <a:lstStyle/>
+          <a:p>
+            <a:pPr algn="ctr"/>
+            <a:r>
+              <a:rPr lang="fr-FR" b="1" dirty="0" err="1">
                 <a:solidFill>
                   <a:schemeClr val="bg2">
                     <a:lumMod val="25000"/>
                   </a:schemeClr>
                 </a:solidFill>
               </a:rPr>
-              <a:t> and </a:t>
-            </a:r>
-            <a:r>
-              <a:rPr lang="fr-FR" b="1" dirty="0" err="1">
+              <a:t>Centered</a:t>
+            </a:r>
+            <a:r>
+              <a:rPr lang="fr-FR" b="1" dirty="0">
                 <a:solidFill>
                   <a:schemeClr val="bg2">
                     <a:lumMod val="25000"/>
                   </a:schemeClr>
                 </a:solidFill>
               </a:rPr>
-              <a:t>sequencing</a:t>
-            </a:r>
-            <a:r>
-              <a:rPr lang="fr-FR" b="1" dirty="0">
+              <a:t> Log2 Ratio (CLR) - </a:t>
+            </a:r>
+            <a:r>
+              <a:rPr lang="en-US" dirty="0">
                 <a:solidFill>
                   <a:schemeClr val="bg2">
                     <a:lumMod val="25000"/>
                   </a:schemeClr>
                 </a:solidFill>
               </a:rPr>
-              <a:t> </a:t>
-            </a:r>
-            <a:r>
-              <a:rPr lang="fr-FR" b="1" dirty="0" err="1">
+              <a:t>‘</a:t>
+            </a:r>
+            <a:r>
+              <a:rPr lang="en-US" dirty="0" err="1">
                 <a:solidFill>
                   <a:schemeClr val="bg2">
                     <a:lumMod val="25000"/>
                   </a:schemeClr>
                 </a:solidFill>
               </a:rPr>
-              <a:t>depth</a:t>
-            </a:r>
-            <a:endParaRPr lang="fr-FR" dirty="0"/>
+              <a:t>Centres’</a:t>
+            </a:r>
+            <a:r>
+              <a:rPr lang="en-US" dirty="0">
+                <a:solidFill>
+                  <a:schemeClr val="bg2">
+                    <a:lumMod val="25000"/>
+                  </a:schemeClr>
+                </a:solidFill>
+              </a:rPr>
+              <a:t> the distribution of values around 0, comparing each gene to the overall mean of the sample transcriptome</a:t>
+            </a:r>
+            <a:endParaRPr lang="fr-FR" dirty="0">
+              <a:solidFill>
+                <a:schemeClr val="bg2">
+                  <a:lumMod val="25000"/>
+                </a:schemeClr>
+              </a:solidFill>
+            </a:endParaRPr>
+          </a:p>
+        </p:txBody>
+      </p:sp>
+      <p:sp>
+        <p:nvSpPr>
+          <p:cNvPr id="3" name="ZoneTexte 2">
+            <a:extLst>
+              <a:ext uri="{FF2B5EF4-FFF2-40B4-BE49-F238E27FC236}">
+                <a16:creationId xmlns:a16="http://schemas.microsoft.com/office/drawing/2014/main" id="{B5CDBD7F-3EB6-B564-9E1B-30AB9F159168}"/>
+              </a:ext>
+            </a:extLst>
+          </p:cNvPr>
+          <p:cNvSpPr txBox="1"/>
+          <p:nvPr/>
+        </p:nvSpPr>
+        <p:spPr>
+          <a:xfrm>
+            <a:off x="1175579" y="3573039"/>
+            <a:ext cx="5872605" cy="646331"/>
+          </a:xfrm>
+          <a:prstGeom prst="rect">
+            <a:avLst/>
+          </a:prstGeom>
+          <a:noFill/>
+        </p:spPr>
+        <p:txBody>
+          <a:bodyPr wrap="square" rtlCol="0">
+            <a:spAutoFit/>
+          </a:bodyPr>
+          <a:lstStyle/>
+          <a:p>
+            <a:pPr algn="ctr"/>
+            <a:r>
+              <a:rPr lang="fr-FR" b="1" dirty="0">
+                <a:solidFill>
+                  <a:schemeClr val="bg2">
+                    <a:lumMod val="25000"/>
+                  </a:schemeClr>
+                </a:solidFill>
+              </a:rPr>
+              <a:t>Variance </a:t>
+            </a:r>
+            <a:r>
+              <a:rPr lang="fr-FR" b="1" dirty="0" err="1">
+                <a:solidFill>
+                  <a:schemeClr val="bg2">
+                    <a:lumMod val="25000"/>
+                  </a:schemeClr>
+                </a:solidFill>
+              </a:rPr>
+              <a:t>Stabilizing</a:t>
+            </a:r>
+            <a:r>
+              <a:rPr lang="fr-FR" b="1" dirty="0">
+                <a:solidFill>
+                  <a:schemeClr val="bg2">
+                    <a:lumMod val="25000"/>
+                  </a:schemeClr>
+                </a:solidFill>
+              </a:rPr>
+              <a:t> Transformation (VST) - </a:t>
+            </a:r>
+            <a:r>
+              <a:rPr lang="en-US" dirty="0">
+                <a:solidFill>
+                  <a:schemeClr val="bg2">
+                    <a:lumMod val="25000"/>
+                  </a:schemeClr>
+                </a:solidFill>
+              </a:rPr>
+              <a:t>each gene has roughly constant variance across samples</a:t>
+            </a:r>
+            <a:endParaRPr lang="fr-FR" dirty="0">
+              <a:solidFill>
+                <a:schemeClr val="bg2">
+                  <a:lumMod val="25000"/>
+                </a:schemeClr>
+              </a:solidFill>
+            </a:endParaRPr>
           </a:p>
         </p:txBody>
       </p:sp>
       <p:cxnSp>
         <p:nvCxnSpPr>
-          <p:cNvPr id="18" name="Connecteur droit avec flèche 17">
-            <a:extLst>
-              <a:ext uri="{FF2B5EF4-FFF2-40B4-BE49-F238E27FC236}">
-                <a16:creationId xmlns:a16="http://schemas.microsoft.com/office/drawing/2014/main" id="{60D4E8A7-C6AF-9BCC-C174-9D5171AE77EB}"/>
+          <p:cNvPr id="2" name="Connecteur droit avec flèche 1">
+            <a:extLst>
+              <a:ext uri="{FF2B5EF4-FFF2-40B4-BE49-F238E27FC236}">
+                <a16:creationId xmlns:a16="http://schemas.microsoft.com/office/drawing/2014/main" id="{6C94FF7C-D713-4A2F-C298-2363024DDDB9}"/>
               </a:ext>
             </a:extLst>
           </p:cNvPr>
@@ -5362,8 +6585,96 @@
         </p:nvCxnSpPr>
         <p:spPr>
           <a:xfrm>
-            <a:off x="8939551" y="5680187"/>
-            <a:ext cx="0" cy="531482"/>
+            <a:off x="4067745" y="4786950"/>
+            <a:ext cx="0" cy="261659"/>
+          </a:xfrm>
+          <a:prstGeom prst="straightConnector1">
+            <a:avLst/>
+          </a:prstGeom>
+          <a:ln w="28575">
+            <a:solidFill>
+              <a:srgbClr val="FF0000"/>
+            </a:solidFill>
+            <a:tailEnd type="triangle"/>
+          </a:ln>
+        </p:spPr>
+        <p:style>
+          <a:lnRef idx="2">
+            <a:schemeClr val="accent1"/>
+          </a:lnRef>
+          <a:fillRef idx="0">
+            <a:schemeClr val="accent1"/>
+          </a:fillRef>
+          <a:effectRef idx="1">
+            <a:schemeClr val="accent1"/>
+          </a:effectRef>
+          <a:fontRef idx="minor">
+            <a:schemeClr val="tx1"/>
+          </a:fontRef>
+        </p:style>
+      </p:cxnSp>
+      <p:cxnSp>
+        <p:nvCxnSpPr>
+          <p:cNvPr id="6" name="Connecteur droit avec flèche 5">
+            <a:extLst>
+              <a:ext uri="{FF2B5EF4-FFF2-40B4-BE49-F238E27FC236}">
+                <a16:creationId xmlns:a16="http://schemas.microsoft.com/office/drawing/2014/main" id="{16A5F2F2-25A4-51B3-7AC6-736D6FE1E87F}"/>
+              </a:ext>
+            </a:extLst>
+          </p:cNvPr>
+          <p:cNvCxnSpPr>
+            <a:cxnSpLocks/>
+          </p:cNvCxnSpPr>
+          <p:nvPr/>
+        </p:nvCxnSpPr>
+        <p:spPr>
+          <a:xfrm>
+            <a:off x="4067745" y="5477901"/>
+            <a:ext cx="0" cy="261659"/>
+          </a:xfrm>
+          <a:prstGeom prst="straightConnector1">
+            <a:avLst/>
+          </a:prstGeom>
+          <a:ln w="28575">
+            <a:solidFill>
+              <a:srgbClr val="FF0000"/>
+            </a:solidFill>
+            <a:tailEnd type="triangle"/>
+          </a:ln>
+        </p:spPr>
+        <p:style>
+          <a:lnRef idx="2">
+            <a:schemeClr val="accent1"/>
+          </a:lnRef>
+          <a:fillRef idx="0">
+            <a:schemeClr val="accent1"/>
+          </a:fillRef>
+          <a:effectRef idx="1">
+            <a:schemeClr val="accent1"/>
+          </a:effectRef>
+          <a:fontRef idx="minor">
+            <a:schemeClr val="tx1"/>
+          </a:fontRef>
+        </p:style>
+      </p:cxnSp>
+      <p:cxnSp>
+        <p:nvCxnSpPr>
+          <p:cNvPr id="10" name="Connecteur droit avec flèche 9">
+            <a:extLst>
+              <a:ext uri="{FF2B5EF4-FFF2-40B4-BE49-F238E27FC236}">
+                <a16:creationId xmlns:a16="http://schemas.microsoft.com/office/drawing/2014/main" id="{16F926EE-E02B-97B4-06F3-F7BDD8261526}"/>
+              </a:ext>
+            </a:extLst>
+          </p:cNvPr>
+          <p:cNvCxnSpPr>
+            <a:cxnSpLocks/>
+          </p:cNvCxnSpPr>
+          <p:nvPr/>
+        </p:nvCxnSpPr>
+        <p:spPr>
+          <a:xfrm>
+            <a:off x="4067745" y="4173964"/>
+            <a:ext cx="0" cy="261659"/>
           </a:xfrm>
           <a:prstGeom prst="straightConnector1">
             <a:avLst/>
@@ -5392,10 +6703,10 @@
       </p:cxnSp>
       <p:sp>
         <p:nvSpPr>
-          <p:cNvPr id="19" name="ZoneTexte 18">
-            <a:extLst>
-              <a:ext uri="{FF2B5EF4-FFF2-40B4-BE49-F238E27FC236}">
-                <a16:creationId xmlns:a16="http://schemas.microsoft.com/office/drawing/2014/main" id="{35BDED98-BC4A-2278-14CE-77419DE36844}"/>
+          <p:cNvPr id="13" name="ZoneTexte 12">
+            <a:extLst>
+              <a:ext uri="{FF2B5EF4-FFF2-40B4-BE49-F238E27FC236}">
+                <a16:creationId xmlns:a16="http://schemas.microsoft.com/office/drawing/2014/main" id="{CB1BC903-3E47-AA81-67F8-6A2614126569}"/>
               </a:ext>
             </a:extLst>
           </p:cNvPr>
@@ -5404,8 +6715,8 @@
         </p:nvSpPr>
         <p:spPr>
           <a:xfrm>
-            <a:off x="7240394" y="6211669"/>
-            <a:ext cx="3419840" cy="369332"/>
+            <a:off x="1175579" y="4418465"/>
+            <a:ext cx="5872605" cy="369332"/>
           </a:xfrm>
           <a:prstGeom prst="rect">
             <a:avLst/>
@@ -5427,16 +6738,1512 @@
                   </a:schemeClr>
                 </a:solidFill>
               </a:rPr>
-              <a:t>CLR</a:t>
-            </a:r>
-            <a:endParaRPr lang="fr-FR" dirty="0"/>
+              <a:t>2^(VST) </a:t>
+            </a:r>
+            <a:r>
+              <a:rPr lang="fr-FR" dirty="0">
+                <a:solidFill>
+                  <a:schemeClr val="bg2">
+                    <a:lumMod val="25000"/>
+                  </a:schemeClr>
+                </a:solidFill>
+              </a:rPr>
+              <a:t>– </a:t>
+            </a:r>
+            <a:r>
+              <a:rPr lang="fr-FR" dirty="0" err="1">
+                <a:solidFill>
+                  <a:schemeClr val="bg2">
+                    <a:lumMod val="25000"/>
+                  </a:schemeClr>
+                </a:solidFill>
+              </a:rPr>
+              <a:t>because</a:t>
+            </a:r>
+            <a:r>
+              <a:rPr lang="fr-FR" dirty="0">
+                <a:solidFill>
+                  <a:schemeClr val="bg2">
+                    <a:lumMod val="25000"/>
+                  </a:schemeClr>
+                </a:solidFill>
+              </a:rPr>
+              <a:t> VST </a:t>
+            </a:r>
+            <a:r>
+              <a:rPr lang="fr-FR" dirty="0" err="1">
+                <a:solidFill>
+                  <a:schemeClr val="bg2">
+                    <a:lumMod val="25000"/>
+                  </a:schemeClr>
+                </a:solidFill>
+              </a:rPr>
+              <a:t>function</a:t>
+            </a:r>
+            <a:r>
+              <a:rPr lang="fr-FR" dirty="0">
+                <a:solidFill>
+                  <a:schemeClr val="bg2">
+                    <a:lumMod val="25000"/>
+                  </a:schemeClr>
+                </a:solidFill>
+              </a:rPr>
+              <a:t> </a:t>
+            </a:r>
+            <a:r>
+              <a:rPr lang="fr-FR" dirty="0" err="1">
+                <a:solidFill>
+                  <a:schemeClr val="bg2">
+                    <a:lumMod val="25000"/>
+                  </a:schemeClr>
+                </a:solidFill>
+              </a:rPr>
+              <a:t>apply</a:t>
+            </a:r>
+            <a:r>
+              <a:rPr lang="fr-FR" dirty="0">
+                <a:solidFill>
+                  <a:schemeClr val="bg2">
+                    <a:lumMod val="25000"/>
+                  </a:schemeClr>
+                </a:solidFill>
+              </a:rPr>
+              <a:t> a log2</a:t>
+            </a:r>
+          </a:p>
+        </p:txBody>
+      </p:sp>
+      <p:graphicFrame>
+        <p:nvGraphicFramePr>
+          <p:cNvPr id="21" name="Tableau 20">
+            <a:extLst>
+              <a:ext uri="{FF2B5EF4-FFF2-40B4-BE49-F238E27FC236}">
+                <a16:creationId xmlns:a16="http://schemas.microsoft.com/office/drawing/2014/main" id="{1E4C2140-FA9D-8C0A-62EF-CC2C3FBBDA28}"/>
+              </a:ext>
+            </a:extLst>
+          </p:cNvPr>
+          <p:cNvGraphicFramePr>
+            <a:graphicFrameLocks noGrp="1"/>
+          </p:cNvGraphicFramePr>
+          <p:nvPr>
+            <p:extLst>
+              <p:ext uri="{D42A27DB-BD31-4B8C-83A1-F6EECF244321}">
+                <p14:modId xmlns:p14="http://schemas.microsoft.com/office/powerpoint/2010/main" val="2969778085"/>
+              </p:ext>
+            </p:extLst>
+          </p:nvPr>
+        </p:nvGraphicFramePr>
+        <p:xfrm>
+          <a:off x="395784" y="1452818"/>
+          <a:ext cx="11400432" cy="1854200"/>
+        </p:xfrm>
+        <a:graphic>
+          <a:graphicData uri="http://schemas.openxmlformats.org/drawingml/2006/table">
+            <a:tbl>
+              <a:tblPr firstRow="1" bandRow="1">
+                <a:tableStyleId>{5C22544A-7EE6-4342-B048-85BDC9FD1C3A}</a:tableStyleId>
+              </a:tblPr>
+              <a:tblGrid>
+                <a:gridCol w="1900072">
+                  <a:extLst>
+                    <a:ext uri="{9D8B030D-6E8A-4147-A177-3AD203B41FA5}">
+                      <a16:colId xmlns:a16="http://schemas.microsoft.com/office/drawing/2014/main" val="2499718628"/>
+                    </a:ext>
+                  </a:extLst>
+                </a:gridCol>
+                <a:gridCol w="1900072">
+                  <a:extLst>
+                    <a:ext uri="{9D8B030D-6E8A-4147-A177-3AD203B41FA5}">
+                      <a16:colId xmlns:a16="http://schemas.microsoft.com/office/drawing/2014/main" val="2605615202"/>
+                    </a:ext>
+                  </a:extLst>
+                </a:gridCol>
+                <a:gridCol w="1900072">
+                  <a:extLst>
+                    <a:ext uri="{9D8B030D-6E8A-4147-A177-3AD203B41FA5}">
+                      <a16:colId xmlns:a16="http://schemas.microsoft.com/office/drawing/2014/main" val="624793688"/>
+                    </a:ext>
+                  </a:extLst>
+                </a:gridCol>
+                <a:gridCol w="1900072">
+                  <a:extLst>
+                    <a:ext uri="{9D8B030D-6E8A-4147-A177-3AD203B41FA5}">
+                      <a16:colId xmlns:a16="http://schemas.microsoft.com/office/drawing/2014/main" val="3449220282"/>
+                    </a:ext>
+                  </a:extLst>
+                </a:gridCol>
+                <a:gridCol w="1900072">
+                  <a:extLst>
+                    <a:ext uri="{9D8B030D-6E8A-4147-A177-3AD203B41FA5}">
+                      <a16:colId xmlns:a16="http://schemas.microsoft.com/office/drawing/2014/main" val="4240036390"/>
+                    </a:ext>
+                  </a:extLst>
+                </a:gridCol>
+                <a:gridCol w="1900072">
+                  <a:extLst>
+                    <a:ext uri="{9D8B030D-6E8A-4147-A177-3AD203B41FA5}">
+                      <a16:colId xmlns:a16="http://schemas.microsoft.com/office/drawing/2014/main" val="3472118443"/>
+                    </a:ext>
+                  </a:extLst>
+                </a:gridCol>
+              </a:tblGrid>
+              <a:tr h="370840">
+                <a:tc>
+                  <a:txBody>
+                    <a:bodyPr/>
+                    <a:lstStyle/>
+                    <a:p>
+                      <a:endParaRPr lang="fr-FR" b="1" dirty="0">
+                        <a:solidFill>
+                          <a:schemeClr val="bg1"/>
+                        </a:solidFill>
+                      </a:endParaRPr>
+                    </a:p>
+                  </a:txBody>
+                  <a:tcPr>
+                    <a:solidFill>
+                      <a:srgbClr val="FF0000"/>
+                    </a:solidFill>
+                  </a:tcPr>
+                </a:tc>
+                <a:tc>
+                  <a:txBody>
+                    <a:bodyPr/>
+                    <a:lstStyle/>
+                    <a:p>
+                      <a:r>
+                        <a:rPr lang="fr-FR" dirty="0"/>
+                        <a:t>Condtion1 rep 1</a:t>
+                      </a:r>
+                    </a:p>
+                  </a:txBody>
+                  <a:tcPr>
+                    <a:solidFill>
+                      <a:srgbClr val="FF0000"/>
+                    </a:solidFill>
+                  </a:tcPr>
+                </a:tc>
+                <a:tc>
+                  <a:txBody>
+                    <a:bodyPr/>
+                    <a:lstStyle/>
+                    <a:p>
+                      <a:r>
+                        <a:rPr lang="fr-FR" dirty="0"/>
+                        <a:t>Condition1 rep 2</a:t>
+                      </a:r>
+                    </a:p>
+                  </a:txBody>
+                  <a:tcPr>
+                    <a:solidFill>
+                      <a:srgbClr val="FF0000"/>
+                    </a:solidFill>
+                  </a:tcPr>
+                </a:tc>
+                <a:tc>
+                  <a:txBody>
+                    <a:bodyPr/>
+                    <a:lstStyle/>
+                    <a:p>
+                      <a:r>
+                        <a:rPr lang="fr-FR" dirty="0"/>
+                        <a:t>Condition2 rep 1</a:t>
+                      </a:r>
+                    </a:p>
+                  </a:txBody>
+                  <a:tcPr>
+                    <a:solidFill>
+                      <a:srgbClr val="FF0000"/>
+                    </a:solidFill>
+                  </a:tcPr>
+                </a:tc>
+                <a:tc>
+                  <a:txBody>
+                    <a:bodyPr/>
+                    <a:lstStyle/>
+                    <a:p>
+                      <a:r>
+                        <a:rPr lang="fr-FR" dirty="0"/>
+                        <a:t>Condition2 rep2</a:t>
+                      </a:r>
+                    </a:p>
+                  </a:txBody>
+                  <a:tcPr>
+                    <a:solidFill>
+                      <a:srgbClr val="FF0000"/>
+                    </a:solidFill>
+                  </a:tcPr>
+                </a:tc>
+                <a:tc>
+                  <a:txBody>
+                    <a:bodyPr/>
+                    <a:lstStyle/>
+                    <a:p>
+                      <a:r>
+                        <a:rPr lang="fr-FR" dirty="0"/>
+                        <a:t>…</a:t>
+                      </a:r>
+                    </a:p>
+                  </a:txBody>
+                  <a:tcPr>
+                    <a:solidFill>
+                      <a:srgbClr val="FF0000"/>
+                    </a:solidFill>
+                  </a:tcPr>
+                </a:tc>
+                <a:extLst>
+                  <a:ext uri="{0D108BD9-81ED-4DB2-BD59-A6C34878D82A}">
+                    <a16:rowId xmlns:a16="http://schemas.microsoft.com/office/drawing/2014/main" val="2715195804"/>
+                  </a:ext>
+                </a:extLst>
+              </a:tr>
+              <a:tr h="370840">
+                <a:tc>
+                  <a:txBody>
+                    <a:bodyPr/>
+                    <a:lstStyle/>
+                    <a:p>
+                      <a:r>
+                        <a:rPr lang="fr-FR" b="1" dirty="0">
+                          <a:solidFill>
+                            <a:schemeClr val="bg1"/>
+                          </a:solidFill>
+                        </a:rPr>
+                        <a:t>Gene 1</a:t>
+                      </a:r>
+                    </a:p>
+                  </a:txBody>
+                  <a:tcPr>
+                    <a:solidFill>
+                      <a:srgbClr val="FF4343"/>
+                    </a:solidFill>
+                  </a:tcPr>
+                </a:tc>
+                <a:tc>
+                  <a:txBody>
+                    <a:bodyPr/>
+                    <a:lstStyle/>
+                    <a:p>
+                      <a:r>
+                        <a:rPr lang="fr-FR" b="1" dirty="0">
+                          <a:solidFill>
+                            <a:schemeClr val="bg2">
+                              <a:lumMod val="25000"/>
+                            </a:schemeClr>
+                          </a:solidFill>
+                        </a:rPr>
+                        <a:t>32</a:t>
+                      </a:r>
+                    </a:p>
+                  </a:txBody>
+                  <a:tcPr>
+                    <a:solidFill>
+                      <a:srgbClr val="FF4343"/>
+                    </a:solidFill>
+                  </a:tcPr>
+                </a:tc>
+                <a:tc>
+                  <a:txBody>
+                    <a:bodyPr/>
+                    <a:lstStyle/>
+                    <a:p>
+                      <a:r>
+                        <a:rPr lang="fr-FR" b="1" dirty="0">
+                          <a:solidFill>
+                            <a:schemeClr val="bg2">
+                              <a:lumMod val="25000"/>
+                            </a:schemeClr>
+                          </a:solidFill>
+                        </a:rPr>
+                        <a:t>30</a:t>
+                      </a:r>
+                    </a:p>
+                  </a:txBody>
+                  <a:tcPr>
+                    <a:solidFill>
+                      <a:srgbClr val="FF4343"/>
+                    </a:solidFill>
+                  </a:tcPr>
+                </a:tc>
+                <a:tc>
+                  <a:txBody>
+                    <a:bodyPr/>
+                    <a:lstStyle/>
+                    <a:p>
+                      <a:r>
+                        <a:rPr lang="fr-FR" b="1" dirty="0">
+                          <a:solidFill>
+                            <a:schemeClr val="bg2">
+                              <a:lumMod val="25000"/>
+                            </a:schemeClr>
+                          </a:solidFill>
+                        </a:rPr>
+                        <a:t>69</a:t>
+                      </a:r>
+                    </a:p>
+                  </a:txBody>
+                  <a:tcPr>
+                    <a:solidFill>
+                      <a:srgbClr val="FF4343"/>
+                    </a:solidFill>
+                  </a:tcPr>
+                </a:tc>
+                <a:tc>
+                  <a:txBody>
+                    <a:bodyPr/>
+                    <a:lstStyle/>
+                    <a:p>
+                      <a:r>
+                        <a:rPr lang="fr-FR" b="1" dirty="0">
+                          <a:solidFill>
+                            <a:schemeClr val="bg2">
+                              <a:lumMod val="25000"/>
+                            </a:schemeClr>
+                          </a:solidFill>
+                        </a:rPr>
+                        <a:t>76</a:t>
+                      </a:r>
+                    </a:p>
+                  </a:txBody>
+                  <a:tcPr>
+                    <a:solidFill>
+                      <a:srgbClr val="FF4343"/>
+                    </a:solidFill>
+                  </a:tcPr>
+                </a:tc>
+                <a:tc>
+                  <a:txBody>
+                    <a:bodyPr/>
+                    <a:lstStyle/>
+                    <a:p>
+                      <a:endParaRPr lang="fr-FR" b="1" dirty="0">
+                        <a:solidFill>
+                          <a:schemeClr val="bg2">
+                            <a:lumMod val="25000"/>
+                          </a:schemeClr>
+                        </a:solidFill>
+                      </a:endParaRPr>
+                    </a:p>
+                  </a:txBody>
+                  <a:tcPr>
+                    <a:solidFill>
+                      <a:srgbClr val="FF4343"/>
+                    </a:solidFill>
+                  </a:tcPr>
+                </a:tc>
+                <a:extLst>
+                  <a:ext uri="{0D108BD9-81ED-4DB2-BD59-A6C34878D82A}">
+                    <a16:rowId xmlns:a16="http://schemas.microsoft.com/office/drawing/2014/main" val="1201326126"/>
+                  </a:ext>
+                </a:extLst>
+              </a:tr>
+              <a:tr h="370840">
+                <a:tc>
+                  <a:txBody>
+                    <a:bodyPr/>
+                    <a:lstStyle/>
+                    <a:p>
+                      <a:r>
+                        <a:rPr lang="fr-FR" b="1" dirty="0">
+                          <a:solidFill>
+                            <a:schemeClr val="bg1"/>
+                          </a:solidFill>
+                        </a:rPr>
+                        <a:t>Gene 2</a:t>
+                      </a:r>
+                    </a:p>
+                  </a:txBody>
+                  <a:tcPr>
+                    <a:solidFill>
+                      <a:srgbClr val="FF4343"/>
+                    </a:solidFill>
+                  </a:tcPr>
+                </a:tc>
+                <a:tc>
+                  <a:txBody>
+                    <a:bodyPr/>
+                    <a:lstStyle/>
+                    <a:p>
+                      <a:r>
+                        <a:rPr lang="fr-FR" b="1" dirty="0">
+                          <a:solidFill>
+                            <a:schemeClr val="bg2">
+                              <a:lumMod val="25000"/>
+                            </a:schemeClr>
+                          </a:solidFill>
+                        </a:rPr>
+                        <a:t>321</a:t>
+                      </a:r>
+                    </a:p>
+                  </a:txBody>
+                  <a:tcPr>
+                    <a:solidFill>
+                      <a:srgbClr val="FF4343"/>
+                    </a:solidFill>
+                  </a:tcPr>
+                </a:tc>
+                <a:tc>
+                  <a:txBody>
+                    <a:bodyPr/>
+                    <a:lstStyle/>
+                    <a:p>
+                      <a:r>
+                        <a:rPr lang="fr-FR" b="1" dirty="0">
+                          <a:solidFill>
+                            <a:schemeClr val="bg2">
+                              <a:lumMod val="25000"/>
+                            </a:schemeClr>
+                          </a:solidFill>
+                        </a:rPr>
+                        <a:t>238</a:t>
+                      </a:r>
+                    </a:p>
+                  </a:txBody>
+                  <a:tcPr>
+                    <a:solidFill>
+                      <a:srgbClr val="FF4343"/>
+                    </a:solidFill>
+                  </a:tcPr>
+                </a:tc>
+                <a:tc>
+                  <a:txBody>
+                    <a:bodyPr/>
+                    <a:lstStyle/>
+                    <a:p>
+                      <a:r>
+                        <a:rPr lang="fr-FR" b="1" dirty="0">
+                          <a:solidFill>
+                            <a:schemeClr val="bg2">
+                              <a:lumMod val="25000"/>
+                            </a:schemeClr>
+                          </a:solidFill>
+                        </a:rPr>
+                        <a:t>400</a:t>
+                      </a:r>
+                    </a:p>
+                  </a:txBody>
+                  <a:tcPr>
+                    <a:solidFill>
+                      <a:srgbClr val="FF4343"/>
+                    </a:solidFill>
+                  </a:tcPr>
+                </a:tc>
+                <a:tc>
+                  <a:txBody>
+                    <a:bodyPr/>
+                    <a:lstStyle/>
+                    <a:p>
+                      <a:r>
+                        <a:rPr lang="fr-FR" b="1" dirty="0">
+                          <a:solidFill>
+                            <a:schemeClr val="bg2">
+                              <a:lumMod val="25000"/>
+                            </a:schemeClr>
+                          </a:solidFill>
+                        </a:rPr>
+                        <a:t>405</a:t>
+                      </a:r>
+                    </a:p>
+                  </a:txBody>
+                  <a:tcPr>
+                    <a:solidFill>
+                      <a:srgbClr val="FF4343"/>
+                    </a:solidFill>
+                  </a:tcPr>
+                </a:tc>
+                <a:tc>
+                  <a:txBody>
+                    <a:bodyPr/>
+                    <a:lstStyle/>
+                    <a:p>
+                      <a:endParaRPr lang="fr-FR" b="1" dirty="0">
+                        <a:solidFill>
+                          <a:schemeClr val="bg2">
+                            <a:lumMod val="25000"/>
+                          </a:schemeClr>
+                        </a:solidFill>
+                      </a:endParaRPr>
+                    </a:p>
+                  </a:txBody>
+                  <a:tcPr>
+                    <a:solidFill>
+                      <a:srgbClr val="FF4343"/>
+                    </a:solidFill>
+                  </a:tcPr>
+                </a:tc>
+                <a:extLst>
+                  <a:ext uri="{0D108BD9-81ED-4DB2-BD59-A6C34878D82A}">
+                    <a16:rowId xmlns:a16="http://schemas.microsoft.com/office/drawing/2014/main" val="123359268"/>
+                  </a:ext>
+                </a:extLst>
+              </a:tr>
+              <a:tr h="370840">
+                <a:tc>
+                  <a:txBody>
+                    <a:bodyPr/>
+                    <a:lstStyle/>
+                    <a:p>
+                      <a:r>
+                        <a:rPr lang="fr-FR" b="1" dirty="0">
+                          <a:solidFill>
+                            <a:schemeClr val="bg1"/>
+                          </a:solidFill>
+                        </a:rPr>
+                        <a:t>Gene 3</a:t>
+                      </a:r>
+                    </a:p>
+                  </a:txBody>
+                  <a:tcPr>
+                    <a:solidFill>
+                      <a:srgbClr val="FF4343"/>
+                    </a:solidFill>
+                  </a:tcPr>
+                </a:tc>
+                <a:tc>
+                  <a:txBody>
+                    <a:bodyPr/>
+                    <a:lstStyle/>
+                    <a:p>
+                      <a:r>
+                        <a:rPr lang="fr-FR" b="1" dirty="0">
+                          <a:solidFill>
+                            <a:schemeClr val="bg2">
+                              <a:lumMod val="25000"/>
+                            </a:schemeClr>
+                          </a:solidFill>
+                        </a:rPr>
+                        <a:t>5</a:t>
+                      </a:r>
+                    </a:p>
+                  </a:txBody>
+                  <a:tcPr>
+                    <a:solidFill>
+                      <a:srgbClr val="FF4343"/>
+                    </a:solidFill>
+                  </a:tcPr>
+                </a:tc>
+                <a:tc>
+                  <a:txBody>
+                    <a:bodyPr/>
+                    <a:lstStyle/>
+                    <a:p>
+                      <a:r>
+                        <a:rPr lang="fr-FR" b="1" dirty="0">
+                          <a:solidFill>
+                            <a:schemeClr val="bg2">
+                              <a:lumMod val="25000"/>
+                            </a:schemeClr>
+                          </a:solidFill>
+                        </a:rPr>
+                        <a:t>12</a:t>
+                      </a:r>
+                    </a:p>
+                  </a:txBody>
+                  <a:tcPr>
+                    <a:solidFill>
+                      <a:srgbClr val="FF4343"/>
+                    </a:solidFill>
+                  </a:tcPr>
+                </a:tc>
+                <a:tc>
+                  <a:txBody>
+                    <a:bodyPr/>
+                    <a:lstStyle/>
+                    <a:p>
+                      <a:r>
+                        <a:rPr lang="fr-FR" b="1" dirty="0">
+                          <a:solidFill>
+                            <a:schemeClr val="bg2">
+                              <a:lumMod val="25000"/>
+                            </a:schemeClr>
+                          </a:solidFill>
+                        </a:rPr>
+                        <a:t>76</a:t>
+                      </a:r>
+                    </a:p>
+                  </a:txBody>
+                  <a:tcPr>
+                    <a:solidFill>
+                      <a:srgbClr val="FF4343"/>
+                    </a:solidFill>
+                  </a:tcPr>
+                </a:tc>
+                <a:tc>
+                  <a:txBody>
+                    <a:bodyPr/>
+                    <a:lstStyle/>
+                    <a:p>
+                      <a:r>
+                        <a:rPr lang="fr-FR" b="1" dirty="0">
+                          <a:solidFill>
+                            <a:schemeClr val="bg2">
+                              <a:lumMod val="25000"/>
+                            </a:schemeClr>
+                          </a:solidFill>
+                        </a:rPr>
+                        <a:t>48</a:t>
+                      </a:r>
+                    </a:p>
+                  </a:txBody>
+                  <a:tcPr>
+                    <a:solidFill>
+                      <a:srgbClr val="FF4343"/>
+                    </a:solidFill>
+                  </a:tcPr>
+                </a:tc>
+                <a:tc>
+                  <a:txBody>
+                    <a:bodyPr/>
+                    <a:lstStyle/>
+                    <a:p>
+                      <a:endParaRPr lang="fr-FR" b="1" dirty="0">
+                        <a:solidFill>
+                          <a:schemeClr val="bg2">
+                            <a:lumMod val="25000"/>
+                          </a:schemeClr>
+                        </a:solidFill>
+                      </a:endParaRPr>
+                    </a:p>
+                  </a:txBody>
+                  <a:tcPr>
+                    <a:solidFill>
+                      <a:srgbClr val="FF4343"/>
+                    </a:solidFill>
+                  </a:tcPr>
+                </a:tc>
+                <a:extLst>
+                  <a:ext uri="{0D108BD9-81ED-4DB2-BD59-A6C34878D82A}">
+                    <a16:rowId xmlns:a16="http://schemas.microsoft.com/office/drawing/2014/main" val="1872581909"/>
+                  </a:ext>
+                </a:extLst>
+              </a:tr>
+              <a:tr h="370840">
+                <a:tc>
+                  <a:txBody>
+                    <a:bodyPr/>
+                    <a:lstStyle/>
+                    <a:p>
+                      <a:r>
+                        <a:rPr lang="fr-FR" b="1" dirty="0">
+                          <a:solidFill>
+                            <a:schemeClr val="bg1"/>
+                          </a:solidFill>
+                        </a:rPr>
+                        <a:t>Gene 4</a:t>
+                      </a:r>
+                    </a:p>
+                  </a:txBody>
+                  <a:tcPr>
+                    <a:solidFill>
+                      <a:srgbClr val="FF4343"/>
+                    </a:solidFill>
+                  </a:tcPr>
+                </a:tc>
+                <a:tc>
+                  <a:txBody>
+                    <a:bodyPr/>
+                    <a:lstStyle/>
+                    <a:p>
+                      <a:r>
+                        <a:rPr lang="fr-FR" b="1" dirty="0">
+                          <a:solidFill>
+                            <a:schemeClr val="bg2">
+                              <a:lumMod val="25000"/>
+                            </a:schemeClr>
+                          </a:solidFill>
+                        </a:rPr>
+                        <a:t>78</a:t>
+                      </a:r>
+                    </a:p>
+                  </a:txBody>
+                  <a:tcPr>
+                    <a:solidFill>
+                      <a:srgbClr val="FF4343"/>
+                    </a:solidFill>
+                  </a:tcPr>
+                </a:tc>
+                <a:tc>
+                  <a:txBody>
+                    <a:bodyPr/>
+                    <a:lstStyle/>
+                    <a:p>
+                      <a:r>
+                        <a:rPr lang="fr-FR" b="1" dirty="0">
+                          <a:solidFill>
+                            <a:schemeClr val="bg2">
+                              <a:lumMod val="25000"/>
+                            </a:schemeClr>
+                          </a:solidFill>
+                        </a:rPr>
+                        <a:t>99</a:t>
+                      </a:r>
+                    </a:p>
+                  </a:txBody>
+                  <a:tcPr>
+                    <a:solidFill>
+                      <a:srgbClr val="FF4343"/>
+                    </a:solidFill>
+                  </a:tcPr>
+                </a:tc>
+                <a:tc>
+                  <a:txBody>
+                    <a:bodyPr/>
+                    <a:lstStyle/>
+                    <a:p>
+                      <a:r>
+                        <a:rPr lang="fr-FR" b="1" dirty="0">
+                          <a:solidFill>
+                            <a:schemeClr val="bg2">
+                              <a:lumMod val="25000"/>
+                            </a:schemeClr>
+                          </a:solidFill>
+                        </a:rPr>
+                        <a:t>766</a:t>
+                      </a:r>
+                    </a:p>
+                  </a:txBody>
+                  <a:tcPr>
+                    <a:solidFill>
+                      <a:srgbClr val="FF4343"/>
+                    </a:solidFill>
+                  </a:tcPr>
+                </a:tc>
+                <a:tc>
+                  <a:txBody>
+                    <a:bodyPr/>
+                    <a:lstStyle/>
+                    <a:p>
+                      <a:r>
+                        <a:rPr lang="fr-FR" b="1" dirty="0">
+                          <a:solidFill>
+                            <a:schemeClr val="bg2">
+                              <a:lumMod val="25000"/>
+                            </a:schemeClr>
+                          </a:solidFill>
+                        </a:rPr>
+                        <a:t>545</a:t>
+                      </a:r>
+                    </a:p>
+                  </a:txBody>
+                  <a:tcPr>
+                    <a:solidFill>
+                      <a:srgbClr val="FF4343"/>
+                    </a:solidFill>
+                  </a:tcPr>
+                </a:tc>
+                <a:tc>
+                  <a:txBody>
+                    <a:bodyPr/>
+                    <a:lstStyle/>
+                    <a:p>
+                      <a:endParaRPr lang="fr-FR" b="1" dirty="0">
+                        <a:solidFill>
+                          <a:schemeClr val="bg2">
+                            <a:lumMod val="25000"/>
+                          </a:schemeClr>
+                        </a:solidFill>
+                      </a:endParaRPr>
+                    </a:p>
+                  </a:txBody>
+                  <a:tcPr>
+                    <a:solidFill>
+                      <a:srgbClr val="FF4343"/>
+                    </a:solidFill>
+                  </a:tcPr>
+                </a:tc>
+                <a:extLst>
+                  <a:ext uri="{0D108BD9-81ED-4DB2-BD59-A6C34878D82A}">
+                    <a16:rowId xmlns:a16="http://schemas.microsoft.com/office/drawing/2014/main" val="399731912"/>
+                  </a:ext>
+                </a:extLst>
+              </a:tr>
+            </a:tbl>
+          </a:graphicData>
+        </a:graphic>
+      </p:graphicFrame>
+    </p:spTree>
+    <p:extLst>
+      <p:ext uri="{BB962C8B-B14F-4D97-AF65-F5344CB8AC3E}">
+        <p14:creationId xmlns:p14="http://schemas.microsoft.com/office/powerpoint/2010/main" val="3938232735"/>
+      </p:ext>
+    </p:extLst>
+  </p:cSld>
+  <p:clrMapOvr>
+    <a:masterClrMapping/>
+  </p:clrMapOvr>
+</p:sld>
+</file>
+
+<file path=ppt/slides/slide4.xml><?xml version="1.0" encoding="utf-8"?>
+<p:sld xmlns:a="http://schemas.openxmlformats.org/drawingml/2006/main" xmlns:r="http://schemas.openxmlformats.org/officeDocument/2006/relationships" xmlns:p="http://schemas.openxmlformats.org/presentationml/2006/main">
+  <p:cSld>
+    <p:spTree>
+      <p:nvGrpSpPr>
+        <p:cNvPr id="1" name="">
+          <a:extLst>
+            <a:ext uri="{FF2B5EF4-FFF2-40B4-BE49-F238E27FC236}">
+              <a16:creationId xmlns:a16="http://schemas.microsoft.com/office/drawing/2014/main" id="{AF11A6BC-ABB2-7902-ED05-22DC97FDAADE}"/>
+            </a:ext>
+          </a:extLst>
+        </p:cNvPr>
+        <p:cNvGrpSpPr/>
+        <p:nvPr/>
+      </p:nvGrpSpPr>
+      <p:grpSpPr>
+        <a:xfrm>
+          <a:off x="0" y="0"/>
+          <a:ext cx="0" cy="0"/>
+          <a:chOff x="0" y="0"/>
+          <a:chExt cx="0" cy="0"/>
+        </a:xfrm>
+      </p:grpSpPr>
+      <p:sp>
+        <p:nvSpPr>
+          <p:cNvPr id="4" name="Rectangle 1">
+            <a:extLst>
+              <a:ext uri="{FF2B5EF4-FFF2-40B4-BE49-F238E27FC236}">
+                <a16:creationId xmlns:a16="http://schemas.microsoft.com/office/drawing/2014/main" id="{E243952B-D51D-8CF0-72CF-7E98F6A0F91A}"/>
+              </a:ext>
+            </a:extLst>
+          </p:cNvPr>
+          <p:cNvSpPr>
+            <a:spLocks noChangeArrowheads="1"/>
+          </p:cNvSpPr>
+          <p:nvPr/>
+        </p:nvSpPr>
+        <p:spPr bwMode="auto">
+          <a:xfrm>
+            <a:off x="1725582" y="-66481"/>
+            <a:ext cx="7373448" cy="1107996"/>
+          </a:xfrm>
+          <a:prstGeom prst="rect">
+            <a:avLst/>
+          </a:prstGeom>
+          <a:noFill/>
+          <a:ln>
+            <a:noFill/>
+          </a:ln>
+          <a:effectLst/>
+          <a:extLst>
+            <a:ext uri="{909E8E84-426E-40DD-AFC4-6F175D3DCCD1}">
+              <a14:hiddenFill xmlns:a14="http://schemas.microsoft.com/office/drawing/2010/main">
+                <a:solidFill>
+                  <a:schemeClr val="accent1"/>
+                </a:solidFill>
+              </a14:hiddenFill>
+            </a:ext>
+            <a:ext uri="{91240B29-F687-4F45-9708-019B960494DF}">
+              <a14:hiddenLine xmlns:a14="http://schemas.microsoft.com/office/drawing/2010/main" w="9525">
+                <a:solidFill>
+                  <a:schemeClr val="tx1"/>
+                </a:solidFill>
+                <a:miter lim="800000"/>
+                <a:headEnd/>
+                <a:tailEnd/>
+              </a14:hiddenLine>
+            </a:ext>
+            <a:ext uri="{AF507438-7753-43E0-B8FC-AC1667EBCBE1}">
+              <a14:hiddenEffects xmlns:a14="http://schemas.microsoft.com/office/drawing/2010/main">
+                <a:effectLst>
+                  <a:outerShdw dist="35921" dir="2700000" algn="ctr" rotWithShape="0">
+                    <a:schemeClr val="bg2"/>
+                  </a:outerShdw>
+                </a:effectLst>
+              </a14:hiddenEffects>
+            </a:ext>
+          </a:extLst>
+        </p:spPr>
+        <p:txBody>
+          <a:bodyPr vert="horz" wrap="square" lIns="91440" tIns="45720" rIns="91440" bIns="45720" numCol="1" anchor="ctr" anchorCtr="0" compatLnSpc="1">
+            <a:prstTxWarp prst="textNoShape">
+              <a:avLst/>
+            </a:prstTxWarp>
+            <a:spAutoFit/>
+          </a:bodyPr>
+          <a:lstStyle/>
+          <a:p>
+            <a:pPr marL="0" marR="0" lvl="0" indent="0" algn="l" defTabSz="914400" rtl="0" eaLnBrk="0" fontAlgn="base" latinLnBrk="0" hangingPunct="0">
+              <a:lnSpc>
+                <a:spcPct val="100000"/>
+              </a:lnSpc>
+              <a:spcBef>
+                <a:spcPct val="0"/>
+              </a:spcBef>
+              <a:spcAft>
+                <a:spcPct val="0"/>
+              </a:spcAft>
+              <a:buClrTx/>
+              <a:buSzTx/>
+              <a:buFontTx/>
+              <a:buNone/>
+              <a:tabLst/>
+            </a:pPr>
+            <a:r>
+              <a:rPr kumimoji="0" lang="fr-FR" altLang="fr-FR" sz="6600" b="1" i="0" u="none" strike="noStrike" cap="none" normalizeH="0" baseline="0" dirty="0" err="1">
+                <a:ln>
+                  <a:noFill/>
+                </a:ln>
+                <a:solidFill>
+                  <a:srgbClr val="000000"/>
+                </a:solidFill>
+                <a:effectLst/>
+                <a:latin typeface="Oswald" panose="020F0502020204030204" pitchFamily="2" charset="0"/>
+              </a:rPr>
+              <a:t>Quality</a:t>
+            </a:r>
+            <a:r>
+              <a:rPr kumimoji="0" lang="fr-FR" altLang="fr-FR" sz="6600" b="1" i="0" u="none" strike="noStrike" cap="none" normalizeH="0" baseline="0" dirty="0">
+                <a:ln>
+                  <a:noFill/>
+                </a:ln>
+                <a:solidFill>
+                  <a:srgbClr val="000000"/>
+                </a:solidFill>
+                <a:effectLst/>
+                <a:latin typeface="Oswald" panose="020F0502020204030204" pitchFamily="2" charset="0"/>
+              </a:rPr>
+              <a:t> control</a:t>
+            </a:r>
+            <a:endParaRPr kumimoji="0" lang="fr-FR" altLang="fr-FR" sz="3200" b="0" i="0" u="none" strike="noStrike" cap="none" normalizeH="0" baseline="0" dirty="0">
+              <a:ln>
+                <a:noFill/>
+              </a:ln>
+              <a:solidFill>
+                <a:schemeClr val="tx1"/>
+              </a:solidFill>
+              <a:effectLst/>
+              <a:latin typeface="Arial" panose="020B0604020202020204" pitchFamily="34" charset="0"/>
+            </a:endParaRPr>
+          </a:p>
+        </p:txBody>
+      </p:sp>
+      <p:pic>
+        <p:nvPicPr>
+          <p:cNvPr id="1026" name="Picture 2">
+            <a:extLst>
+              <a:ext uri="{FF2B5EF4-FFF2-40B4-BE49-F238E27FC236}">
+                <a16:creationId xmlns:a16="http://schemas.microsoft.com/office/drawing/2014/main" id="{F59655B4-863F-5F46-934B-7373D836A929}"/>
+              </a:ext>
+            </a:extLst>
+          </p:cNvPr>
+          <p:cNvPicPr>
+            <a:picLocks noChangeAspect="1" noChangeArrowheads="1"/>
+          </p:cNvPicPr>
+          <p:nvPr/>
+        </p:nvPicPr>
+        <p:blipFill>
+          <a:blip r:embed="rId2">
+            <a:extLst>
+              <a:ext uri="{28A0092B-C50C-407E-A947-70E740481C1C}">
+                <a14:useLocalDpi xmlns:a14="http://schemas.microsoft.com/office/drawing/2010/main" val="0"/>
+              </a:ext>
+            </a:extLst>
+          </a:blip>
+          <a:srcRect/>
+          <a:stretch>
+            <a:fillRect/>
+          </a:stretch>
+        </p:blipFill>
+        <p:spPr bwMode="auto">
+          <a:xfrm>
+            <a:off x="127000" y="107066"/>
+            <a:ext cx="1104900" cy="438150"/>
+          </a:xfrm>
+          <a:prstGeom prst="rect">
+            <a:avLst/>
+          </a:prstGeom>
+          <a:noFill/>
+          <a:extLst>
+            <a:ext uri="{909E8E84-426E-40DD-AFC4-6F175D3DCCD1}">
+              <a14:hiddenFill xmlns:a14="http://schemas.microsoft.com/office/drawing/2010/main">
+                <a:solidFill>
+                  <a:srgbClr val="FFFFFF"/>
+                </a:solidFill>
+              </a14:hiddenFill>
+            </a:ext>
+          </a:extLst>
+        </p:spPr>
+      </p:pic>
+      <p:sp>
+        <p:nvSpPr>
+          <p:cNvPr id="5" name="ZoneTexte 4">
+            <a:extLst>
+              <a:ext uri="{FF2B5EF4-FFF2-40B4-BE49-F238E27FC236}">
+                <a16:creationId xmlns:a16="http://schemas.microsoft.com/office/drawing/2014/main" id="{46779A8C-C184-1FDA-6731-D89C427FC157}"/>
+              </a:ext>
+            </a:extLst>
+          </p:cNvPr>
+          <p:cNvSpPr txBox="1"/>
+          <p:nvPr/>
+        </p:nvSpPr>
+        <p:spPr>
+          <a:xfrm>
+            <a:off x="7390578" y="150958"/>
+            <a:ext cx="6310859" cy="369332"/>
+          </a:xfrm>
+          <a:prstGeom prst="rect">
+            <a:avLst/>
+          </a:prstGeom>
+          <a:noFill/>
+        </p:spPr>
+        <p:txBody>
+          <a:bodyPr wrap="square" rtlCol="0">
+            <a:spAutoFit/>
+          </a:bodyPr>
+          <a:lstStyle/>
+          <a:p>
+            <a:pPr marL="285750" indent="-285750">
+              <a:buClr>
+                <a:srgbClr val="FF0000"/>
+              </a:buClr>
+              <a:buFont typeface="Wingdings" panose="05000000000000000000" pitchFamily="2" charset="2"/>
+              <a:buChar char="§"/>
+            </a:pPr>
+            <a:r>
+              <a:rPr lang="fr-FR" b="1" dirty="0" err="1">
+                <a:solidFill>
+                  <a:schemeClr val="bg2">
+                    <a:lumMod val="25000"/>
+                  </a:schemeClr>
+                </a:solidFill>
+              </a:rPr>
+              <a:t>Number</a:t>
+            </a:r>
+            <a:r>
+              <a:rPr lang="fr-FR" b="1" dirty="0">
+                <a:solidFill>
+                  <a:schemeClr val="bg2">
+                    <a:lumMod val="25000"/>
+                  </a:schemeClr>
+                </a:solidFill>
+              </a:rPr>
+              <a:t> of </a:t>
+            </a:r>
+            <a:r>
+              <a:rPr lang="fr-FR" b="1" dirty="0" err="1">
+                <a:solidFill>
+                  <a:schemeClr val="bg2">
+                    <a:lumMod val="25000"/>
+                  </a:schemeClr>
+                </a:solidFill>
+              </a:rPr>
+              <a:t>reads</a:t>
+            </a:r>
+            <a:r>
+              <a:rPr lang="fr-FR" b="1" dirty="0">
+                <a:solidFill>
+                  <a:schemeClr val="bg2">
+                    <a:lumMod val="25000"/>
+                  </a:schemeClr>
+                </a:solidFill>
+              </a:rPr>
+              <a:t> per run</a:t>
+            </a:r>
+          </a:p>
+        </p:txBody>
+      </p:sp>
+      <p:sp>
+        <p:nvSpPr>
+          <p:cNvPr id="11" name="ZoneTexte 10">
+            <a:extLst>
+              <a:ext uri="{FF2B5EF4-FFF2-40B4-BE49-F238E27FC236}">
+                <a16:creationId xmlns:a16="http://schemas.microsoft.com/office/drawing/2014/main" id="{26B7E9F9-D128-3CD8-E1A2-74F7892D8382}"/>
+              </a:ext>
+            </a:extLst>
+          </p:cNvPr>
+          <p:cNvSpPr txBox="1"/>
+          <p:nvPr/>
+        </p:nvSpPr>
+        <p:spPr>
+          <a:xfrm>
+            <a:off x="359765" y="3703657"/>
+            <a:ext cx="3927422" cy="646331"/>
+          </a:xfrm>
+          <a:prstGeom prst="rect">
+            <a:avLst/>
+          </a:prstGeom>
+          <a:noFill/>
+        </p:spPr>
+        <p:txBody>
+          <a:bodyPr wrap="square">
+            <a:spAutoFit/>
+          </a:bodyPr>
+          <a:lstStyle/>
+          <a:p>
+            <a:pPr marL="285750" indent="-285750">
+              <a:buClr>
+                <a:srgbClr val="FF0000"/>
+              </a:buClr>
+              <a:buFont typeface="Wingdings" panose="05000000000000000000" pitchFamily="2" charset="2"/>
+              <a:buChar char="§"/>
+            </a:pPr>
+            <a:r>
+              <a:rPr lang="fr-FR" b="1" dirty="0">
+                <a:solidFill>
+                  <a:schemeClr val="bg2">
+                    <a:lumMod val="25000"/>
+                  </a:schemeClr>
+                </a:solidFill>
+              </a:rPr>
+              <a:t>Percentage of </a:t>
+            </a:r>
+            <a:r>
+              <a:rPr lang="fr-FR" b="1" dirty="0" err="1">
+                <a:solidFill>
+                  <a:schemeClr val="bg2">
+                    <a:lumMod val="25000"/>
+                  </a:schemeClr>
+                </a:solidFill>
+              </a:rPr>
+              <a:t>detected</a:t>
+            </a:r>
+            <a:r>
+              <a:rPr lang="fr-FR" b="1" dirty="0">
+                <a:solidFill>
+                  <a:schemeClr val="bg2">
+                    <a:lumMod val="25000"/>
+                  </a:schemeClr>
+                </a:solidFill>
+              </a:rPr>
+              <a:t> </a:t>
+            </a:r>
+            <a:r>
+              <a:rPr lang="fr-FR" b="1" dirty="0" err="1">
+                <a:solidFill>
+                  <a:schemeClr val="bg2">
+                    <a:lumMod val="25000"/>
+                  </a:schemeClr>
+                </a:solidFill>
+              </a:rPr>
+              <a:t>bacterial</a:t>
+            </a:r>
+            <a:r>
+              <a:rPr lang="fr-FR" b="1" dirty="0">
+                <a:solidFill>
+                  <a:schemeClr val="bg2">
+                    <a:lumMod val="25000"/>
+                  </a:schemeClr>
+                </a:solidFill>
+              </a:rPr>
+              <a:t> and phage </a:t>
+            </a:r>
+            <a:r>
+              <a:rPr lang="fr-FR" b="1" dirty="0" err="1">
+                <a:solidFill>
+                  <a:schemeClr val="bg2">
+                    <a:lumMod val="25000"/>
+                  </a:schemeClr>
+                </a:solidFill>
+              </a:rPr>
+              <a:t>genes</a:t>
+            </a:r>
+            <a:endParaRPr lang="fr-FR" b="1" dirty="0">
+              <a:solidFill>
+                <a:schemeClr val="bg2">
+                  <a:lumMod val="25000"/>
+                </a:schemeClr>
+              </a:solidFill>
+            </a:endParaRPr>
+          </a:p>
+        </p:txBody>
+      </p:sp>
+      <p:sp>
+        <p:nvSpPr>
+          <p:cNvPr id="16" name="ZoneTexte 15">
+            <a:extLst>
+              <a:ext uri="{FF2B5EF4-FFF2-40B4-BE49-F238E27FC236}">
+                <a16:creationId xmlns:a16="http://schemas.microsoft.com/office/drawing/2014/main" id="{864534BD-9D68-D42D-52A5-9F467EE1E6D5}"/>
+              </a:ext>
+            </a:extLst>
+          </p:cNvPr>
+          <p:cNvSpPr txBox="1"/>
+          <p:nvPr/>
+        </p:nvSpPr>
+        <p:spPr>
+          <a:xfrm>
+            <a:off x="5738735" y="2904282"/>
+            <a:ext cx="6093500" cy="369332"/>
+          </a:xfrm>
+          <a:prstGeom prst="rect">
+            <a:avLst/>
+          </a:prstGeom>
+          <a:noFill/>
+        </p:spPr>
+        <p:txBody>
+          <a:bodyPr wrap="square">
+            <a:spAutoFit/>
+          </a:bodyPr>
+          <a:lstStyle/>
+          <a:p>
+            <a:pPr marL="285750" indent="-285750">
+              <a:buClr>
+                <a:srgbClr val="FF0000"/>
+              </a:buClr>
+              <a:buFont typeface="Wingdings" panose="05000000000000000000" pitchFamily="2" charset="2"/>
+              <a:buChar char="§"/>
+            </a:pPr>
+            <a:r>
+              <a:rPr lang="fr-FR" b="1" dirty="0">
+                <a:solidFill>
+                  <a:schemeClr val="bg2">
+                    <a:lumMod val="25000"/>
+                  </a:schemeClr>
+                </a:solidFill>
+              </a:rPr>
+              <a:t>CLR </a:t>
+            </a:r>
+            <a:r>
+              <a:rPr lang="fr-FR" b="1" dirty="0" err="1">
+                <a:solidFill>
+                  <a:schemeClr val="bg2">
+                    <a:lumMod val="25000"/>
+                  </a:schemeClr>
+                </a:solidFill>
+              </a:rPr>
+              <a:t>ranked</a:t>
+            </a:r>
+            <a:endParaRPr lang="fr-FR" b="1" dirty="0">
+              <a:solidFill>
+                <a:schemeClr val="bg2">
+                  <a:lumMod val="25000"/>
+                </a:schemeClr>
+              </a:solidFill>
+            </a:endParaRPr>
+          </a:p>
+        </p:txBody>
+      </p:sp>
+      <p:pic>
+        <p:nvPicPr>
+          <p:cNvPr id="24" name="Image 23" descr="Une image contenant texte, capture d’écran, Police, Parallèle&#10;&#10;Le contenu généré par l’IA peut être incorrect.">
+            <a:extLst>
+              <a:ext uri="{FF2B5EF4-FFF2-40B4-BE49-F238E27FC236}">
+                <a16:creationId xmlns:a16="http://schemas.microsoft.com/office/drawing/2014/main" id="{340500F3-CFFA-14E7-F866-A129568C4F31}"/>
+              </a:ext>
+            </a:extLst>
+          </p:cNvPr>
+          <p:cNvPicPr>
+            <a:picLocks noChangeAspect="1"/>
+          </p:cNvPicPr>
+          <p:nvPr/>
+        </p:nvPicPr>
+        <p:blipFill>
+          <a:blip r:embed="rId3">
+            <a:extLst>
+              <a:ext uri="{28A0092B-C50C-407E-A947-70E740481C1C}">
+                <a14:useLocalDpi xmlns:a14="http://schemas.microsoft.com/office/drawing/2010/main" val="0"/>
+              </a:ext>
+            </a:extLst>
+          </a:blip>
+          <a:stretch>
+            <a:fillRect/>
+          </a:stretch>
+        </p:blipFill>
+        <p:spPr>
+          <a:xfrm>
+            <a:off x="359765" y="4366207"/>
+            <a:ext cx="3980064" cy="2456268"/>
+          </a:xfrm>
+          <a:prstGeom prst="rect">
+            <a:avLst/>
+          </a:prstGeom>
+        </p:spPr>
+      </p:pic>
+      <p:pic>
+        <p:nvPicPr>
+          <p:cNvPr id="26" name="Image 25" descr="Une image contenant texte, capture d’écran, Police, diagramme&#10;&#10;Le contenu généré par l’IA peut être incorrect.">
+            <a:extLst>
+              <a:ext uri="{FF2B5EF4-FFF2-40B4-BE49-F238E27FC236}">
+                <a16:creationId xmlns:a16="http://schemas.microsoft.com/office/drawing/2014/main" id="{603B8219-27C5-C356-FAED-A1E6184EABE3}"/>
+              </a:ext>
+            </a:extLst>
+          </p:cNvPr>
+          <p:cNvPicPr>
+            <a:picLocks noChangeAspect="1"/>
+          </p:cNvPicPr>
+          <p:nvPr/>
+        </p:nvPicPr>
+        <p:blipFill>
+          <a:blip r:embed="rId4">
+            <a:extLst>
+              <a:ext uri="{28A0092B-C50C-407E-A947-70E740481C1C}">
+                <a14:useLocalDpi xmlns:a14="http://schemas.microsoft.com/office/drawing/2010/main" val="0"/>
+              </a:ext>
+            </a:extLst>
+          </a:blip>
+          <a:stretch>
+            <a:fillRect/>
+          </a:stretch>
+        </p:blipFill>
+        <p:spPr>
+          <a:xfrm>
+            <a:off x="7390578" y="603691"/>
+            <a:ext cx="4321600" cy="2667044"/>
+          </a:xfrm>
+          <a:prstGeom prst="rect">
+            <a:avLst/>
+          </a:prstGeom>
+        </p:spPr>
+      </p:pic>
+      <p:pic>
+        <p:nvPicPr>
+          <p:cNvPr id="31" name="Image 30" descr="Une image contenant texte, capture d’écran, diagramme, ligne&#10;&#10;Le contenu généré par l’IA peut être incorrect.">
+            <a:extLst>
+              <a:ext uri="{FF2B5EF4-FFF2-40B4-BE49-F238E27FC236}">
+                <a16:creationId xmlns:a16="http://schemas.microsoft.com/office/drawing/2014/main" id="{9EC9CAC4-C54E-FEF4-C77F-3D071EA70F5F}"/>
+              </a:ext>
+            </a:extLst>
+          </p:cNvPr>
+          <p:cNvPicPr>
+            <a:picLocks noChangeAspect="1"/>
+          </p:cNvPicPr>
+          <p:nvPr/>
+        </p:nvPicPr>
+        <p:blipFill>
+          <a:blip r:embed="rId5">
+            <a:extLst>
+              <a:ext uri="{28A0092B-C50C-407E-A947-70E740481C1C}">
+                <a14:useLocalDpi xmlns:a14="http://schemas.microsoft.com/office/drawing/2010/main" val="0"/>
+              </a:ext>
+            </a:extLst>
+          </a:blip>
+          <a:stretch>
+            <a:fillRect/>
+          </a:stretch>
+        </p:blipFill>
+        <p:spPr>
+          <a:xfrm>
+            <a:off x="1231900" y="954026"/>
+            <a:ext cx="3966463" cy="2833189"/>
+          </a:xfrm>
+          <a:prstGeom prst="rect">
+            <a:avLst/>
+          </a:prstGeom>
+        </p:spPr>
+      </p:pic>
+      <p:pic>
+        <p:nvPicPr>
+          <p:cNvPr id="33" name="Image 32" descr="Une image contenant texte, ligne, diagramme, capture d’écran&#10;&#10;Le contenu généré par l’IA peut être incorrect.">
+            <a:extLst>
+              <a:ext uri="{FF2B5EF4-FFF2-40B4-BE49-F238E27FC236}">
+                <a16:creationId xmlns:a16="http://schemas.microsoft.com/office/drawing/2014/main" id="{505EC9DC-EC80-E7A9-5CF6-1D564AC01537}"/>
+              </a:ext>
+            </a:extLst>
+          </p:cNvPr>
+          <p:cNvPicPr>
+            <a:picLocks noChangeAspect="1"/>
+          </p:cNvPicPr>
+          <p:nvPr/>
+        </p:nvPicPr>
+        <p:blipFill>
+          <a:blip r:embed="rId6"/>
+          <a:srcRect l="67117"/>
+          <a:stretch>
+            <a:fillRect/>
+          </a:stretch>
+        </p:blipFill>
+        <p:spPr>
+          <a:xfrm>
+            <a:off x="8828001" y="3270735"/>
+            <a:ext cx="3004234" cy="3587265"/>
+          </a:xfrm>
+          <a:prstGeom prst="rect">
+            <a:avLst/>
+          </a:prstGeom>
+        </p:spPr>
+      </p:pic>
+      <p:pic>
+        <p:nvPicPr>
+          <p:cNvPr id="34" name="Image 33" descr="Une image contenant texte, ligne, diagramme, capture d’écran&#10;&#10;Le contenu généré par l’IA peut être incorrect.">
+            <a:extLst>
+              <a:ext uri="{FF2B5EF4-FFF2-40B4-BE49-F238E27FC236}">
+                <a16:creationId xmlns:a16="http://schemas.microsoft.com/office/drawing/2014/main" id="{E55404CD-4CFD-39DA-A82C-EC2BE4E450B6}"/>
+              </a:ext>
+            </a:extLst>
+          </p:cNvPr>
+          <p:cNvPicPr>
+            <a:picLocks noChangeAspect="1"/>
+          </p:cNvPicPr>
+          <p:nvPr/>
+        </p:nvPicPr>
+        <p:blipFill>
+          <a:blip r:embed="rId6"/>
+          <a:srcRect r="67117"/>
+          <a:stretch>
+            <a:fillRect/>
+          </a:stretch>
+        </p:blipFill>
+        <p:spPr>
+          <a:xfrm>
+            <a:off x="5622958" y="3270735"/>
+            <a:ext cx="3004233" cy="3587265"/>
+          </a:xfrm>
+          <a:prstGeom prst="rect">
+            <a:avLst/>
+          </a:prstGeom>
+        </p:spPr>
+      </p:pic>
+      <p:sp>
+        <p:nvSpPr>
+          <p:cNvPr id="27" name="ZoneTexte 26">
+            <a:extLst>
+              <a:ext uri="{FF2B5EF4-FFF2-40B4-BE49-F238E27FC236}">
+                <a16:creationId xmlns:a16="http://schemas.microsoft.com/office/drawing/2014/main" id="{C1C1C38E-6FA2-8DF4-4416-F40B98E311AE}"/>
+              </a:ext>
+            </a:extLst>
+          </p:cNvPr>
+          <p:cNvSpPr txBox="1"/>
+          <p:nvPr/>
+        </p:nvSpPr>
+        <p:spPr>
+          <a:xfrm>
+            <a:off x="1783653" y="950095"/>
+            <a:ext cx="6093500" cy="369332"/>
+          </a:xfrm>
+          <a:prstGeom prst="rect">
+            <a:avLst/>
+          </a:prstGeom>
+          <a:noFill/>
+        </p:spPr>
+        <p:txBody>
+          <a:bodyPr wrap="square">
+            <a:spAutoFit/>
+          </a:bodyPr>
+          <a:lstStyle/>
+          <a:p>
+            <a:pPr marL="285750" indent="-285750">
+              <a:buClr>
+                <a:srgbClr val="FF0000"/>
+              </a:buClr>
+              <a:buFont typeface="Wingdings" panose="05000000000000000000" pitchFamily="2" charset="2"/>
+              <a:buChar char="§"/>
+            </a:pPr>
+            <a:r>
+              <a:rPr lang="fr-FR" b="1" dirty="0" err="1">
+                <a:solidFill>
+                  <a:schemeClr val="bg2">
+                    <a:lumMod val="25000"/>
+                  </a:schemeClr>
+                </a:solidFill>
+              </a:rPr>
+              <a:t>PCoA</a:t>
+            </a:r>
+            <a:r>
+              <a:rPr lang="fr-FR" b="1" dirty="0">
+                <a:solidFill>
+                  <a:schemeClr val="bg2">
+                    <a:lumMod val="25000"/>
+                  </a:schemeClr>
+                </a:solidFill>
+              </a:rPr>
+              <a:t> of CLR</a:t>
+            </a:r>
           </a:p>
         </p:txBody>
       </p:sp>
     </p:spTree>
     <p:extLst>
       <p:ext uri="{BB962C8B-B14F-4D97-AF65-F5344CB8AC3E}">
-        <p14:creationId xmlns:p14="http://schemas.microsoft.com/office/powerpoint/2010/main" val="3910591626"/>
+        <p14:creationId xmlns:p14="http://schemas.microsoft.com/office/powerpoint/2010/main" val="857520673"/>
       </p:ext>
     </p:extLst>
   </p:cSld>

--- a/final_presentation.pptx
+++ b/final_presentation.pptx
@@ -162,7 +162,7 @@
   <pc:docChgLst>
     <pc:chgData name="Mathilde Annette Nicole Roulleau" userId="4ab294c6-1984-4b16-bc43-8e77deede0e4" providerId="ADAL" clId="{79810BCC-BAA2-4D46-8788-90936CCE2327}"/>
     <pc:docChg chg="undo custSel addSld delSld modSld sldOrd">
-      <pc:chgData name="Mathilde Annette Nicole Roulleau" userId="4ab294c6-1984-4b16-bc43-8e77deede0e4" providerId="ADAL" clId="{79810BCC-BAA2-4D46-8788-90936CCE2327}" dt="2026-02-23T21:42:22.281" v="9378" actId="1076"/>
+      <pc:chgData name="Mathilde Annette Nicole Roulleau" userId="4ab294c6-1984-4b16-bc43-8e77deede0e4" providerId="ADAL" clId="{79810BCC-BAA2-4D46-8788-90936CCE2327}" dt="2026-02-27T15:30:31.046" v="9380" actId="1076"/>
       <pc:docMkLst>
         <pc:docMk/>
       </pc:docMkLst>
@@ -298,14 +298,6 @@
             <ac:spMk id="4" creationId="{F2825D4A-B38D-0E75-C8A6-2D8B9DC97E68}"/>
           </ac:spMkLst>
         </pc:spChg>
-        <pc:spChg chg="add del mod">
-          <ac:chgData name="Mathilde Annette Nicole Roulleau" userId="4ab294c6-1984-4b16-bc43-8e77deede0e4" providerId="ADAL" clId="{79810BCC-BAA2-4D46-8788-90936CCE2327}" dt="2026-02-23T21:37:30.742" v="9355" actId="478"/>
-          <ac:spMkLst>
-            <pc:docMk/>
-            <pc:sldMk cId="3938232735" sldId="258"/>
-            <ac:spMk id="5" creationId="{8DE7E16A-171C-4736-4DCE-989324142E89}"/>
-          </ac:spMkLst>
-        </pc:spChg>
         <pc:spChg chg="add mod">
           <ac:chgData name="Mathilde Annette Nicole Roulleau" userId="4ab294c6-1984-4b16-bc43-8e77deede0e4" providerId="ADAL" clId="{79810BCC-BAA2-4D46-8788-90936CCE2327}" dt="2026-02-23T21:38:18.552" v="9360" actId="1035"/>
           <ac:spMkLst>
@@ -376,14 +368,6 @@
             <pc:docMk/>
             <pc:sldMk cId="3938232735" sldId="258"/>
             <ac:cxnSpMk id="10" creationId="{16F926EE-E02B-97B4-06F3-F7BDD8261526}"/>
-          </ac:cxnSpMkLst>
-        </pc:cxnChg>
-        <pc:cxnChg chg="del mod">
-          <ac:chgData name="Mathilde Annette Nicole Roulleau" userId="4ab294c6-1984-4b16-bc43-8e77deede0e4" providerId="ADAL" clId="{79810BCC-BAA2-4D46-8788-90936CCE2327}" dt="2026-02-23T21:37:30.742" v="9355" actId="478"/>
-          <ac:cxnSpMkLst>
-            <pc:docMk/>
-            <pc:sldMk cId="3938232735" sldId="258"/>
-            <ac:cxnSpMk id="15" creationId="{2FD49BC3-E363-D15F-0DFB-E2BEE855E0E0}"/>
           </ac:cxnSpMkLst>
         </pc:cxnChg>
       </pc:sldChg>
@@ -633,53 +617,6 @@
           </ac:cxnSpMkLst>
         </pc:cxnChg>
       </pc:sldChg>
-      <pc:sldChg chg="addSp delSp modSp add del mod ord">
-        <pc:chgData name="Mathilde Annette Nicole Roulleau" userId="4ab294c6-1984-4b16-bc43-8e77deede0e4" providerId="ADAL" clId="{79810BCC-BAA2-4D46-8788-90936CCE2327}" dt="2026-02-23T21:41:52.572" v="9375" actId="47"/>
-        <pc:sldMkLst>
-          <pc:docMk/>
-          <pc:sldMk cId="1469990413" sldId="262"/>
-        </pc:sldMkLst>
-        <pc:spChg chg="mod">
-          <ac:chgData name="Mathilde Annette Nicole Roulleau" userId="4ab294c6-1984-4b16-bc43-8e77deede0e4" providerId="ADAL" clId="{79810BCC-BAA2-4D46-8788-90936CCE2327}" dt="2026-02-23T20:43:27.918" v="8960" actId="790"/>
-          <ac:spMkLst>
-            <pc:docMk/>
-            <pc:sldMk cId="1469990413" sldId="262"/>
-            <ac:spMk id="4" creationId="{8CD699C8-6EB1-00B6-8C26-78AB92E40581}"/>
-          </ac:spMkLst>
-        </pc:spChg>
-        <pc:grpChg chg="add mod">
-          <ac:chgData name="Mathilde Annette Nicole Roulleau" userId="4ab294c6-1984-4b16-bc43-8e77deede0e4" providerId="ADAL" clId="{79810BCC-BAA2-4D46-8788-90936CCE2327}" dt="2026-02-11T17:57:43.607" v="5152" actId="1076"/>
-          <ac:grpSpMkLst>
-            <pc:docMk/>
-            <pc:sldMk cId="1469990413" sldId="262"/>
-            <ac:grpSpMk id="5" creationId="{5AC42B1B-5740-C000-86C3-43BC9F155FCE}"/>
-          </ac:grpSpMkLst>
-        </pc:grpChg>
-        <pc:picChg chg="mod">
-          <ac:chgData name="Mathilde Annette Nicole Roulleau" userId="4ab294c6-1984-4b16-bc43-8e77deede0e4" providerId="ADAL" clId="{79810BCC-BAA2-4D46-8788-90936CCE2327}" dt="2026-02-11T17:57:35.712" v="5151"/>
-          <ac:picMkLst>
-            <pc:docMk/>
-            <pc:sldMk cId="1469990413" sldId="262"/>
-            <ac:picMk id="2" creationId="{70849D01-0EA2-9EB2-7B80-935D57FEB686}"/>
-          </ac:picMkLst>
-        </pc:picChg>
-        <pc:picChg chg="mod">
-          <ac:chgData name="Mathilde Annette Nicole Roulleau" userId="4ab294c6-1984-4b16-bc43-8e77deede0e4" providerId="ADAL" clId="{79810BCC-BAA2-4D46-8788-90936CCE2327}" dt="2026-02-11T17:57:35.712" v="5151"/>
-          <ac:picMkLst>
-            <pc:docMk/>
-            <pc:sldMk cId="1469990413" sldId="262"/>
-            <ac:picMk id="3" creationId="{3B1BB7E9-1EEE-5C52-EC85-FA6224AC3446}"/>
-          </ac:picMkLst>
-        </pc:picChg>
-        <pc:picChg chg="add mod">
-          <ac:chgData name="Mathilde Annette Nicole Roulleau" userId="4ab294c6-1984-4b16-bc43-8e77deede0e4" providerId="ADAL" clId="{79810BCC-BAA2-4D46-8788-90936CCE2327}" dt="2026-02-19T17:20:52.891" v="7277" actId="1076"/>
-          <ac:picMkLst>
-            <pc:docMk/>
-            <pc:sldMk cId="1469990413" sldId="262"/>
-            <ac:picMk id="7" creationId="{EABC3057-C329-2339-6659-4DC5A79EACB0}"/>
-          </ac:picMkLst>
-        </pc:picChg>
-      </pc:sldChg>
       <pc:sldChg chg="addSp modSp add mod ord modAnim">
         <pc:chgData name="Mathilde Annette Nicole Roulleau" userId="4ab294c6-1984-4b16-bc43-8e77deede0e4" providerId="ADAL" clId="{79810BCC-BAA2-4D46-8788-90936CCE2327}" dt="2026-02-23T20:43:27.918" v="8960" actId="790"/>
         <pc:sldMkLst>
@@ -712,7 +649,7 @@
         </pc:spChg>
       </pc:sldChg>
       <pc:sldChg chg="addSp delSp modSp add mod">
-        <pc:chgData name="Mathilde Annette Nicole Roulleau" userId="4ab294c6-1984-4b16-bc43-8e77deede0e4" providerId="ADAL" clId="{79810BCC-BAA2-4D46-8788-90936CCE2327}" dt="2026-02-23T20:43:27.918" v="8960" actId="790"/>
+        <pc:chgData name="Mathilde Annette Nicole Roulleau" userId="4ab294c6-1984-4b16-bc43-8e77deede0e4" providerId="ADAL" clId="{79810BCC-BAA2-4D46-8788-90936CCE2327}" dt="2026-02-27T15:30:31.046" v="9380" actId="1076"/>
         <pc:sldMkLst>
           <pc:docMk/>
           <pc:sldMk cId="1992619874" sldId="265"/>
@@ -726,23 +663,7 @@
           </ac:spMkLst>
         </pc:spChg>
         <pc:spChg chg="add mod">
-          <ac:chgData name="Mathilde Annette Nicole Roulleau" userId="4ab294c6-1984-4b16-bc43-8e77deede0e4" providerId="ADAL" clId="{79810BCC-BAA2-4D46-8788-90936CCE2327}" dt="2026-02-23T20:43:27.918" v="8960" actId="790"/>
-          <ac:spMkLst>
-            <pc:docMk/>
-            <pc:sldMk cId="1992619874" sldId="265"/>
-            <ac:spMk id="4" creationId="{47D1596D-EDD4-CA0C-AD76-D344579DF991}"/>
-          </ac:spMkLst>
-        </pc:spChg>
-        <pc:spChg chg="add mod">
-          <ac:chgData name="Mathilde Annette Nicole Roulleau" userId="4ab294c6-1984-4b16-bc43-8e77deede0e4" providerId="ADAL" clId="{79810BCC-BAA2-4D46-8788-90936CCE2327}" dt="2026-02-23T20:43:27.918" v="8960" actId="790"/>
-          <ac:spMkLst>
-            <pc:docMk/>
-            <pc:sldMk cId="1992619874" sldId="265"/>
-            <ac:spMk id="5" creationId="{A94B4D35-590E-22AF-6E56-1898147519ED}"/>
-          </ac:spMkLst>
-        </pc:spChg>
-        <pc:spChg chg="add mod">
-          <ac:chgData name="Mathilde Annette Nicole Roulleau" userId="4ab294c6-1984-4b16-bc43-8e77deede0e4" providerId="ADAL" clId="{79810BCC-BAA2-4D46-8788-90936CCE2327}" dt="2026-02-23T20:43:27.918" v="8960" actId="790"/>
+          <ac:chgData name="Mathilde Annette Nicole Roulleau" userId="4ab294c6-1984-4b16-bc43-8e77deede0e4" providerId="ADAL" clId="{79810BCC-BAA2-4D46-8788-90936CCE2327}" dt="2026-02-27T15:30:31.046" v="9380" actId="1076"/>
           <ac:spMkLst>
             <pc:docMk/>
             <pc:sldMk cId="1992619874" sldId="265"/>
@@ -750,7 +671,7 @@
           </ac:spMkLst>
         </pc:spChg>
         <pc:spChg chg="add mod">
-          <ac:chgData name="Mathilde Annette Nicole Roulleau" userId="4ab294c6-1984-4b16-bc43-8e77deede0e4" providerId="ADAL" clId="{79810BCC-BAA2-4D46-8788-90936CCE2327}" dt="2026-02-04T15:49:30.118" v="2049" actId="1076"/>
+          <ac:chgData name="Mathilde Annette Nicole Roulleau" userId="4ab294c6-1984-4b16-bc43-8e77deede0e4" providerId="ADAL" clId="{79810BCC-BAA2-4D46-8788-90936CCE2327}" dt="2026-02-27T15:30:31.046" v="9380" actId="1076"/>
           <ac:spMkLst>
             <pc:docMk/>
             <pc:sldMk cId="1992619874" sldId="265"/>
@@ -758,7 +679,7 @@
           </ac:spMkLst>
         </pc:spChg>
         <pc:spChg chg="mod">
-          <ac:chgData name="Mathilde Annette Nicole Roulleau" userId="4ab294c6-1984-4b16-bc43-8e77deede0e4" providerId="ADAL" clId="{79810BCC-BAA2-4D46-8788-90936CCE2327}" dt="2026-02-23T20:43:27.918" v="8960" actId="790"/>
+          <ac:chgData name="Mathilde Annette Nicole Roulleau" userId="4ab294c6-1984-4b16-bc43-8e77deede0e4" providerId="ADAL" clId="{79810BCC-BAA2-4D46-8788-90936CCE2327}" dt="2026-02-27T15:30:31.046" v="9380" actId="1076"/>
           <ac:spMkLst>
             <pc:docMk/>
             <pc:sldMk cId="1992619874" sldId="265"/>
@@ -766,7 +687,7 @@
           </ac:spMkLst>
         </pc:spChg>
         <pc:spChg chg="add mod">
-          <ac:chgData name="Mathilde Annette Nicole Roulleau" userId="4ab294c6-1984-4b16-bc43-8e77deede0e4" providerId="ADAL" clId="{79810BCC-BAA2-4D46-8788-90936CCE2327}" dt="2026-02-04T15:50:13.856" v="2060" actId="1037"/>
+          <ac:chgData name="Mathilde Annette Nicole Roulleau" userId="4ab294c6-1984-4b16-bc43-8e77deede0e4" providerId="ADAL" clId="{79810BCC-BAA2-4D46-8788-90936CCE2327}" dt="2026-02-27T15:30:26.562" v="9379" actId="1076"/>
           <ac:spMkLst>
             <pc:docMk/>
             <pc:sldMk cId="1992619874" sldId="265"/>
@@ -774,7 +695,7 @@
           </ac:spMkLst>
         </pc:spChg>
         <pc:spChg chg="add mod">
-          <ac:chgData name="Mathilde Annette Nicole Roulleau" userId="4ab294c6-1984-4b16-bc43-8e77deede0e4" providerId="ADAL" clId="{79810BCC-BAA2-4D46-8788-90936CCE2327}" dt="2026-02-23T20:43:27.918" v="8960" actId="790"/>
+          <ac:chgData name="Mathilde Annette Nicole Roulleau" userId="4ab294c6-1984-4b16-bc43-8e77deede0e4" providerId="ADAL" clId="{79810BCC-BAA2-4D46-8788-90936CCE2327}" dt="2026-02-27T15:30:31.046" v="9380" actId="1076"/>
           <ac:spMkLst>
             <pc:docMk/>
             <pc:sldMk cId="1992619874" sldId="265"/>
@@ -782,7 +703,7 @@
           </ac:spMkLst>
         </pc:spChg>
         <pc:spChg chg="add mod">
-          <ac:chgData name="Mathilde Annette Nicole Roulleau" userId="4ab294c6-1984-4b16-bc43-8e77deede0e4" providerId="ADAL" clId="{79810BCC-BAA2-4D46-8788-90936CCE2327}" dt="2026-02-04T15:52:41.527" v="2106" actId="1038"/>
+          <ac:chgData name="Mathilde Annette Nicole Roulleau" userId="4ab294c6-1984-4b16-bc43-8e77deede0e4" providerId="ADAL" clId="{79810BCC-BAA2-4D46-8788-90936CCE2327}" dt="2026-02-27T15:30:31.046" v="9380" actId="1076"/>
           <ac:spMkLst>
             <pc:docMk/>
             <pc:sldMk cId="1992619874" sldId="265"/>
@@ -790,23 +711,15 @@
           </ac:spMkLst>
         </pc:spChg>
         <pc:spChg chg="add mod">
-          <ac:chgData name="Mathilde Annette Nicole Roulleau" userId="4ab294c6-1984-4b16-bc43-8e77deede0e4" providerId="ADAL" clId="{79810BCC-BAA2-4D46-8788-90936CCE2327}" dt="2026-02-23T20:43:27.918" v="8960" actId="790"/>
+          <ac:chgData name="Mathilde Annette Nicole Roulleau" userId="4ab294c6-1984-4b16-bc43-8e77deede0e4" providerId="ADAL" clId="{79810BCC-BAA2-4D46-8788-90936CCE2327}" dt="2026-02-27T15:30:31.046" v="9380" actId="1076"/>
           <ac:spMkLst>
             <pc:docMk/>
             <pc:sldMk cId="1992619874" sldId="265"/>
             <ac:spMk id="26" creationId="{840601B5-6A0A-6449-54F1-1C4922DEF9F1}"/>
           </ac:spMkLst>
         </pc:spChg>
-        <pc:spChg chg="mod">
-          <ac:chgData name="Mathilde Annette Nicole Roulleau" userId="4ab294c6-1984-4b16-bc43-8e77deede0e4" providerId="ADAL" clId="{79810BCC-BAA2-4D46-8788-90936CCE2327}" dt="2026-02-23T20:43:27.918" v="8960" actId="790"/>
-          <ac:spMkLst>
-            <pc:docMk/>
-            <pc:sldMk cId="1992619874" sldId="265"/>
-            <ac:spMk id="27" creationId="{ACB0E111-6721-DF29-986A-4E488904B49C}"/>
-          </ac:spMkLst>
-        </pc:spChg>
         <pc:spChg chg="add mod">
-          <ac:chgData name="Mathilde Annette Nicole Roulleau" userId="4ab294c6-1984-4b16-bc43-8e77deede0e4" providerId="ADAL" clId="{79810BCC-BAA2-4D46-8788-90936CCE2327}" dt="2026-02-04T15:52:29.921" v="2099" actId="1076"/>
+          <ac:chgData name="Mathilde Annette Nicole Roulleau" userId="4ab294c6-1984-4b16-bc43-8e77deede0e4" providerId="ADAL" clId="{79810BCC-BAA2-4D46-8788-90936CCE2327}" dt="2026-02-27T15:30:31.046" v="9380" actId="1076"/>
           <ac:spMkLst>
             <pc:docMk/>
             <pc:sldMk cId="1992619874" sldId="265"/>
@@ -814,7 +727,7 @@
           </ac:spMkLst>
         </pc:spChg>
         <pc:spChg chg="add mod">
-          <ac:chgData name="Mathilde Annette Nicole Roulleau" userId="4ab294c6-1984-4b16-bc43-8e77deede0e4" providerId="ADAL" clId="{79810BCC-BAA2-4D46-8788-90936CCE2327}" dt="2026-02-23T20:43:27.918" v="8960" actId="790"/>
+          <ac:chgData name="Mathilde Annette Nicole Roulleau" userId="4ab294c6-1984-4b16-bc43-8e77deede0e4" providerId="ADAL" clId="{79810BCC-BAA2-4D46-8788-90936CCE2327}" dt="2026-02-27T15:30:31.046" v="9380" actId="1076"/>
           <ac:spMkLst>
             <pc:docMk/>
             <pc:sldMk cId="1992619874" sldId="265"/>
@@ -822,7 +735,7 @@
           </ac:spMkLst>
         </pc:spChg>
         <pc:spChg chg="add mod">
-          <ac:chgData name="Mathilde Annette Nicole Roulleau" userId="4ab294c6-1984-4b16-bc43-8e77deede0e4" providerId="ADAL" clId="{79810BCC-BAA2-4D46-8788-90936CCE2327}" dt="2026-02-23T20:43:27.918" v="8960" actId="790"/>
+          <ac:chgData name="Mathilde Annette Nicole Roulleau" userId="4ab294c6-1984-4b16-bc43-8e77deede0e4" providerId="ADAL" clId="{79810BCC-BAA2-4D46-8788-90936CCE2327}" dt="2026-02-27T15:30:31.046" v="9380" actId="1076"/>
           <ac:spMkLst>
             <pc:docMk/>
             <pc:sldMk cId="1992619874" sldId="265"/>
@@ -830,7 +743,7 @@
           </ac:spMkLst>
         </pc:spChg>
         <pc:spChg chg="add mod">
-          <ac:chgData name="Mathilde Annette Nicole Roulleau" userId="4ab294c6-1984-4b16-bc43-8e77deede0e4" providerId="ADAL" clId="{79810BCC-BAA2-4D46-8788-90936CCE2327}" dt="2026-02-23T20:43:27.918" v="8960" actId="790"/>
+          <ac:chgData name="Mathilde Annette Nicole Roulleau" userId="4ab294c6-1984-4b16-bc43-8e77deede0e4" providerId="ADAL" clId="{79810BCC-BAA2-4D46-8788-90936CCE2327}" dt="2026-02-27T15:30:31.046" v="9380" actId="1076"/>
           <ac:spMkLst>
             <pc:docMk/>
             <pc:sldMk cId="1992619874" sldId="265"/>
@@ -846,29 +759,13 @@
           </ac:picMkLst>
         </pc:picChg>
         <pc:picChg chg="mod">
-          <ac:chgData name="Mathilde Annette Nicole Roulleau" userId="4ab294c6-1984-4b16-bc43-8e77deede0e4" providerId="ADAL" clId="{79810BCC-BAA2-4D46-8788-90936CCE2327}" dt="2026-02-03T12:50:18.266" v="1548" actId="1076"/>
+          <ac:chgData name="Mathilde Annette Nicole Roulleau" userId="4ab294c6-1984-4b16-bc43-8e77deede0e4" providerId="ADAL" clId="{79810BCC-BAA2-4D46-8788-90936CCE2327}" dt="2026-02-27T15:30:26.562" v="9379" actId="1076"/>
           <ac:picMkLst>
             <pc:docMk/>
             <pc:sldMk cId="1992619874" sldId="265"/>
             <ac:picMk id="7" creationId="{8BAF7BB5-9D6C-AC53-A805-98533413F4B7}"/>
           </ac:picMkLst>
         </pc:picChg>
-        <pc:picChg chg="mod">
-          <ac:chgData name="Mathilde Annette Nicole Roulleau" userId="4ab294c6-1984-4b16-bc43-8e77deede0e4" providerId="ADAL" clId="{79810BCC-BAA2-4D46-8788-90936CCE2327}" dt="2026-02-03T12:50:12.738" v="1547" actId="1076"/>
-          <ac:picMkLst>
-            <pc:docMk/>
-            <pc:sldMk cId="1992619874" sldId="265"/>
-            <ac:picMk id="31" creationId="{C4026982-B4D3-091B-3435-0CC91D8EC49C}"/>
-          </ac:picMkLst>
-        </pc:picChg>
-        <pc:cxnChg chg="add mod">
-          <ac:chgData name="Mathilde Annette Nicole Roulleau" userId="4ab294c6-1984-4b16-bc43-8e77deede0e4" providerId="ADAL" clId="{79810BCC-BAA2-4D46-8788-90936CCE2327}" dt="2026-02-04T15:46:56.958" v="1953" actId="1076"/>
-          <ac:cxnSpMkLst>
-            <pc:docMk/>
-            <pc:sldMk cId="1992619874" sldId="265"/>
-            <ac:cxnSpMk id="6" creationId="{01880459-8407-4386-5A3E-E8490FFF7F7A}"/>
-          </ac:cxnSpMkLst>
-        </pc:cxnChg>
         <pc:cxnChg chg="add mod">
           <ac:chgData name="Mathilde Annette Nicole Roulleau" userId="4ab294c6-1984-4b16-bc43-8e77deede0e4" providerId="ADAL" clId="{79810BCC-BAA2-4D46-8788-90936CCE2327}" dt="2026-02-04T15:49:39.901" v="2052" actId="14100"/>
           <ac:cxnSpMkLst>
@@ -878,7 +775,7 @@
           </ac:cxnSpMkLst>
         </pc:cxnChg>
         <pc:cxnChg chg="add mod">
-          <ac:chgData name="Mathilde Annette Nicole Roulleau" userId="4ab294c6-1984-4b16-bc43-8e77deede0e4" providerId="ADAL" clId="{79810BCC-BAA2-4D46-8788-90936CCE2327}" dt="2026-02-04T15:50:13.856" v="2060" actId="1037"/>
+          <ac:chgData name="Mathilde Annette Nicole Roulleau" userId="4ab294c6-1984-4b16-bc43-8e77deede0e4" providerId="ADAL" clId="{79810BCC-BAA2-4D46-8788-90936CCE2327}" dt="2026-02-27T15:30:26.562" v="9379" actId="1076"/>
           <ac:cxnSpMkLst>
             <pc:docMk/>
             <pc:sldMk cId="1992619874" sldId="265"/>
@@ -2318,14 +2215,6 @@
             <ac:picMk id="6" creationId="{8289987A-C153-4295-7072-65A3C86B0F9C}"/>
           </ac:picMkLst>
         </pc:picChg>
-        <pc:picChg chg="add mod ord modCrop">
-          <ac:chgData name="Mathilde Annette Nicole Roulleau" userId="4ab294c6-1984-4b16-bc43-8e77deede0e4" providerId="ADAL" clId="{79810BCC-BAA2-4D46-8788-90936CCE2327}" dt="2026-02-23T07:20:44.357" v="7312" actId="732"/>
-          <ac:picMkLst>
-            <pc:docMk/>
-            <pc:sldMk cId="551368788" sldId="283"/>
-            <ac:picMk id="11" creationId="{4FF0B67D-DD4F-4726-0DC9-EC3157E82FAE}"/>
-          </ac:picMkLst>
-        </pc:picChg>
       </pc:sldChg>
       <pc:sldChg chg="addSp delSp modSp add mod modShow modNotesTx">
         <pc:chgData name="Mathilde Annette Nicole Roulleau" userId="4ab294c6-1984-4b16-bc43-8e77deede0e4" providerId="ADAL" clId="{79810BCC-BAA2-4D46-8788-90936CCE2327}" dt="2026-02-23T20:43:27.918" v="8960" actId="790"/>
@@ -4597,121 +4486,18 @@
           </ac:picMkLst>
         </pc:picChg>
       </pc:sldChg>
-      <pc:sldChg chg="addSp modSp add del mod ord">
-        <pc:chgData name="Mathilde Annette Nicole Roulleau" userId="4ab294c6-1984-4b16-bc43-8e77deede0e4" providerId="ADAL" clId="{79810BCC-BAA2-4D46-8788-90936CCE2327}" dt="2026-02-23T21:42:02.992" v="9377" actId="47"/>
-        <pc:sldMkLst>
-          <pc:docMk/>
-          <pc:sldMk cId="518473639" sldId="295"/>
-        </pc:sldMkLst>
-        <pc:spChg chg="mod">
-          <ac:chgData name="Mathilde Annette Nicole Roulleau" userId="4ab294c6-1984-4b16-bc43-8e77deede0e4" providerId="ADAL" clId="{79810BCC-BAA2-4D46-8788-90936CCE2327}" dt="2026-02-23T20:43:27.918" v="8960" actId="790"/>
-          <ac:spMkLst>
-            <pc:docMk/>
-            <pc:sldMk cId="518473639" sldId="295"/>
-            <ac:spMk id="4" creationId="{A0086693-FD19-29A4-661F-B6FC4A423721}"/>
-          </ac:spMkLst>
-        </pc:spChg>
-        <pc:spChg chg="add mod">
-          <ac:chgData name="Mathilde Annette Nicole Roulleau" userId="4ab294c6-1984-4b16-bc43-8e77deede0e4" providerId="ADAL" clId="{79810BCC-BAA2-4D46-8788-90936CCE2327}" dt="2026-02-23T20:43:27.918" v="8960" actId="790"/>
-          <ac:spMkLst>
-            <pc:docMk/>
-            <pc:sldMk cId="518473639" sldId="295"/>
-            <ac:spMk id="6" creationId="{8090EF2C-B247-62BB-F807-AB1597638EF8}"/>
-          </ac:spMkLst>
-        </pc:spChg>
-      </pc:sldChg>
       <pc:sldChg chg="delSp modSp add mod">
         <pc:chgData name="Mathilde Annette Nicole Roulleau" userId="4ab294c6-1984-4b16-bc43-8e77deede0e4" providerId="ADAL" clId="{79810BCC-BAA2-4D46-8788-90936CCE2327}" dt="2026-02-23T20:43:27.918" v="8960" actId="790"/>
         <pc:sldMkLst>
           <pc:docMk/>
           <pc:sldMk cId="3571708312" sldId="296"/>
         </pc:sldMkLst>
-        <pc:spChg chg="del">
-          <ac:chgData name="Mathilde Annette Nicole Roulleau" userId="4ab294c6-1984-4b16-bc43-8e77deede0e4" providerId="ADAL" clId="{79810BCC-BAA2-4D46-8788-90936CCE2327}" dt="2026-02-23T17:20:52.222" v="8837" actId="478"/>
-          <ac:spMkLst>
-            <pc:docMk/>
-            <pc:sldMk cId="3571708312" sldId="296"/>
-            <ac:spMk id="3" creationId="{2AE4E027-D764-E513-ECDB-8388E792720F}"/>
-          </ac:spMkLst>
-        </pc:spChg>
         <pc:spChg chg="mod">
           <ac:chgData name="Mathilde Annette Nicole Roulleau" userId="4ab294c6-1984-4b16-bc43-8e77deede0e4" providerId="ADAL" clId="{79810BCC-BAA2-4D46-8788-90936CCE2327}" dt="2026-02-23T20:43:27.918" v="8960" actId="790"/>
           <ac:spMkLst>
             <pc:docMk/>
             <pc:sldMk cId="3571708312" sldId="296"/>
             <ac:spMk id="4" creationId="{2A5D59A3-D581-D887-8138-2BE85079C3F0}"/>
-          </ac:spMkLst>
-        </pc:spChg>
-        <pc:spChg chg="del">
-          <ac:chgData name="Mathilde Annette Nicole Roulleau" userId="4ab294c6-1984-4b16-bc43-8e77deede0e4" providerId="ADAL" clId="{79810BCC-BAA2-4D46-8788-90936CCE2327}" dt="2026-02-23T17:20:52.222" v="8837" actId="478"/>
-          <ac:spMkLst>
-            <pc:docMk/>
-            <pc:sldMk cId="3571708312" sldId="296"/>
-            <ac:spMk id="32" creationId="{5AFD1F55-5044-15AC-5FE8-6D1AB30D6B65}"/>
-          </ac:spMkLst>
-        </pc:spChg>
-        <pc:spChg chg="del">
-          <ac:chgData name="Mathilde Annette Nicole Roulleau" userId="4ab294c6-1984-4b16-bc43-8e77deede0e4" providerId="ADAL" clId="{79810BCC-BAA2-4D46-8788-90936CCE2327}" dt="2026-02-23T17:20:52.222" v="8837" actId="478"/>
-          <ac:spMkLst>
-            <pc:docMk/>
-            <pc:sldMk cId="3571708312" sldId="296"/>
-            <ac:spMk id="33" creationId="{FDFD1F01-7CD1-EF5A-13AB-476E19E2BC11}"/>
-          </ac:spMkLst>
-        </pc:spChg>
-        <pc:spChg chg="del">
-          <ac:chgData name="Mathilde Annette Nicole Roulleau" userId="4ab294c6-1984-4b16-bc43-8e77deede0e4" providerId="ADAL" clId="{79810BCC-BAA2-4D46-8788-90936CCE2327}" dt="2026-02-23T17:20:52.222" v="8837" actId="478"/>
-          <ac:spMkLst>
-            <pc:docMk/>
-            <pc:sldMk cId="3571708312" sldId="296"/>
-            <ac:spMk id="57" creationId="{E27B99A2-8081-33B6-8169-A680B5417D03}"/>
-          </ac:spMkLst>
-        </pc:spChg>
-        <pc:spChg chg="del">
-          <ac:chgData name="Mathilde Annette Nicole Roulleau" userId="4ab294c6-1984-4b16-bc43-8e77deede0e4" providerId="ADAL" clId="{79810BCC-BAA2-4D46-8788-90936CCE2327}" dt="2026-02-23T17:20:52.222" v="8837" actId="478"/>
-          <ac:spMkLst>
-            <pc:docMk/>
-            <pc:sldMk cId="3571708312" sldId="296"/>
-            <ac:spMk id="63" creationId="{BD418FA4-1091-DADB-6A29-220027E54DD4}"/>
-          </ac:spMkLst>
-        </pc:spChg>
-        <pc:spChg chg="del">
-          <ac:chgData name="Mathilde Annette Nicole Roulleau" userId="4ab294c6-1984-4b16-bc43-8e77deede0e4" providerId="ADAL" clId="{79810BCC-BAA2-4D46-8788-90936CCE2327}" dt="2026-02-23T17:20:52.222" v="8837" actId="478"/>
-          <ac:spMkLst>
-            <pc:docMk/>
-            <pc:sldMk cId="3571708312" sldId="296"/>
-            <ac:spMk id="1024" creationId="{326445D0-EDC9-838B-1324-54F26AAF37AA}"/>
-          </ac:spMkLst>
-        </pc:spChg>
-        <pc:spChg chg="del">
-          <ac:chgData name="Mathilde Annette Nicole Roulleau" userId="4ab294c6-1984-4b16-bc43-8e77deede0e4" providerId="ADAL" clId="{79810BCC-BAA2-4D46-8788-90936CCE2327}" dt="2026-02-23T17:20:52.222" v="8837" actId="478"/>
-          <ac:spMkLst>
-            <pc:docMk/>
-            <pc:sldMk cId="3571708312" sldId="296"/>
-            <ac:spMk id="1028" creationId="{5763A9FD-7660-4332-7C52-409F055F3A5F}"/>
-          </ac:spMkLst>
-        </pc:spChg>
-        <pc:spChg chg="del">
-          <ac:chgData name="Mathilde Annette Nicole Roulleau" userId="4ab294c6-1984-4b16-bc43-8e77deede0e4" providerId="ADAL" clId="{79810BCC-BAA2-4D46-8788-90936CCE2327}" dt="2026-02-23T17:20:52.222" v="8837" actId="478"/>
-          <ac:spMkLst>
-            <pc:docMk/>
-            <pc:sldMk cId="3571708312" sldId="296"/>
-            <ac:spMk id="1029" creationId="{5398C751-7D23-3C0F-0621-7FFCE5BDFAF5}"/>
-          </ac:spMkLst>
-        </pc:spChg>
-        <pc:spChg chg="del">
-          <ac:chgData name="Mathilde Annette Nicole Roulleau" userId="4ab294c6-1984-4b16-bc43-8e77deede0e4" providerId="ADAL" clId="{79810BCC-BAA2-4D46-8788-90936CCE2327}" dt="2026-02-23T17:20:52.222" v="8837" actId="478"/>
-          <ac:spMkLst>
-            <pc:docMk/>
-            <pc:sldMk cId="3571708312" sldId="296"/>
-            <ac:spMk id="1035" creationId="{58343174-DA32-5806-4E8B-05919A8BD95C}"/>
-          </ac:spMkLst>
-        </pc:spChg>
-        <pc:spChg chg="del">
-          <ac:chgData name="Mathilde Annette Nicole Roulleau" userId="4ab294c6-1984-4b16-bc43-8e77deede0e4" providerId="ADAL" clId="{79810BCC-BAA2-4D46-8788-90936CCE2327}" dt="2026-02-23T17:20:52.222" v="8837" actId="478"/>
-          <ac:spMkLst>
-            <pc:docMk/>
-            <pc:sldMk cId="3571708312" sldId="296"/>
-            <ac:spMk id="1036" creationId="{9CFB3D03-C562-66AF-B516-FF80736D694D}"/>
           </ac:spMkLst>
         </pc:spChg>
       </pc:sldChg>
@@ -4729,124 +4515,12 @@
             <ac:spMk id="2" creationId="{E96D28D8-4D2D-5AAB-59FB-DCCE04F90D8A}"/>
           </ac:spMkLst>
         </pc:spChg>
-        <pc:spChg chg="add">
-          <ac:chgData name="Mathilde Annette Nicole Roulleau" userId="4ab294c6-1984-4b16-bc43-8e77deede0e4" providerId="ADAL" clId="{79810BCC-BAA2-4D46-8788-90936CCE2327}" dt="2026-02-23T21:03:26.391" v="9105"/>
-          <ac:spMkLst>
-            <pc:docMk/>
-            <pc:sldMk cId="210965434" sldId="297"/>
-            <ac:spMk id="3" creationId="{546BA6FE-4713-B426-4B18-802957BE3A55}"/>
-          </ac:spMkLst>
-        </pc:spChg>
-        <pc:spChg chg="del">
-          <ac:chgData name="Mathilde Annette Nicole Roulleau" userId="4ab294c6-1984-4b16-bc43-8e77deede0e4" providerId="ADAL" clId="{79810BCC-BAA2-4D46-8788-90936CCE2327}" dt="2026-02-23T17:30:13.441" v="8863" actId="478"/>
-          <ac:spMkLst>
-            <pc:docMk/>
-            <pc:sldMk cId="210965434" sldId="297"/>
-            <ac:spMk id="3" creationId="{EEE950FC-AFEA-C447-D21F-295FC5E556B7}"/>
-          </ac:spMkLst>
-        </pc:spChg>
         <pc:spChg chg="mod">
           <ac:chgData name="Mathilde Annette Nicole Roulleau" userId="4ab294c6-1984-4b16-bc43-8e77deede0e4" providerId="ADAL" clId="{79810BCC-BAA2-4D46-8788-90936CCE2327}" dt="2026-02-23T21:31:32.373" v="9337" actId="1076"/>
           <ac:spMkLst>
             <pc:docMk/>
             <pc:sldMk cId="210965434" sldId="297"/>
             <ac:spMk id="4" creationId="{A6AEE22B-67F4-5969-A91B-DB0FCC675827}"/>
-          </ac:spMkLst>
-        </pc:spChg>
-        <pc:spChg chg="add">
-          <ac:chgData name="Mathilde Annette Nicole Roulleau" userId="4ab294c6-1984-4b16-bc43-8e77deede0e4" providerId="ADAL" clId="{79810BCC-BAA2-4D46-8788-90936CCE2327}" dt="2026-02-23T21:03:31.905" v="9107"/>
-          <ac:spMkLst>
-            <pc:docMk/>
-            <pc:sldMk cId="210965434" sldId="297"/>
-            <ac:spMk id="5" creationId="{16107973-FD68-76E4-7D66-1FBEFA62F398}"/>
-          </ac:spMkLst>
-        </pc:spChg>
-        <pc:spChg chg="add">
-          <ac:chgData name="Mathilde Annette Nicole Roulleau" userId="4ab294c6-1984-4b16-bc43-8e77deede0e4" providerId="ADAL" clId="{79810BCC-BAA2-4D46-8788-90936CCE2327}" dt="2026-02-23T21:30:39.683" v="9319"/>
-          <ac:spMkLst>
-            <pc:docMk/>
-            <pc:sldMk cId="210965434" sldId="297"/>
-            <ac:spMk id="6" creationId="{16F3F2E6-F150-CB26-D28D-2DF556E119BE}"/>
-          </ac:spMkLst>
-        </pc:spChg>
-        <pc:spChg chg="add mod">
-          <ac:chgData name="Mathilde Annette Nicole Roulleau" userId="4ab294c6-1984-4b16-bc43-8e77deede0e4" providerId="ADAL" clId="{79810BCC-BAA2-4D46-8788-90936CCE2327}" dt="2026-02-23T21:30:44.962" v="9322"/>
-          <ac:spMkLst>
-            <pc:docMk/>
-            <pc:sldMk cId="210965434" sldId="297"/>
-            <ac:spMk id="7" creationId="{81C9DE2C-619F-A0D8-1503-FC68C67373BD}"/>
-          </ac:spMkLst>
-        </pc:spChg>
-        <pc:spChg chg="del">
-          <ac:chgData name="Mathilde Annette Nicole Roulleau" userId="4ab294c6-1984-4b16-bc43-8e77deede0e4" providerId="ADAL" clId="{79810BCC-BAA2-4D46-8788-90936CCE2327}" dt="2026-02-23T17:30:13.441" v="8863" actId="478"/>
-          <ac:spMkLst>
-            <pc:docMk/>
-            <pc:sldMk cId="210965434" sldId="297"/>
-            <ac:spMk id="10" creationId="{805DAF94-9801-5687-85D5-A33E53F1E8E4}"/>
-          </ac:spMkLst>
-        </pc:spChg>
-        <pc:spChg chg="del">
-          <ac:chgData name="Mathilde Annette Nicole Roulleau" userId="4ab294c6-1984-4b16-bc43-8e77deede0e4" providerId="ADAL" clId="{79810BCC-BAA2-4D46-8788-90936CCE2327}" dt="2026-02-23T17:30:13.441" v="8863" actId="478"/>
-          <ac:spMkLst>
-            <pc:docMk/>
-            <pc:sldMk cId="210965434" sldId="297"/>
-            <ac:spMk id="32" creationId="{C6AF0251-3C44-0F9A-EAFD-B7F59CB51887}"/>
-          </ac:spMkLst>
-        </pc:spChg>
-        <pc:spChg chg="del">
-          <ac:chgData name="Mathilde Annette Nicole Roulleau" userId="4ab294c6-1984-4b16-bc43-8e77deede0e4" providerId="ADAL" clId="{79810BCC-BAA2-4D46-8788-90936CCE2327}" dt="2026-02-23T17:30:13.441" v="8863" actId="478"/>
-          <ac:spMkLst>
-            <pc:docMk/>
-            <pc:sldMk cId="210965434" sldId="297"/>
-            <ac:spMk id="45" creationId="{E0601418-F6C9-D928-85F0-79470804EF20}"/>
-          </ac:spMkLst>
-        </pc:spChg>
-        <pc:spChg chg="del">
-          <ac:chgData name="Mathilde Annette Nicole Roulleau" userId="4ab294c6-1984-4b16-bc43-8e77deede0e4" providerId="ADAL" clId="{79810BCC-BAA2-4D46-8788-90936CCE2327}" dt="2026-02-23T17:30:13.441" v="8863" actId="478"/>
-          <ac:spMkLst>
-            <pc:docMk/>
-            <pc:sldMk cId="210965434" sldId="297"/>
-            <ac:spMk id="59" creationId="{1B1DFFEC-4E59-E98E-3881-B83974DA9336}"/>
-          </ac:spMkLst>
-        </pc:spChg>
-        <pc:spChg chg="del">
-          <ac:chgData name="Mathilde Annette Nicole Roulleau" userId="4ab294c6-1984-4b16-bc43-8e77deede0e4" providerId="ADAL" clId="{79810BCC-BAA2-4D46-8788-90936CCE2327}" dt="2026-02-23T17:30:13.441" v="8863" actId="478"/>
-          <ac:spMkLst>
-            <pc:docMk/>
-            <pc:sldMk cId="210965434" sldId="297"/>
-            <ac:spMk id="1024" creationId="{2CD37F27-3D97-48AE-CA80-9FBDF6D82046}"/>
-          </ac:spMkLst>
-        </pc:spChg>
-        <pc:spChg chg="del">
-          <ac:chgData name="Mathilde Annette Nicole Roulleau" userId="4ab294c6-1984-4b16-bc43-8e77deede0e4" providerId="ADAL" clId="{79810BCC-BAA2-4D46-8788-90936CCE2327}" dt="2026-02-23T17:30:13.441" v="8863" actId="478"/>
-          <ac:spMkLst>
-            <pc:docMk/>
-            <pc:sldMk cId="210965434" sldId="297"/>
-            <ac:spMk id="1031" creationId="{E7E5C64A-864E-B537-713E-27DFBD1B361D}"/>
-          </ac:spMkLst>
-        </pc:spChg>
-        <pc:spChg chg="del">
-          <ac:chgData name="Mathilde Annette Nicole Roulleau" userId="4ab294c6-1984-4b16-bc43-8e77deede0e4" providerId="ADAL" clId="{79810BCC-BAA2-4D46-8788-90936CCE2327}" dt="2026-02-23T17:30:13.441" v="8863" actId="478"/>
-          <ac:spMkLst>
-            <pc:docMk/>
-            <pc:sldMk cId="210965434" sldId="297"/>
-            <ac:spMk id="1034" creationId="{392DA5F3-3DE1-EF67-81C3-AECC3D5364F0}"/>
-          </ac:spMkLst>
-        </pc:spChg>
-        <pc:spChg chg="del">
-          <ac:chgData name="Mathilde Annette Nicole Roulleau" userId="4ab294c6-1984-4b16-bc43-8e77deede0e4" providerId="ADAL" clId="{79810BCC-BAA2-4D46-8788-90936CCE2327}" dt="2026-02-23T17:30:13.441" v="8863" actId="478"/>
-          <ac:spMkLst>
-            <pc:docMk/>
-            <pc:sldMk cId="210965434" sldId="297"/>
-            <ac:spMk id="1035" creationId="{4460791C-3EA2-5024-A593-6BD3C87B7A26}"/>
-          </ac:spMkLst>
-        </pc:spChg>
-        <pc:spChg chg="del">
-          <ac:chgData name="Mathilde Annette Nicole Roulleau" userId="4ab294c6-1984-4b16-bc43-8e77deede0e4" providerId="ADAL" clId="{79810BCC-BAA2-4D46-8788-90936CCE2327}" dt="2026-02-23T17:30:13.441" v="8863" actId="478"/>
-          <ac:spMkLst>
-            <pc:docMk/>
-            <pc:sldMk cId="210965434" sldId="297"/>
-            <ac:spMk id="1038" creationId="{64AA9DCB-203E-7B33-7479-C32213D7963D}"/>
           </ac:spMkLst>
         </pc:spChg>
       </pc:sldChg>
@@ -4952,7 +4626,7 @@
           <a:p>
             <a:fld id="{5B81A728-E1E5-4F15-9DCD-66CEAF78F37C}" type="datetimeFigureOut">
               <a:rPr lang="fr-FR" smtClean="0"/>
-              <a:t>24/02/2026</a:t>
+              <a:t>27/02/2026</a:t>
             </a:fld>
             <a:endParaRPr lang="fr-FR"/>
           </a:p>
@@ -8490,7 +8164,7 @@
           <a:p>
             <a:fld id="{B31605AF-44F8-4C57-B945-CB0A72E9DB1D}" type="datetimeFigureOut">
               <a:rPr lang="fr-FR" smtClean="0"/>
-              <a:t>24/02/2026</a:t>
+              <a:t>27/02/2026</a:t>
             </a:fld>
             <a:endParaRPr lang="fr-FR"/>
           </a:p>
@@ -8688,7 +8362,7 @@
           <a:p>
             <a:fld id="{B31605AF-44F8-4C57-B945-CB0A72E9DB1D}" type="datetimeFigureOut">
               <a:rPr lang="fr-FR" smtClean="0"/>
-              <a:t>24/02/2026</a:t>
+              <a:t>27/02/2026</a:t>
             </a:fld>
             <a:endParaRPr lang="fr-FR"/>
           </a:p>
@@ -8896,7 +8570,7 @@
           <a:p>
             <a:fld id="{B31605AF-44F8-4C57-B945-CB0A72E9DB1D}" type="datetimeFigureOut">
               <a:rPr lang="fr-FR" smtClean="0"/>
-              <a:t>24/02/2026</a:t>
+              <a:t>27/02/2026</a:t>
             </a:fld>
             <a:endParaRPr lang="fr-FR"/>
           </a:p>
@@ -9094,7 +8768,7 @@
           <a:p>
             <a:fld id="{B31605AF-44F8-4C57-B945-CB0A72E9DB1D}" type="datetimeFigureOut">
               <a:rPr lang="fr-FR" smtClean="0"/>
-              <a:t>24/02/2026</a:t>
+              <a:t>27/02/2026</a:t>
             </a:fld>
             <a:endParaRPr lang="fr-FR"/>
           </a:p>
@@ -9369,7 +9043,7 @@
           <a:p>
             <a:fld id="{B31605AF-44F8-4C57-B945-CB0A72E9DB1D}" type="datetimeFigureOut">
               <a:rPr lang="fr-FR" smtClean="0"/>
-              <a:t>24/02/2026</a:t>
+              <a:t>27/02/2026</a:t>
             </a:fld>
             <a:endParaRPr lang="fr-FR"/>
           </a:p>
@@ -9634,7 +9308,7 @@
           <a:p>
             <a:fld id="{B31605AF-44F8-4C57-B945-CB0A72E9DB1D}" type="datetimeFigureOut">
               <a:rPr lang="fr-FR" smtClean="0"/>
-              <a:t>24/02/2026</a:t>
+              <a:t>27/02/2026</a:t>
             </a:fld>
             <a:endParaRPr lang="fr-FR"/>
           </a:p>
@@ -10046,7 +9720,7 @@
           <a:p>
             <a:fld id="{B31605AF-44F8-4C57-B945-CB0A72E9DB1D}" type="datetimeFigureOut">
               <a:rPr lang="fr-FR" smtClean="0"/>
-              <a:t>24/02/2026</a:t>
+              <a:t>27/02/2026</a:t>
             </a:fld>
             <a:endParaRPr lang="fr-FR"/>
           </a:p>
@@ -10187,7 +9861,7 @@
           <a:p>
             <a:fld id="{B31605AF-44F8-4C57-B945-CB0A72E9DB1D}" type="datetimeFigureOut">
               <a:rPr lang="fr-FR" smtClean="0"/>
-              <a:t>24/02/2026</a:t>
+              <a:t>27/02/2026</a:t>
             </a:fld>
             <a:endParaRPr lang="fr-FR"/>
           </a:p>
@@ -10300,7 +9974,7 @@
           <a:p>
             <a:fld id="{B31605AF-44F8-4C57-B945-CB0A72E9DB1D}" type="datetimeFigureOut">
               <a:rPr lang="fr-FR" smtClean="0"/>
-              <a:t>24/02/2026</a:t>
+              <a:t>27/02/2026</a:t>
             </a:fld>
             <a:endParaRPr lang="fr-FR"/>
           </a:p>
@@ -10611,7 +10285,7 @@
           <a:p>
             <a:fld id="{B31605AF-44F8-4C57-B945-CB0A72E9DB1D}" type="datetimeFigureOut">
               <a:rPr lang="fr-FR" smtClean="0"/>
-              <a:t>24/02/2026</a:t>
+              <a:t>27/02/2026</a:t>
             </a:fld>
             <a:endParaRPr lang="fr-FR"/>
           </a:p>
@@ -10899,7 +10573,7 @@
           <a:p>
             <a:fld id="{B31605AF-44F8-4C57-B945-CB0A72E9DB1D}" type="datetimeFigureOut">
               <a:rPr lang="fr-FR" smtClean="0"/>
-              <a:t>24/02/2026</a:t>
+              <a:t>27/02/2026</a:t>
             </a:fld>
             <a:endParaRPr lang="fr-FR"/>
           </a:p>
@@ -11140,7 +10814,7 @@
           <a:p>
             <a:fld id="{B31605AF-44F8-4C57-B945-CB0A72E9DB1D}" type="datetimeFigureOut">
               <a:rPr lang="fr-FR" smtClean="0"/>
-              <a:t>24/02/2026</a:t>
+              <a:t>27/02/2026</a:t>
             </a:fld>
             <a:endParaRPr lang="fr-FR"/>
           </a:p>
@@ -12330,7 +12004,7 @@
         </p:nvSpPr>
         <p:spPr>
           <a:xfrm>
-            <a:off x="4027174" y="2320082"/>
+            <a:off x="3578601" y="2440852"/>
             <a:ext cx="6093500" cy="369332"/>
           </a:xfrm>
           <a:prstGeom prst="rect">
@@ -12386,7 +12060,7 @@
         </p:blipFill>
         <p:spPr>
           <a:xfrm>
-            <a:off x="2047051" y="2784767"/>
+            <a:off x="1598478" y="2905537"/>
             <a:ext cx="3893159" cy="2833189"/>
           </a:xfrm>
           <a:prstGeom prst="rect">
@@ -12416,7 +12090,7 @@
         </p:blipFill>
         <p:spPr>
           <a:xfrm>
-            <a:off x="5780866" y="2784768"/>
+            <a:off x="5900134" y="2967099"/>
             <a:ext cx="3847171" cy="2833188"/>
           </a:xfrm>
           <a:prstGeom prst="rect">
@@ -12545,7 +12219,7 @@
         </p:nvSpPr>
         <p:spPr>
           <a:xfrm>
-            <a:off x="2327857" y="2682272"/>
+            <a:off x="1879284" y="2803042"/>
             <a:ext cx="381000" cy="344024"/>
           </a:xfrm>
           <a:prstGeom prst="ellipse">
@@ -12599,7 +12273,7 @@
         </p:nvSpPr>
         <p:spPr>
           <a:xfrm>
-            <a:off x="2604125" y="1949940"/>
+            <a:off x="2155552" y="2070710"/>
             <a:ext cx="1364105" cy="646331"/>
           </a:xfrm>
           <a:prstGeom prst="rect">
@@ -12644,7 +12318,7 @@
         </p:nvCxnSpPr>
         <p:spPr>
           <a:xfrm rot="5400000">
-            <a:off x="2419145" y="2323054"/>
+            <a:off x="1970572" y="2443824"/>
             <a:ext cx="433638" cy="145786"/>
           </a:xfrm>
           <a:prstGeom prst="curvedConnector3">
@@ -12690,7 +12364,7 @@
         </p:nvSpPr>
         <p:spPr>
           <a:xfrm>
-            <a:off x="6115604" y="2724167"/>
+            <a:off x="6234872" y="2906498"/>
             <a:ext cx="381000" cy="344024"/>
           </a:xfrm>
           <a:prstGeom prst="ellipse">
@@ -12744,7 +12418,7 @@
         </p:nvSpPr>
         <p:spPr>
           <a:xfrm>
-            <a:off x="6430093" y="1987436"/>
+            <a:off x="6549361" y="2169767"/>
             <a:ext cx="1364105" cy="646331"/>
           </a:xfrm>
           <a:prstGeom prst="rect">
@@ -12789,7 +12463,7 @@
         </p:nvCxnSpPr>
         <p:spPr>
           <a:xfrm rot="5400000">
-            <a:off x="6206892" y="2364949"/>
+            <a:off x="6326160" y="2547280"/>
             <a:ext cx="433638" cy="145786"/>
           </a:xfrm>
           <a:prstGeom prst="curvedConnector3">
@@ -12835,7 +12509,7 @@
         </p:nvSpPr>
         <p:spPr>
           <a:xfrm rot="1115779">
-            <a:off x="5425712" y="3135934"/>
+            <a:off x="4977139" y="3256704"/>
             <a:ext cx="336711" cy="931186"/>
           </a:xfrm>
           <a:prstGeom prst="ellipse">
@@ -12887,7 +12561,7 @@
         </p:nvSpPr>
         <p:spPr>
           <a:xfrm rot="2439655">
-            <a:off x="8769287" y="3781547"/>
+            <a:off x="8888555" y="3963878"/>
             <a:ext cx="454478" cy="838028"/>
           </a:xfrm>
           <a:prstGeom prst="ellipse">
@@ -12939,7 +12613,7 @@
         </p:nvSpPr>
         <p:spPr>
           <a:xfrm rot="4177446">
-            <a:off x="2887337" y="4015971"/>
+            <a:off x="2438764" y="4136741"/>
             <a:ext cx="327939" cy="1149245"/>
           </a:xfrm>
           <a:prstGeom prst="ellipse">
@@ -12991,7 +12665,7 @@
         </p:nvSpPr>
         <p:spPr>
           <a:xfrm rot="5983642">
-            <a:off x="8915534" y="3364659"/>
+            <a:off x="9034802" y="3546990"/>
             <a:ext cx="913643" cy="308977"/>
           </a:xfrm>
           <a:prstGeom prst="ellipse">
@@ -13043,7 +12717,7 @@
         </p:nvSpPr>
         <p:spPr>
           <a:xfrm>
-            <a:off x="3981750" y="2846329"/>
+            <a:off x="3533177" y="2967099"/>
             <a:ext cx="1364105" cy="646331"/>
           </a:xfrm>
           <a:prstGeom prst="rect">
@@ -13086,7 +12760,7 @@
         </p:nvCxnSpPr>
         <p:spPr>
           <a:xfrm rot="16200000" flipH="1">
-            <a:off x="5091051" y="3077165"/>
+            <a:off x="4642478" y="3197935"/>
             <a:ext cx="387253" cy="277169"/>
           </a:xfrm>
           <a:prstGeom prst="curvedConnector3">
@@ -13130,7 +12804,7 @@
         </p:nvSpPr>
         <p:spPr>
           <a:xfrm>
-            <a:off x="3616524" y="4486538"/>
+            <a:off x="3167951" y="4607308"/>
             <a:ext cx="1364105" cy="369332"/>
           </a:xfrm>
           <a:prstGeom prst="rect">
@@ -13173,7 +12847,7 @@
         </p:nvCxnSpPr>
         <p:spPr>
           <a:xfrm rot="10800000">
-            <a:off x="3607427" y="4363173"/>
+            <a:off x="3158854" y="4483943"/>
             <a:ext cx="548342" cy="149373"/>
           </a:xfrm>
           <a:prstGeom prst="curvedConnector3">
